--- a/docs/prototype/changE-原型图.pptx
+++ b/docs/prototype/changE-原型图.pptx
@@ -3112,7 +3112,7 @@
             <a:avLst/>
           </a:prstGeom>
           <a:solidFill>
-            <a:srgbClr val="0B0E11"/>
+            <a:srgbClr val="0B0C0B"/>
           </a:solidFill>
           <a:ln>
             <a:noFill/>
@@ -3141,7 +3141,7 @@
             <a:avLst/>
           </a:prstGeom>
           <a:solidFill>
-            <a:srgbClr val="E0453A"/>
+            <a:srgbClr val="D7FF3F"/>
           </a:solidFill>
           <a:ln>
             <a:noFill/>
@@ -3181,7 +3181,7 @@
             <a:r>
               <a:rPr sz="950" b="0">
                 <a:solidFill>
-                  <a:srgbClr val="4D5762"/>
+                  <a:srgbClr val="4B4F4B"/>
                 </a:solidFill>
                 <a:latin typeface="Microsoft YaHei"/>
                 <a:ea typeface="Consolas"/>
@@ -3218,7 +3218,7 @@
             <a:r>
               <a:rPr sz="7200" b="1">
                 <a:solidFill>
-                  <a:srgbClr val="E9EDF1"/>
+                  <a:srgbClr val="F2F2EF"/>
                 </a:solidFill>
                 <a:latin typeface="Consolas"/>
                 <a:ea typeface="Consolas"/>
@@ -3255,7 +3255,7 @@
             <a:r>
               <a:rPr sz="2100" b="0">
                 <a:solidFill>
-                  <a:srgbClr val="E9EDF1"/>
+                  <a:srgbClr val="F2F2EF"/>
                 </a:solidFill>
                 <a:latin typeface="Microsoft YaHei"/>
                 <a:ea typeface="Consolas"/>
@@ -3281,7 +3281,7 @@
             <a:avLst/>
           </a:prstGeom>
           <a:solidFill>
-            <a:srgbClr val="E0453A"/>
+            <a:srgbClr val="D7FF3F"/>
           </a:solidFill>
           <a:ln>
             <a:noFill/>
@@ -3328,7 +3328,7 @@
             <a:r>
               <a:rPr sz="1250" b="0">
                 <a:solidFill>
-                  <a:srgbClr val="7F8A95"/>
+                  <a:srgbClr val="7E827E"/>
                 </a:solidFill>
                 <a:latin typeface="Microsoft YaHei"/>
                 <a:ea typeface="Consolas"/>
@@ -3349,7 +3349,7 @@
             <a:r>
               <a:rPr sz="1250" b="0">
                 <a:solidFill>
-                  <a:srgbClr val="7F8A95"/>
+                  <a:srgbClr val="7E827E"/>
                 </a:solidFill>
                 <a:latin typeface="Microsoft YaHei"/>
                 <a:ea typeface="Consolas"/>
@@ -3370,7 +3370,7 @@
             <a:r>
               <a:rPr sz="1250" b="0">
                 <a:solidFill>
-                  <a:srgbClr val="7F8A95"/>
+                  <a:srgbClr val="7E827E"/>
                 </a:solidFill>
                 <a:latin typeface="Microsoft YaHei"/>
                 <a:ea typeface="Consolas"/>
@@ -3389,8 +3389,8 @@
         </p:nvSpPr>
         <p:spPr>
           <a:xfrm>
-            <a:off x="822960" y="5138928"/>
-            <a:ext cx="4480560" cy="548640"/>
+            <a:off x="822960" y="5029200"/>
+            <a:ext cx="4480560" cy="822960"/>
           </a:xfrm>
           <a:prstGeom prst="rect">
             <a:avLst/>
@@ -3405,16 +3405,16 @@
           <a:p>
             <a:pPr algn="l"/>
             <a:r>
-              <a:rPr sz="1100" b="0">
-                <a:solidFill>
-                  <a:srgbClr val="4D5762"/>
+              <a:rPr sz="1050" b="0">
+                <a:solidFill>
+                  <a:srgbClr val="4B4F4B"/>
                 </a:solidFill>
                 <a:latin typeface="Microsoft YaHei"/>
                 <a:ea typeface="Consolas"/>
                 <a:cs typeface="Consolas"/>
               </a:rPr>
-              <a:t>这七张界面是 HTML 一比一渲染的，
-不是手绘示意图。</a:t>
+              <a:t>风格参考 LZheng0411/Lzheng-fitness 的 workbench-template。
+七张界面是 HTML 一比一渲染的，不是手绘示意图。</a:t>
             </a:r>
           </a:p>
         </p:txBody>
@@ -3434,7 +3434,7 @@
             <a:avLst/>
           </a:prstGeom>
           <a:solidFill>
-            <a:srgbClr val="2F3944"/>
+            <a:srgbClr val="2B2F2E"/>
           </a:solidFill>
           <a:ln>
             <a:noFill/>
@@ -3498,7 +3498,7 @@
             <a:r>
               <a:rPr sz="1000" b="0">
                 <a:solidFill>
-                  <a:srgbClr val="4D5762"/>
+                  <a:srgbClr val="4B4F4B"/>
                 </a:solidFill>
                 <a:latin typeface="Microsoft YaHei"/>
                 <a:ea typeface="Consolas"/>
@@ -3535,7 +3535,7 @@
             <a:r>
               <a:rPr sz="1000" b="0">
                 <a:solidFill>
-                  <a:srgbClr val="4D5762"/>
+                  <a:srgbClr val="4B4F4B"/>
                 </a:solidFill>
                 <a:latin typeface="Consolas"/>
                 <a:ea typeface="Consolas"/>
@@ -3579,7 +3579,7 @@
             <a:avLst/>
           </a:prstGeom>
           <a:solidFill>
-            <a:srgbClr val="0B0E11"/>
+            <a:srgbClr val="0B0C0B"/>
           </a:solidFill>
           <a:ln>
             <a:noFill/>
@@ -3619,7 +3619,7 @@
             <a:r>
               <a:rPr sz="950" b="0">
                 <a:solidFill>
-                  <a:srgbClr val="4D5762"/>
+                  <a:srgbClr val="4B4F4B"/>
                 </a:solidFill>
                 <a:latin typeface="Microsoft YaHei"/>
                 <a:ea typeface="Consolas"/>
@@ -3656,7 +3656,7 @@
             <a:r>
               <a:rPr sz="2800" b="1">
                 <a:solidFill>
-                  <a:srgbClr val="E9EDF1"/>
+                  <a:srgbClr val="F2F2EF"/>
                 </a:solidFill>
                 <a:latin typeface="Microsoft YaHei"/>
                 <a:ea typeface="Consolas"/>
@@ -3693,7 +3693,7 @@
             <a:r>
               <a:rPr sz="1250" b="0">
                 <a:solidFill>
-                  <a:srgbClr val="7F8A95"/>
+                  <a:srgbClr val="7E827E"/>
                 </a:solidFill>
                 <a:latin typeface="Microsoft YaHei"/>
                 <a:ea typeface="Consolas"/>
@@ -3719,7 +3719,7 @@
             <a:avLst/>
           </a:prstGeom>
           <a:solidFill>
-            <a:srgbClr val="E0453A"/>
+            <a:srgbClr val="D7FF3F"/>
           </a:solidFill>
           <a:ln>
             <a:noFill/>
@@ -3748,7 +3748,7 @@
             <a:avLst/>
           </a:prstGeom>
           <a:solidFill>
-            <a:srgbClr val="11151A"/>
+            <a:srgbClr val="131413"/>
           </a:solidFill>
           <a:ln>
             <a:noFill/>
@@ -3777,7 +3777,7 @@
             <a:avLst/>
           </a:prstGeom>
           <a:solidFill>
-            <a:srgbClr val="E0453A"/>
+            <a:srgbClr val="D7FF3F"/>
           </a:solidFill>
           <a:ln>
             <a:noFill/>
@@ -3817,7 +3817,7 @@
             <a:r>
               <a:rPr sz="1400" b="1">
                 <a:solidFill>
-                  <a:srgbClr val="E9EDF1"/>
+                  <a:srgbClr val="F2F2EF"/>
                 </a:solidFill>
                 <a:latin typeface="Microsoft YaHei"/>
                 <a:ea typeface="Consolas"/>
@@ -3861,7 +3861,7 @@
             <a:r>
               <a:rPr sz="1050" b="0">
                 <a:solidFill>
-                  <a:srgbClr val="7F8A95"/>
+                  <a:srgbClr val="7E827E"/>
                 </a:solidFill>
                 <a:latin typeface="Microsoft YaHei"/>
                 <a:ea typeface="Consolas"/>
@@ -3882,7 +3882,7 @@
             <a:r>
               <a:rPr sz="1050" b="0">
                 <a:solidFill>
-                  <a:srgbClr val="7F8A95"/>
+                  <a:srgbClr val="7E827E"/>
                 </a:solidFill>
                 <a:latin typeface="Microsoft YaHei"/>
                 <a:ea typeface="Consolas"/>
@@ -3903,7 +3903,7 @@
             <a:r>
               <a:rPr sz="1050" b="0">
                 <a:solidFill>
-                  <a:srgbClr val="7F8A95"/>
+                  <a:srgbClr val="7E827E"/>
                 </a:solidFill>
                 <a:latin typeface="Microsoft YaHei"/>
                 <a:ea typeface="Consolas"/>
@@ -3929,7 +3929,7 @@
             <a:avLst/>
           </a:prstGeom>
           <a:solidFill>
-            <a:srgbClr val="11151A"/>
+            <a:srgbClr val="131413"/>
           </a:solidFill>
           <a:ln>
             <a:noFill/>
@@ -3958,7 +3958,7 @@
             <a:avLst/>
           </a:prstGeom>
           <a:solidFill>
-            <a:srgbClr val="3FB950"/>
+            <a:srgbClr val="D7FF3F"/>
           </a:solidFill>
           <a:ln>
             <a:noFill/>
@@ -3998,7 +3998,7 @@
             <a:r>
               <a:rPr sz="1400" b="1">
                 <a:solidFill>
-                  <a:srgbClr val="E9EDF1"/>
+                  <a:srgbClr val="F2F2EF"/>
                 </a:solidFill>
                 <a:latin typeface="Microsoft YaHei"/>
                 <a:ea typeface="Consolas"/>
@@ -4042,7 +4042,7 @@
             <a:r>
               <a:rPr sz="1050" b="0">
                 <a:solidFill>
-                  <a:srgbClr val="7F8A95"/>
+                  <a:srgbClr val="7E827E"/>
                 </a:solidFill>
                 <a:latin typeface="Microsoft YaHei"/>
                 <a:ea typeface="Consolas"/>
@@ -4063,7 +4063,7 @@
             <a:r>
               <a:rPr sz="1050" b="0">
                 <a:solidFill>
-                  <a:srgbClr val="7F8A95"/>
+                  <a:srgbClr val="7E827E"/>
                 </a:solidFill>
                 <a:latin typeface="Microsoft YaHei"/>
                 <a:ea typeface="Consolas"/>
@@ -4084,7 +4084,7 @@
             <a:r>
               <a:rPr sz="1050" b="0">
                 <a:solidFill>
-                  <a:srgbClr val="7F8A95"/>
+                  <a:srgbClr val="7E827E"/>
                 </a:solidFill>
                 <a:latin typeface="Microsoft YaHei"/>
                 <a:ea typeface="Consolas"/>
@@ -4110,7 +4110,7 @@
             <a:avLst/>
           </a:prstGeom>
           <a:solidFill>
-            <a:srgbClr val="11151A"/>
+            <a:srgbClr val="131413"/>
           </a:solidFill>
           <a:ln>
             <a:noFill/>
@@ -4139,7 +4139,7 @@
             <a:avLst/>
           </a:prstGeom>
           <a:solidFill>
-            <a:srgbClr val="D29922"/>
+            <a:srgbClr val="9A9D8E"/>
           </a:solidFill>
           <a:ln>
             <a:noFill/>
@@ -4179,7 +4179,7 @@
             <a:r>
               <a:rPr sz="1400" b="1">
                 <a:solidFill>
-                  <a:srgbClr val="E9EDF1"/>
+                  <a:srgbClr val="F2F2EF"/>
                 </a:solidFill>
                 <a:latin typeface="Microsoft YaHei"/>
                 <a:ea typeface="Consolas"/>
@@ -4223,7 +4223,7 @@
             <a:r>
               <a:rPr sz="1050" b="0">
                 <a:solidFill>
-                  <a:srgbClr val="7F8A95"/>
+                  <a:srgbClr val="7E827E"/>
                 </a:solidFill>
                 <a:latin typeface="Microsoft YaHei"/>
                 <a:ea typeface="Consolas"/>
@@ -4244,7 +4244,7 @@
             <a:r>
               <a:rPr sz="1050" b="0">
                 <a:solidFill>
-                  <a:srgbClr val="7F8A95"/>
+                  <a:srgbClr val="7E827E"/>
                 </a:solidFill>
                 <a:latin typeface="Microsoft YaHei"/>
                 <a:ea typeface="Consolas"/>
@@ -4265,7 +4265,7 @@
             <a:r>
               <a:rPr sz="1050" b="0">
                 <a:solidFill>
-                  <a:srgbClr val="7F8A95"/>
+                  <a:srgbClr val="7E827E"/>
                 </a:solidFill>
                 <a:latin typeface="Microsoft YaHei"/>
                 <a:ea typeface="Consolas"/>
@@ -4302,7 +4302,7 @@
             <a:r>
               <a:rPr sz="950" b="0">
                 <a:solidFill>
-                  <a:srgbClr val="4D5762"/>
+                  <a:srgbClr val="4B4F4B"/>
                 </a:solidFill>
                 <a:latin typeface="Microsoft YaHei"/>
                 <a:ea typeface="Consolas"/>
@@ -4328,7 +4328,7 @@
             <a:avLst/>
           </a:prstGeom>
           <a:solidFill>
-            <a:srgbClr val="222A32"/>
+            <a:srgbClr val="232625"/>
           </a:solidFill>
           <a:ln>
             <a:noFill/>
@@ -4368,7 +4368,7 @@
             <a:r>
               <a:rPr sz="900" b="0">
                 <a:solidFill>
-                  <a:srgbClr val="E0453A"/>
+                  <a:srgbClr val="D7FF3F"/>
                 </a:solidFill>
                 <a:latin typeface="Microsoft YaHei"/>
                 <a:ea typeface="Consolas"/>
@@ -4412,7 +4412,7 @@
             <a:r>
               <a:rPr sz="1050" b="0">
                 <a:solidFill>
-                  <a:srgbClr val="E9EDF1"/>
+                  <a:srgbClr val="F2F2EF"/>
                 </a:solidFill>
                 <a:latin typeface="Microsoft YaHei"/>
                 <a:ea typeface="Consolas"/>
@@ -4449,7 +4449,7 @@
             <a:r>
               <a:rPr sz="900" b="0">
                 <a:solidFill>
-                  <a:srgbClr val="3FB950"/>
+                  <a:srgbClr val="D7FF3F"/>
                 </a:solidFill>
                 <a:latin typeface="Microsoft YaHei"/>
                 <a:ea typeface="Consolas"/>
@@ -4493,7 +4493,7 @@
             <a:r>
               <a:rPr sz="1050" b="0">
                 <a:solidFill>
-                  <a:srgbClr val="E9EDF1"/>
+                  <a:srgbClr val="F2F2EF"/>
                 </a:solidFill>
                 <a:latin typeface="Microsoft YaHei"/>
                 <a:ea typeface="Consolas"/>
@@ -4530,7 +4530,7 @@
             <a:r>
               <a:rPr sz="900" b="0">
                 <a:solidFill>
-                  <a:srgbClr val="D29922"/>
+                  <a:srgbClr val="9A9D8E"/>
                 </a:solidFill>
                 <a:latin typeface="Microsoft YaHei"/>
                 <a:ea typeface="Consolas"/>
@@ -4574,7 +4574,7 @@
             <a:r>
               <a:rPr sz="1050" b="0">
                 <a:solidFill>
-                  <a:srgbClr val="E9EDF1"/>
+                  <a:srgbClr val="F2F2EF"/>
                 </a:solidFill>
                 <a:latin typeface="Microsoft YaHei"/>
                 <a:ea typeface="Consolas"/>
@@ -4611,7 +4611,7 @@
             <a:r>
               <a:rPr sz="1100" b="0">
                 <a:solidFill>
-                  <a:srgbClr val="E9EDF1"/>
+                  <a:srgbClr val="F2F2EF"/>
                 </a:solidFill>
                 <a:latin typeface="Microsoft YaHei"/>
                 <a:ea typeface="Consolas"/>
@@ -4655,7 +4655,7 @@
             <a:r>
               <a:rPr sz="900" b="0">
                 <a:solidFill>
-                  <a:srgbClr val="4D5762"/>
+                  <a:srgbClr val="4B4F4B"/>
                 </a:solidFill>
                 <a:latin typeface="Microsoft YaHei"/>
                 <a:ea typeface="Consolas"/>
@@ -4736,7 +4736,7 @@
             <a:avLst/>
           </a:prstGeom>
           <a:solidFill>
-            <a:srgbClr val="0B0E11"/>
+            <a:srgbClr val="0B0C0B"/>
           </a:solidFill>
           <a:ln>
             <a:noFill/>
@@ -4776,7 +4776,7 @@
             <a:r>
               <a:rPr sz="950" b="0">
                 <a:solidFill>
-                  <a:srgbClr val="4D5762"/>
+                  <a:srgbClr val="4B4F4B"/>
                 </a:solidFill>
                 <a:latin typeface="Microsoft YaHei"/>
                 <a:ea typeface="Consolas"/>
@@ -4813,7 +4813,7 @@
             <a:r>
               <a:rPr sz="2800" b="1">
                 <a:solidFill>
-                  <a:srgbClr val="E9EDF1"/>
+                  <a:srgbClr val="F2F2EF"/>
                 </a:solidFill>
                 <a:latin typeface="Microsoft YaHei"/>
                 <a:ea typeface="Consolas"/>
@@ -4850,13 +4850,13 @@
             <a:r>
               <a:rPr sz="1250" b="0">
                 <a:solidFill>
-                  <a:srgbClr val="7F8A95"/>
+                  <a:srgbClr val="7E827E"/>
                 </a:solidFill>
                 <a:latin typeface="Microsoft YaHei"/>
                 <a:ea typeface="Consolas"/>
                 <a:cs typeface="Consolas"/>
               </a:rPr>
-              <a:t>不是缺颜色，是缺层级：现在只有「底色 + 一条描边」，所有东西都在同一层。</a:t>
+              <a:t>不是缺颜色，是缺层级与节奏：现在只有「底色 + 一条描边」，字重全是粗的，也没有编号与眉标。</a:t>
             </a:r>
           </a:p>
         </p:txBody>
@@ -4876,7 +4876,7 @@
             <a:avLst/>
           </a:prstGeom>
           <a:solidFill>
-            <a:srgbClr val="E0453A"/>
+            <a:srgbClr val="D7FF3F"/>
           </a:solidFill>
           <a:ln>
             <a:noFill/>
@@ -4898,7 +4898,7 @@
         </p:nvSpPr>
         <p:spPr>
           <a:xfrm>
-            <a:off x="731520" y="1920240"/>
+            <a:off x="731520" y="1883664"/>
             <a:ext cx="5486400" cy="256032"/>
           </a:xfrm>
           <a:prstGeom prst="rect">
@@ -4916,13 +4916,13 @@
             <a:r>
               <a:rPr sz="1150" b="1">
                 <a:solidFill>
-                  <a:srgbClr val="E9EDF1"/>
+                  <a:srgbClr val="F2F2EF"/>
                 </a:solidFill>
                 <a:latin typeface="Microsoft YaHei"/>
                 <a:ea typeface="Consolas"/>
                 <a:cs typeface="Consolas"/>
               </a:rPr>
-              <a:t>① 加三层表面 + 一条顶边高光，靠层级分层而不是靠描边</a:t>
+              <a:t>① 近单色 + 一个柠檬绿：层级靠发丝线和留白，不靠颜色</a:t>
             </a:r>
           </a:p>
         </p:txBody>
@@ -4935,18 +4935,18 @@
         </p:nvSpPr>
         <p:spPr>
           <a:xfrm>
-            <a:off x="749808" y="2286000"/>
-            <a:ext cx="548640" cy="329184"/>
+            <a:off x="749808" y="2194560"/>
+            <a:ext cx="512064" cy="292608"/>
           </a:xfrm>
           <a:prstGeom prst="roundRect">
             <a:avLst/>
           </a:prstGeom>
           <a:solidFill>
-            <a:srgbClr val="0B0E11"/>
+            <a:srgbClr val="0B0C0B"/>
           </a:solidFill>
           <a:ln w="12700">
             <a:solidFill>
-              <a:srgbClr val="2F3944"/>
+              <a:srgbClr val="2B2F2E"/>
             </a:solidFill>
           </a:ln>
         </p:spPr>
@@ -4966,8 +4966,8 @@
         </p:nvSpPr>
         <p:spPr>
           <a:xfrm>
-            <a:off x="1426464" y="2286000"/>
-            <a:ext cx="1737360" cy="201168"/>
+            <a:off x="1389888" y="2185416"/>
+            <a:ext cx="1737360" cy="182880"/>
           </a:xfrm>
           <a:prstGeom prst="rect">
             <a:avLst/>
@@ -4982,9 +4982,9 @@
           <a:p>
             <a:pPr algn="l"/>
             <a:r>
-              <a:rPr sz="1000" b="0">
-                <a:solidFill>
-                  <a:srgbClr val="E9EDF1"/>
+              <a:rPr sz="950" b="0">
+                <a:solidFill>
+                  <a:srgbClr val="F2F2EF"/>
                 </a:solidFill>
                 <a:latin typeface="Consolas"/>
                 <a:ea typeface="Consolas"/>
@@ -5003,8 +5003,8 @@
         </p:nvSpPr>
         <p:spPr>
           <a:xfrm>
-            <a:off x="1426464" y="2459736"/>
-            <a:ext cx="1737360" cy="164592"/>
+            <a:off x="1389888" y="2340864"/>
+            <a:ext cx="1737360" cy="146304"/>
           </a:xfrm>
           <a:prstGeom prst="rect">
             <a:avLst/>
@@ -5019,15 +5019,15 @@
           <a:p>
             <a:pPr algn="l"/>
             <a:r>
-              <a:rPr sz="800" b="0">
-                <a:solidFill>
-                  <a:srgbClr val="4D5762"/>
+              <a:rPr sz="750" b="0">
+                <a:solidFill>
+                  <a:srgbClr val="4B4F4B"/>
                 </a:solidFill>
                 <a:latin typeface="Consolas"/>
                 <a:ea typeface="Consolas"/>
                 <a:cs typeface="Consolas"/>
               </a:rPr>
-              <a:t>#0B0E11</a:t>
+              <a:t>#0B0C0B</a:t>
             </a:r>
           </a:p>
         </p:txBody>
@@ -5040,8 +5040,8 @@
         </p:nvSpPr>
         <p:spPr>
           <a:xfrm>
-            <a:off x="3090672" y="2350008"/>
-            <a:ext cx="2377440" cy="219456"/>
+            <a:off x="2999232" y="2240279"/>
+            <a:ext cx="2377440" cy="201168"/>
           </a:xfrm>
           <a:prstGeom prst="rect">
             <a:avLst/>
@@ -5056,9 +5056,9 @@
           <a:p>
             <a:pPr algn="l"/>
             <a:r>
-              <a:rPr sz="1150" b="0">
-                <a:solidFill>
-                  <a:srgbClr val="7F8A95"/>
+              <a:rPr sz="1100" b="0">
+                <a:solidFill>
+                  <a:srgbClr val="7E827E"/>
                 </a:solidFill>
                 <a:latin typeface="Microsoft YaHei"/>
                 <a:ea typeface="Consolas"/>
@@ -5077,18 +5077,18 @@
         </p:nvSpPr>
         <p:spPr>
           <a:xfrm>
-            <a:off x="749808" y="2784348"/>
-            <a:ext cx="548640" cy="329184"/>
+            <a:off x="749808" y="2628900"/>
+            <a:ext cx="512064" cy="292608"/>
           </a:xfrm>
           <a:prstGeom prst="roundRect">
             <a:avLst/>
           </a:prstGeom>
           <a:solidFill>
-            <a:srgbClr val="11151A"/>
+            <a:srgbClr val="0E0F0E"/>
           </a:solidFill>
           <a:ln w="12700">
             <a:solidFill>
-              <a:srgbClr val="2F3944"/>
+              <a:srgbClr val="2B2F2E"/>
             </a:solidFill>
           </a:ln>
         </p:spPr>
@@ -5108,8 +5108,8 @@
         </p:nvSpPr>
         <p:spPr>
           <a:xfrm>
-            <a:off x="1426464" y="2784348"/>
-            <a:ext cx="1737360" cy="201168"/>
+            <a:off x="1389888" y="2619756"/>
+            <a:ext cx="1737360" cy="182880"/>
           </a:xfrm>
           <a:prstGeom prst="rect">
             <a:avLst/>
@@ -5124,15 +5124,15 @@
           <a:p>
             <a:pPr algn="l"/>
             <a:r>
-              <a:rPr sz="1000" b="0">
-                <a:solidFill>
-                  <a:srgbClr val="E9EDF1"/>
+              <a:rPr sz="950" b="0">
+                <a:solidFill>
+                  <a:srgbClr val="F2F2EF"/>
                 </a:solidFill>
                 <a:latin typeface="Consolas"/>
                 <a:ea typeface="Consolas"/>
                 <a:cs typeface="Consolas"/>
               </a:rPr>
-              <a:t>--surface</a:t>
+              <a:t>--panel</a:t>
             </a:r>
           </a:p>
         </p:txBody>
@@ -5145,8 +5145,8 @@
         </p:nvSpPr>
         <p:spPr>
           <a:xfrm>
-            <a:off x="1426464" y="2958084"/>
-            <a:ext cx="1737360" cy="164592"/>
+            <a:off x="1389888" y="2775204"/>
+            <a:ext cx="1737360" cy="146304"/>
           </a:xfrm>
           <a:prstGeom prst="rect">
             <a:avLst/>
@@ -5161,15 +5161,15 @@
           <a:p>
             <a:pPr algn="l"/>
             <a:r>
-              <a:rPr sz="800" b="0">
-                <a:solidFill>
-                  <a:srgbClr val="4D5762"/>
+              <a:rPr sz="750" b="0">
+                <a:solidFill>
+                  <a:srgbClr val="4B4F4B"/>
                 </a:solidFill>
                 <a:latin typeface="Consolas"/>
                 <a:ea typeface="Consolas"/>
                 <a:cs typeface="Consolas"/>
               </a:rPr>
-              <a:t>#11151A</a:t>
+              <a:t>#0E0F0E</a:t>
             </a:r>
           </a:p>
         </p:txBody>
@@ -5182,8 +5182,8 @@
         </p:nvSpPr>
         <p:spPr>
           <a:xfrm>
-            <a:off x="3090672" y="2848356"/>
-            <a:ext cx="2377440" cy="219456"/>
+            <a:off x="2999232" y="2674620"/>
+            <a:ext cx="2377440" cy="201168"/>
           </a:xfrm>
           <a:prstGeom prst="rect">
             <a:avLst/>
@@ -5198,15 +5198,15 @@
           <a:p>
             <a:pPr algn="l"/>
             <a:r>
-              <a:rPr sz="1150" b="0">
-                <a:solidFill>
-                  <a:srgbClr val="7F8A95"/>
+              <a:rPr sz="1100" b="0">
+                <a:solidFill>
+                  <a:srgbClr val="7E827E"/>
                 </a:solidFill>
                 <a:latin typeface="Microsoft YaHei"/>
                 <a:ea typeface="Consolas"/>
                 <a:cs typeface="Consolas"/>
               </a:rPr>
-              <a:t>卡片</a:t>
+              <a:t>侧栏</a:t>
             </a:r>
           </a:p>
         </p:txBody>
@@ -5219,18 +5219,18 @@
         </p:nvSpPr>
         <p:spPr>
           <a:xfrm>
-            <a:off x="749808" y="3282696"/>
-            <a:ext cx="548640" cy="329184"/>
+            <a:off x="749808" y="3063239"/>
+            <a:ext cx="512064" cy="292608"/>
           </a:xfrm>
           <a:prstGeom prst="roundRect">
             <a:avLst/>
           </a:prstGeom>
           <a:solidFill>
-            <a:srgbClr val="171C22"/>
+            <a:srgbClr val="131413"/>
           </a:solidFill>
           <a:ln w="12700">
             <a:solidFill>
-              <a:srgbClr val="2F3944"/>
+              <a:srgbClr val="2B2F2E"/>
             </a:solidFill>
           </a:ln>
         </p:spPr>
@@ -5250,8 +5250,8 @@
         </p:nvSpPr>
         <p:spPr>
           <a:xfrm>
-            <a:off x="1426464" y="3282696"/>
-            <a:ext cx="1737360" cy="201168"/>
+            <a:off x="1389888" y="3054096"/>
+            <a:ext cx="1737360" cy="182880"/>
           </a:xfrm>
           <a:prstGeom prst="rect">
             <a:avLst/>
@@ -5266,15 +5266,15 @@
           <a:p>
             <a:pPr algn="l"/>
             <a:r>
-              <a:rPr sz="1000" b="0">
-                <a:solidFill>
-                  <a:srgbClr val="E9EDF1"/>
+              <a:rPr sz="950" b="0">
+                <a:solidFill>
+                  <a:srgbClr val="F2F2EF"/>
                 </a:solidFill>
                 <a:latin typeface="Consolas"/>
                 <a:ea typeface="Consolas"/>
                 <a:cs typeface="Consolas"/>
               </a:rPr>
-              <a:t>--raised</a:t>
+              <a:t>--card</a:t>
             </a:r>
           </a:p>
         </p:txBody>
@@ -5287,8 +5287,8 @@
         </p:nvSpPr>
         <p:spPr>
           <a:xfrm>
-            <a:off x="1426464" y="3456432"/>
-            <a:ext cx="1737360" cy="164592"/>
+            <a:off x="1389888" y="3209544"/>
+            <a:ext cx="1737360" cy="146304"/>
           </a:xfrm>
           <a:prstGeom prst="rect">
             <a:avLst/>
@@ -5303,15 +5303,15 @@
           <a:p>
             <a:pPr algn="l"/>
             <a:r>
-              <a:rPr sz="800" b="0">
-                <a:solidFill>
-                  <a:srgbClr val="4D5762"/>
+              <a:rPr sz="750" b="0">
+                <a:solidFill>
+                  <a:srgbClr val="4B4F4B"/>
                 </a:solidFill>
                 <a:latin typeface="Consolas"/>
                 <a:ea typeface="Consolas"/>
                 <a:cs typeface="Consolas"/>
               </a:rPr>
-              <a:t>#171C22</a:t>
+              <a:t>#131413</a:t>
             </a:r>
           </a:p>
         </p:txBody>
@@ -5324,8 +5324,8 @@
         </p:nvSpPr>
         <p:spPr>
           <a:xfrm>
-            <a:off x="3090672" y="3346703"/>
-            <a:ext cx="2377440" cy="219456"/>
+            <a:off x="2999232" y="3108959"/>
+            <a:ext cx="2377440" cy="201168"/>
           </a:xfrm>
           <a:prstGeom prst="rect">
             <a:avLst/>
@@ -5340,15 +5340,15 @@
           <a:p>
             <a:pPr algn="l"/>
             <a:r>
-              <a:rPr sz="1150" b="0">
-                <a:solidFill>
-                  <a:srgbClr val="7F8A95"/>
+              <a:rPr sz="1100" b="0">
+                <a:solidFill>
+                  <a:srgbClr val="7E827E"/>
                 </a:solidFill>
                 <a:latin typeface="Microsoft YaHei"/>
                 <a:ea typeface="Consolas"/>
                 <a:cs typeface="Consolas"/>
               </a:rPr>
-              <a:t>卡片里的块</a:t>
+              <a:t>卡片</a:t>
             </a:r>
           </a:p>
         </p:txBody>
@@ -5361,18 +5361,18 @@
         </p:nvSpPr>
         <p:spPr>
           <a:xfrm>
-            <a:off x="749808" y="3781044"/>
-            <a:ext cx="548640" cy="329184"/>
+            <a:off x="749808" y="3497579"/>
+            <a:ext cx="512064" cy="292608"/>
           </a:xfrm>
           <a:prstGeom prst="roundRect">
             <a:avLst/>
           </a:prstGeom>
           <a:solidFill>
-            <a:srgbClr val="222A32"/>
+            <a:srgbClr val="1A1B19"/>
           </a:solidFill>
           <a:ln w="12700">
             <a:solidFill>
-              <a:srgbClr val="2F3944"/>
+              <a:srgbClr val="2B2F2E"/>
             </a:solidFill>
           </a:ln>
         </p:spPr>
@@ -5392,8 +5392,8 @@
         </p:nvSpPr>
         <p:spPr>
           <a:xfrm>
-            <a:off x="1426464" y="3781044"/>
-            <a:ext cx="1737360" cy="201168"/>
+            <a:off x="1389888" y="3488436"/>
+            <a:ext cx="1737360" cy="182880"/>
           </a:xfrm>
           <a:prstGeom prst="rect">
             <a:avLst/>
@@ -5408,15 +5408,15 @@
           <a:p>
             <a:pPr algn="l"/>
             <a:r>
-              <a:rPr sz="1000" b="0">
-                <a:solidFill>
-                  <a:srgbClr val="E9EDF1"/>
+              <a:rPr sz="950" b="0">
+                <a:solidFill>
+                  <a:srgbClr val="F2F2EF"/>
                 </a:solidFill>
                 <a:latin typeface="Consolas"/>
                 <a:ea typeface="Consolas"/>
                 <a:cs typeface="Consolas"/>
               </a:rPr>
-              <a:t>--line</a:t>
+              <a:t>--raise</a:t>
             </a:r>
           </a:p>
         </p:txBody>
@@ -5429,8 +5429,8 @@
         </p:nvSpPr>
         <p:spPr>
           <a:xfrm>
-            <a:off x="1426464" y="3954780"/>
-            <a:ext cx="1737360" cy="164592"/>
+            <a:off x="1389888" y="3643884"/>
+            <a:ext cx="1737360" cy="146304"/>
           </a:xfrm>
           <a:prstGeom prst="rect">
             <a:avLst/>
@@ -5445,15 +5445,15 @@
           <a:p>
             <a:pPr algn="l"/>
             <a:r>
-              <a:rPr sz="800" b="0">
-                <a:solidFill>
-                  <a:srgbClr val="4D5762"/>
+              <a:rPr sz="750" b="0">
+                <a:solidFill>
+                  <a:srgbClr val="4B4F4B"/>
                 </a:solidFill>
                 <a:latin typeface="Consolas"/>
                 <a:ea typeface="Consolas"/>
                 <a:cs typeface="Consolas"/>
               </a:rPr>
-              <a:t>#222A32</a:t>
+              <a:t>#1A1B19</a:t>
             </a:r>
           </a:p>
         </p:txBody>
@@ -5466,8 +5466,8 @@
         </p:nvSpPr>
         <p:spPr>
           <a:xfrm>
-            <a:off x="3090672" y="3845052"/>
-            <a:ext cx="2377440" cy="219456"/>
+            <a:off x="2999232" y="3543299"/>
+            <a:ext cx="2377440" cy="201168"/>
           </a:xfrm>
           <a:prstGeom prst="rect">
             <a:avLst/>
@@ -5482,15 +5482,15 @@
           <a:p>
             <a:pPr algn="l"/>
             <a:r>
-              <a:rPr sz="1150" b="0">
-                <a:solidFill>
-                  <a:srgbClr val="7F8A95"/>
+              <a:rPr sz="1100" b="0">
+                <a:solidFill>
+                  <a:srgbClr val="7E827E"/>
                 </a:solidFill>
                 <a:latin typeface="Microsoft YaHei"/>
                 <a:ea typeface="Consolas"/>
                 <a:cs typeface="Consolas"/>
               </a:rPr>
-              <a:t>分隔线</a:t>
+              <a:t>卡内块</a:t>
             </a:r>
           </a:p>
         </p:txBody>
@@ -5503,18 +5503,18 @@
         </p:nvSpPr>
         <p:spPr>
           <a:xfrm>
-            <a:off x="749808" y="4279392"/>
-            <a:ext cx="548640" cy="329184"/>
+            <a:off x="749808" y="3931920"/>
+            <a:ext cx="512064" cy="292608"/>
           </a:xfrm>
           <a:prstGeom prst="roundRect">
             <a:avLst/>
           </a:prstGeom>
           <a:solidFill>
-            <a:srgbClr val="2F3944"/>
+            <a:srgbClr val="232625"/>
           </a:solidFill>
           <a:ln w="12700">
             <a:solidFill>
-              <a:srgbClr val="2F3944"/>
+              <a:srgbClr val="2B2F2E"/>
             </a:solidFill>
           </a:ln>
         </p:spPr>
@@ -5534,8 +5534,8 @@
         </p:nvSpPr>
         <p:spPr>
           <a:xfrm>
-            <a:off x="1426464" y="4279392"/>
-            <a:ext cx="1737360" cy="201168"/>
+            <a:off x="1389888" y="3922776"/>
+            <a:ext cx="1737360" cy="182880"/>
           </a:xfrm>
           <a:prstGeom prst="rect">
             <a:avLst/>
@@ -5550,15 +5550,15 @@
           <a:p>
             <a:pPr algn="l"/>
             <a:r>
-              <a:rPr sz="1000" b="0">
-                <a:solidFill>
-                  <a:srgbClr val="E9EDF1"/>
+              <a:rPr sz="950" b="0">
+                <a:solidFill>
+                  <a:srgbClr val="F2F2EF"/>
                 </a:solidFill>
                 <a:latin typeface="Consolas"/>
                 <a:ea typeface="Consolas"/>
                 <a:cs typeface="Consolas"/>
               </a:rPr>
-              <a:t>--line-hi</a:t>
+              <a:t>--line</a:t>
             </a:r>
           </a:p>
         </p:txBody>
@@ -5571,8 +5571,8 @@
         </p:nvSpPr>
         <p:spPr>
           <a:xfrm>
-            <a:off x="1426464" y="4453128"/>
-            <a:ext cx="1737360" cy="164592"/>
+            <a:off x="1389888" y="4078224"/>
+            <a:ext cx="1737360" cy="146304"/>
           </a:xfrm>
           <a:prstGeom prst="rect">
             <a:avLst/>
@@ -5587,15 +5587,15 @@
           <a:p>
             <a:pPr algn="l"/>
             <a:r>
-              <a:rPr sz="800" b="0">
-                <a:solidFill>
-                  <a:srgbClr val="4D5762"/>
+              <a:rPr sz="750" b="0">
+                <a:solidFill>
+                  <a:srgbClr val="4B4F4B"/>
                 </a:solidFill>
                 <a:latin typeface="Consolas"/>
                 <a:ea typeface="Consolas"/>
                 <a:cs typeface="Consolas"/>
               </a:rPr>
-              <a:t>#2F3944</a:t>
+              <a:t>#232625</a:t>
             </a:r>
           </a:p>
         </p:txBody>
@@ -5608,8 +5608,8 @@
         </p:nvSpPr>
         <p:spPr>
           <a:xfrm>
-            <a:off x="3090672" y="4343400"/>
-            <a:ext cx="2377440" cy="219456"/>
+            <a:off x="2999232" y="3977639"/>
+            <a:ext cx="2377440" cy="201168"/>
           </a:xfrm>
           <a:prstGeom prst="rect">
             <a:avLst/>
@@ -5624,15 +5624,15 @@
           <a:p>
             <a:pPr algn="l"/>
             <a:r>
-              <a:rPr sz="1150" b="0">
-                <a:solidFill>
-                  <a:srgbClr val="7F8A95"/>
+              <a:rPr sz="1100" b="0">
+                <a:solidFill>
+                  <a:srgbClr val="7E827E"/>
                 </a:solidFill>
                 <a:latin typeface="Microsoft YaHei"/>
                 <a:ea typeface="Consolas"/>
                 <a:cs typeface="Consolas"/>
               </a:rPr>
-              <a:t>卡片顶边高光</a:t>
+              <a:t>1px 发丝线</a:t>
             </a:r>
           </a:p>
         </p:txBody>
@@ -5645,18 +5645,18 @@
         </p:nvSpPr>
         <p:spPr>
           <a:xfrm>
-            <a:off x="749808" y="4777740"/>
-            <a:ext cx="548640" cy="329184"/>
+            <a:off x="749808" y="4366260"/>
+            <a:ext cx="512064" cy="292608"/>
           </a:xfrm>
           <a:prstGeom prst="roundRect">
             <a:avLst/>
           </a:prstGeom>
           <a:solidFill>
-            <a:srgbClr val="E0453A"/>
+            <a:srgbClr val="F2F2EF"/>
           </a:solidFill>
           <a:ln w="12700">
             <a:solidFill>
-              <a:srgbClr val="2F3944"/>
+              <a:srgbClr val="2B2F2E"/>
             </a:solidFill>
           </a:ln>
         </p:spPr>
@@ -5676,8 +5676,8 @@
         </p:nvSpPr>
         <p:spPr>
           <a:xfrm>
-            <a:off x="1426464" y="4777740"/>
-            <a:ext cx="1737360" cy="201168"/>
+            <a:off x="1389888" y="4357116"/>
+            <a:ext cx="1737360" cy="182880"/>
           </a:xfrm>
           <a:prstGeom prst="rect">
             <a:avLst/>
@@ -5692,15 +5692,15 @@
           <a:p>
             <a:pPr algn="l"/>
             <a:r>
-              <a:rPr sz="1000" b="0">
-                <a:solidFill>
-                  <a:srgbClr val="E9EDF1"/>
+              <a:rPr sz="950" b="0">
+                <a:solidFill>
+                  <a:srgbClr val="F2F2EF"/>
                 </a:solidFill>
                 <a:latin typeface="Consolas"/>
                 <a:ea typeface="Consolas"/>
                 <a:cs typeface="Consolas"/>
               </a:rPr>
-              <a:t>--accent</a:t>
+              <a:t>--ink</a:t>
             </a:r>
           </a:p>
         </p:txBody>
@@ -5713,8 +5713,8 @@
         </p:nvSpPr>
         <p:spPr>
           <a:xfrm>
-            <a:off x="1426464" y="4951476"/>
-            <a:ext cx="1737360" cy="164592"/>
+            <a:off x="1389888" y="4512564"/>
+            <a:ext cx="1737360" cy="146304"/>
           </a:xfrm>
           <a:prstGeom prst="rect">
             <a:avLst/>
@@ -5729,15 +5729,15 @@
           <a:p>
             <a:pPr algn="l"/>
             <a:r>
-              <a:rPr sz="800" b="0">
-                <a:solidFill>
-                  <a:srgbClr val="4D5762"/>
+              <a:rPr sz="750" b="0">
+                <a:solidFill>
+                  <a:srgbClr val="4B4F4B"/>
                 </a:solidFill>
                 <a:latin typeface="Consolas"/>
                 <a:ea typeface="Consolas"/>
                 <a:cs typeface="Consolas"/>
               </a:rPr>
-              <a:t>#E0453A</a:t>
+              <a:t>#F2F2EF</a:t>
             </a:r>
           </a:p>
         </p:txBody>
@@ -5750,8 +5750,8 @@
         </p:nvSpPr>
         <p:spPr>
           <a:xfrm>
-            <a:off x="3090672" y="4841748"/>
-            <a:ext cx="2377440" cy="219456"/>
+            <a:off x="2999232" y="4411980"/>
+            <a:ext cx="2377440" cy="201168"/>
           </a:xfrm>
           <a:prstGeom prst="rect">
             <a:avLst/>
@@ -5766,15 +5766,15 @@
           <a:p>
             <a:pPr algn="l"/>
             <a:r>
-              <a:rPr sz="1150" b="0">
-                <a:solidFill>
-                  <a:srgbClr val="7F8A95"/>
+              <a:rPr sz="1100" b="0">
+                <a:solidFill>
+                  <a:srgbClr val="7E827E"/>
                 </a:solidFill>
                 <a:latin typeface="Microsoft YaHei"/>
                 <a:ea typeface="Consolas"/>
                 <a:cs typeface="Consolas"/>
               </a:rPr>
-              <a:t>数据与选中</a:t>
+              <a:t>正文</a:t>
             </a:r>
           </a:p>
         </p:txBody>
@@ -5787,18 +5787,18 @@
         </p:nvSpPr>
         <p:spPr>
           <a:xfrm>
-            <a:off x="749808" y="5276088"/>
-            <a:ext cx="548640" cy="329184"/>
+            <a:off x="749808" y="4800600"/>
+            <a:ext cx="512064" cy="292608"/>
           </a:xfrm>
           <a:prstGeom prst="roundRect">
             <a:avLst/>
           </a:prstGeom>
           <a:solidFill>
-            <a:srgbClr val="3FB950"/>
+            <a:srgbClr val="7E827E"/>
           </a:solidFill>
           <a:ln w="12700">
             <a:solidFill>
-              <a:srgbClr val="2F3944"/>
+              <a:srgbClr val="2B2F2E"/>
             </a:solidFill>
           </a:ln>
         </p:spPr>
@@ -5818,8 +5818,8 @@
         </p:nvSpPr>
         <p:spPr>
           <a:xfrm>
-            <a:off x="1426464" y="5276088"/>
-            <a:ext cx="1737360" cy="201168"/>
+            <a:off x="1389888" y="4791456"/>
+            <a:ext cx="1737360" cy="182880"/>
           </a:xfrm>
           <a:prstGeom prst="rect">
             <a:avLst/>
@@ -5834,15 +5834,15 @@
           <a:p>
             <a:pPr algn="l"/>
             <a:r>
-              <a:rPr sz="1000" b="0">
-                <a:solidFill>
-                  <a:srgbClr val="E9EDF1"/>
+              <a:rPr sz="950" b="0">
+                <a:solidFill>
+                  <a:srgbClr val="F2F2EF"/>
                 </a:solidFill>
                 <a:latin typeface="Consolas"/>
                 <a:ea typeface="Consolas"/>
                 <a:cs typeface="Consolas"/>
               </a:rPr>
-              <a:t>--ok</a:t>
+              <a:t>--muted</a:t>
             </a:r>
           </a:p>
         </p:txBody>
@@ -5855,8 +5855,8 @@
         </p:nvSpPr>
         <p:spPr>
           <a:xfrm>
-            <a:off x="1426464" y="5449824"/>
-            <a:ext cx="1737360" cy="164592"/>
+            <a:off x="1389888" y="4946904"/>
+            <a:ext cx="1737360" cy="146304"/>
           </a:xfrm>
           <a:prstGeom prst="rect">
             <a:avLst/>
@@ -5871,15 +5871,15 @@
           <a:p>
             <a:pPr algn="l"/>
             <a:r>
-              <a:rPr sz="800" b="0">
-                <a:solidFill>
-                  <a:srgbClr val="4D5762"/>
+              <a:rPr sz="750" b="0">
+                <a:solidFill>
+                  <a:srgbClr val="4B4F4B"/>
                 </a:solidFill>
                 <a:latin typeface="Consolas"/>
                 <a:ea typeface="Consolas"/>
                 <a:cs typeface="Consolas"/>
               </a:rPr>
-              <a:t>#3FB950</a:t>
+              <a:t>#7E827E</a:t>
             </a:r>
           </a:p>
         </p:txBody>
@@ -5892,8 +5892,8 @@
         </p:nvSpPr>
         <p:spPr>
           <a:xfrm>
-            <a:off x="3090672" y="5340096"/>
-            <a:ext cx="2377440" cy="219456"/>
+            <a:off x="2999232" y="4846320"/>
+            <a:ext cx="2377440" cy="201168"/>
           </a:xfrm>
           <a:prstGeom prst="rect">
             <a:avLst/>
@@ -5908,15 +5908,15 @@
           <a:p>
             <a:pPr algn="l"/>
             <a:r>
-              <a:rPr sz="1150" b="0">
-                <a:solidFill>
-                  <a:srgbClr val="7F8A95"/>
+              <a:rPr sz="1100" b="0">
+                <a:solidFill>
+                  <a:srgbClr val="7E827E"/>
                 </a:solidFill>
                 <a:latin typeface="Microsoft YaHei"/>
                 <a:ea typeface="Consolas"/>
                 <a:cs typeface="Consolas"/>
               </a:rPr>
-              <a:t>达标</a:t>
+              <a:t>次要文字</a:t>
             </a:r>
           </a:p>
         </p:txBody>
@@ -5929,18 +5929,18 @@
         </p:nvSpPr>
         <p:spPr>
           <a:xfrm>
-            <a:off x="749808" y="5774436"/>
-            <a:ext cx="548640" cy="329184"/>
+            <a:off x="749808" y="5234940"/>
+            <a:ext cx="512064" cy="292608"/>
           </a:xfrm>
           <a:prstGeom prst="roundRect">
             <a:avLst/>
           </a:prstGeom>
           <a:solidFill>
-            <a:srgbClr val="D29922"/>
+            <a:srgbClr val="4B4F4B"/>
           </a:solidFill>
           <a:ln w="12700">
             <a:solidFill>
-              <a:srgbClr val="2F3944"/>
+              <a:srgbClr val="2B2F2E"/>
             </a:solidFill>
           </a:ln>
         </p:spPr>
@@ -5960,8 +5960,8 @@
         </p:nvSpPr>
         <p:spPr>
           <a:xfrm>
-            <a:off x="1426464" y="5774436"/>
-            <a:ext cx="1737360" cy="201168"/>
+            <a:off x="1389888" y="5225796"/>
+            <a:ext cx="1737360" cy="182880"/>
           </a:xfrm>
           <a:prstGeom prst="rect">
             <a:avLst/>
@@ -5976,15 +5976,15 @@
           <a:p>
             <a:pPr algn="l"/>
             <a:r>
-              <a:rPr sz="1000" b="0">
-                <a:solidFill>
-                  <a:srgbClr val="E9EDF1"/>
+              <a:rPr sz="950" b="0">
+                <a:solidFill>
+                  <a:srgbClr val="F2F2EF"/>
                 </a:solidFill>
                 <a:latin typeface="Consolas"/>
                 <a:ea typeface="Consolas"/>
                 <a:cs typeface="Consolas"/>
               </a:rPr>
-              <a:t>--warn</a:t>
+              <a:t>--faint</a:t>
             </a:r>
           </a:p>
         </p:txBody>
@@ -5997,8 +5997,8 @@
         </p:nvSpPr>
         <p:spPr>
           <a:xfrm>
-            <a:off x="1426464" y="5948172"/>
-            <a:ext cx="1737360" cy="164592"/>
+            <a:off x="1389888" y="5381244"/>
+            <a:ext cx="1737360" cy="146304"/>
           </a:xfrm>
           <a:prstGeom prst="rect">
             <a:avLst/>
@@ -6013,15 +6013,15 @@
           <a:p>
             <a:pPr algn="l"/>
             <a:r>
-              <a:rPr sz="800" b="0">
-                <a:solidFill>
-                  <a:srgbClr val="4D5762"/>
+              <a:rPr sz="750" b="0">
+                <a:solidFill>
+                  <a:srgbClr val="4B4F4B"/>
                 </a:solidFill>
                 <a:latin typeface="Consolas"/>
                 <a:ea typeface="Consolas"/>
                 <a:cs typeface="Consolas"/>
               </a:rPr>
-              <a:t>#D29922</a:t>
+              <a:t>#4B4F4B</a:t>
             </a:r>
           </a:p>
         </p:txBody>
@@ -6034,8 +6034,8 @@
         </p:nvSpPr>
         <p:spPr>
           <a:xfrm>
-            <a:off x="3090672" y="5838444"/>
-            <a:ext cx="2377440" cy="219456"/>
+            <a:off x="2999232" y="5280659"/>
+            <a:ext cx="2377440" cy="201168"/>
           </a:xfrm>
           <a:prstGeom prst="rect">
             <a:avLst/>
@@ -6050,28 +6050,312 @@
           <a:p>
             <a:pPr algn="l"/>
             <a:r>
-              <a:rPr sz="1150" b="0">
-                <a:solidFill>
-                  <a:srgbClr val="7F8A95"/>
+              <a:rPr sz="1100" b="0">
+                <a:solidFill>
+                  <a:srgbClr val="7E827E"/>
                 </a:solidFill>
                 <a:latin typeface="Microsoft YaHei"/>
                 <a:ea typeface="Consolas"/>
                 <a:cs typeface="Consolas"/>
               </a:rPr>
-              <a:t>提醒</a:t>
-            </a:r>
-          </a:p>
-        </p:txBody>
-      </p:sp>
-      <p:sp>
-        <p:nvSpPr>
-          <p:cNvPr id="40" name="TextBox 39"/>
-          <p:cNvSpPr txBox="1"/>
-          <p:nvPr/>
-        </p:nvSpPr>
-        <p:spPr>
-          <a:xfrm>
-            <a:off x="6355080" y="1920240"/>
+              <a:t>标注</a:t>
+            </a:r>
+          </a:p>
+        </p:txBody>
+      </p:sp>
+      <p:sp>
+        <p:nvSpPr>
+          <p:cNvPr id="40" name="Rounded Rectangle 39"/>
+          <p:cNvSpPr/>
+          <p:nvPr/>
+        </p:nvSpPr>
+        <p:spPr>
+          <a:xfrm>
+            <a:off x="749808" y="5669279"/>
+            <a:ext cx="512064" cy="292608"/>
+          </a:xfrm>
+          <a:prstGeom prst="roundRect">
+            <a:avLst/>
+          </a:prstGeom>
+          <a:solidFill>
+            <a:srgbClr val="D7FF3F"/>
+          </a:solidFill>
+          <a:ln w="12700">
+            <a:solidFill>
+              <a:srgbClr val="2B2F2E"/>
+            </a:solidFill>
+          </a:ln>
+        </p:spPr>
+        <p:txBody>
+          <a:bodyPr rtlCol="0" anchor="ctr"/>
+          <a:lstStyle/>
+          <a:p>
+            <a:pPr algn="ctr"/>
+          </a:p>
+        </p:txBody>
+      </p:sp>
+      <p:sp>
+        <p:nvSpPr>
+          <p:cNvPr id="41" name="TextBox 40"/>
+          <p:cNvSpPr txBox="1"/>
+          <p:nvPr/>
+        </p:nvSpPr>
+        <p:spPr>
+          <a:xfrm>
+            <a:off x="1389888" y="5660136"/>
+            <a:ext cx="1737360" cy="182880"/>
+          </a:xfrm>
+          <a:prstGeom prst="rect">
+            <a:avLst/>
+          </a:prstGeom>
+          <a:noFill/>
+        </p:spPr>
+        <p:txBody>
+          <a:bodyPr wrap="square">
+            <a:spAutoFit/>
+          </a:bodyPr>
+          <a:lstStyle/>
+          <a:p>
+            <a:pPr algn="l"/>
+            <a:r>
+              <a:rPr sz="950" b="0">
+                <a:solidFill>
+                  <a:srgbClr val="F2F2EF"/>
+                </a:solidFill>
+                <a:latin typeface="Consolas"/>
+                <a:ea typeface="Consolas"/>
+                <a:cs typeface="Consolas"/>
+              </a:rPr>
+              <a:t>--accent</a:t>
+            </a:r>
+          </a:p>
+        </p:txBody>
+      </p:sp>
+      <p:sp>
+        <p:nvSpPr>
+          <p:cNvPr id="42" name="TextBox 41"/>
+          <p:cNvSpPr txBox="1"/>
+          <p:nvPr/>
+        </p:nvSpPr>
+        <p:spPr>
+          <a:xfrm>
+            <a:off x="1389888" y="5815583"/>
+            <a:ext cx="1737360" cy="146304"/>
+          </a:xfrm>
+          <a:prstGeom prst="rect">
+            <a:avLst/>
+          </a:prstGeom>
+          <a:noFill/>
+        </p:spPr>
+        <p:txBody>
+          <a:bodyPr wrap="square">
+            <a:spAutoFit/>
+          </a:bodyPr>
+          <a:lstStyle/>
+          <a:p>
+            <a:pPr algn="l"/>
+            <a:r>
+              <a:rPr sz="750" b="0">
+                <a:solidFill>
+                  <a:srgbClr val="4B4F4B"/>
+                </a:solidFill>
+                <a:latin typeface="Consolas"/>
+                <a:ea typeface="Consolas"/>
+                <a:cs typeface="Consolas"/>
+              </a:rPr>
+              <a:t>#D7FF3F</a:t>
+            </a:r>
+          </a:p>
+        </p:txBody>
+      </p:sp>
+      <p:sp>
+        <p:nvSpPr>
+          <p:cNvPr id="43" name="TextBox 42"/>
+          <p:cNvSpPr txBox="1"/>
+          <p:nvPr/>
+        </p:nvSpPr>
+        <p:spPr>
+          <a:xfrm>
+            <a:off x="2999232" y="5714999"/>
+            <a:ext cx="2377440" cy="201168"/>
+          </a:xfrm>
+          <a:prstGeom prst="rect">
+            <a:avLst/>
+          </a:prstGeom>
+          <a:noFill/>
+        </p:spPr>
+        <p:txBody>
+          <a:bodyPr wrap="square">
+            <a:spAutoFit/>
+          </a:bodyPr>
+          <a:lstStyle/>
+          <a:p>
+            <a:pPr algn="l"/>
+            <a:r>
+              <a:rPr sz="1100" b="0">
+                <a:solidFill>
+                  <a:srgbClr val="7E827E"/>
+                </a:solidFill>
+                <a:latin typeface="Microsoft YaHei"/>
+                <a:ea typeface="Consolas"/>
+                <a:cs typeface="Consolas"/>
+              </a:rPr>
+              <a:t>唯一强调色</a:t>
+            </a:r>
+          </a:p>
+        </p:txBody>
+      </p:sp>
+      <p:sp>
+        <p:nvSpPr>
+          <p:cNvPr id="44" name="Rounded Rectangle 43"/>
+          <p:cNvSpPr/>
+          <p:nvPr/>
+        </p:nvSpPr>
+        <p:spPr>
+          <a:xfrm>
+            <a:off x="749808" y="6103619"/>
+            <a:ext cx="512064" cy="292608"/>
+          </a:xfrm>
+          <a:prstGeom prst="roundRect">
+            <a:avLst/>
+          </a:prstGeom>
+          <a:solidFill>
+            <a:srgbClr val="F1F1EE"/>
+          </a:solidFill>
+          <a:ln w="12700">
+            <a:solidFill>
+              <a:srgbClr val="2B2F2E"/>
+            </a:solidFill>
+          </a:ln>
+        </p:spPr>
+        <p:txBody>
+          <a:bodyPr rtlCol="0" anchor="ctr"/>
+          <a:lstStyle/>
+          <a:p>
+            <a:pPr algn="ctr"/>
+          </a:p>
+        </p:txBody>
+      </p:sp>
+      <p:sp>
+        <p:nvSpPr>
+          <p:cNvPr id="45" name="TextBox 44"/>
+          <p:cNvSpPr txBox="1"/>
+          <p:nvPr/>
+        </p:nvSpPr>
+        <p:spPr>
+          <a:xfrm>
+            <a:off x="1389888" y="6094475"/>
+            <a:ext cx="1737360" cy="182880"/>
+          </a:xfrm>
+          <a:prstGeom prst="rect">
+            <a:avLst/>
+          </a:prstGeom>
+          <a:noFill/>
+        </p:spPr>
+        <p:txBody>
+          <a:bodyPr wrap="square">
+            <a:spAutoFit/>
+          </a:bodyPr>
+          <a:lstStyle/>
+          <a:p>
+            <a:pPr algn="l"/>
+            <a:r>
+              <a:rPr sz="950" b="0">
+                <a:solidFill>
+                  <a:srgbClr val="F2F2EF"/>
+                </a:solidFill>
+                <a:latin typeface="Consolas"/>
+                <a:ea typeface="Consolas"/>
+                <a:cs typeface="Consolas"/>
+              </a:rPr>
+              <a:t>--pill</a:t>
+            </a:r>
+          </a:p>
+        </p:txBody>
+      </p:sp>
+      <p:sp>
+        <p:nvSpPr>
+          <p:cNvPr id="46" name="TextBox 45"/>
+          <p:cNvSpPr txBox="1"/>
+          <p:nvPr/>
+        </p:nvSpPr>
+        <p:spPr>
+          <a:xfrm>
+            <a:off x="1389888" y="6249923"/>
+            <a:ext cx="1737360" cy="146304"/>
+          </a:xfrm>
+          <a:prstGeom prst="rect">
+            <a:avLst/>
+          </a:prstGeom>
+          <a:noFill/>
+        </p:spPr>
+        <p:txBody>
+          <a:bodyPr wrap="square">
+            <a:spAutoFit/>
+          </a:bodyPr>
+          <a:lstStyle/>
+          <a:p>
+            <a:pPr algn="l"/>
+            <a:r>
+              <a:rPr sz="750" b="0">
+                <a:solidFill>
+                  <a:srgbClr val="4B4F4B"/>
+                </a:solidFill>
+                <a:latin typeface="Consolas"/>
+                <a:ea typeface="Consolas"/>
+                <a:cs typeface="Consolas"/>
+              </a:rPr>
+              <a:t>#F1F1EE</a:t>
+            </a:r>
+          </a:p>
+        </p:txBody>
+      </p:sp>
+      <p:sp>
+        <p:nvSpPr>
+          <p:cNvPr id="47" name="TextBox 46"/>
+          <p:cNvSpPr txBox="1"/>
+          <p:nvPr/>
+        </p:nvSpPr>
+        <p:spPr>
+          <a:xfrm>
+            <a:off x="2999232" y="6149339"/>
+            <a:ext cx="2377440" cy="201168"/>
+          </a:xfrm>
+          <a:prstGeom prst="rect">
+            <a:avLst/>
+          </a:prstGeom>
+          <a:noFill/>
+        </p:spPr>
+        <p:txBody>
+          <a:bodyPr wrap="square">
+            <a:spAutoFit/>
+          </a:bodyPr>
+          <a:lstStyle/>
+          <a:p>
+            <a:pPr algn="l"/>
+            <a:r>
+              <a:rPr sz="1100" b="0">
+                <a:solidFill>
+                  <a:srgbClr val="7E827E"/>
+                </a:solidFill>
+                <a:latin typeface="Microsoft YaHei"/>
+                <a:ea typeface="Consolas"/>
+                <a:cs typeface="Consolas"/>
+              </a:rPr>
+              <a:t>导航选中（反色）</a:t>
+            </a:r>
+          </a:p>
+        </p:txBody>
+      </p:sp>
+      <p:sp>
+        <p:nvSpPr>
+          <p:cNvPr id="48" name="TextBox 47"/>
+          <p:cNvSpPr txBox="1"/>
+          <p:nvPr/>
+        </p:nvSpPr>
+        <p:spPr>
+          <a:xfrm>
+            <a:off x="6355080" y="1883664"/>
             <a:ext cx="685800" cy="365760"/>
           </a:xfrm>
           <a:prstGeom prst="rect">
@@ -6087,9 +6371,9 @@
           <a:p>
             <a:pPr algn="l"/>
             <a:r>
-              <a:rPr sz="2100" b="1">
-                <a:solidFill>
-                  <a:srgbClr val="E0453A"/>
+              <a:rPr sz="2000" b="1">
+                <a:solidFill>
+                  <a:srgbClr val="D7FF3F"/>
                 </a:solidFill>
                 <a:latin typeface="Consolas"/>
                 <a:ea typeface="Consolas"/>
@@ -6102,13 +6386,13 @@
       </p:sp>
       <p:sp>
         <p:nvSpPr>
-          <p:cNvPr id="41" name="TextBox 40"/>
-          <p:cNvSpPr txBox="1"/>
-          <p:nvPr/>
-        </p:nvSpPr>
-        <p:spPr>
-          <a:xfrm>
-            <a:off x="7040880" y="1938528"/>
+          <p:cNvPr id="49" name="TextBox 48"/>
+          <p:cNvSpPr txBox="1"/>
+          <p:nvPr/>
+        </p:nvSpPr>
+        <p:spPr>
+          <a:xfrm>
+            <a:off x="7040880" y="1892807"/>
             <a:ext cx="4480560" cy="274320"/>
           </a:xfrm>
           <a:prstGeom prst="rect">
@@ -6124,28 +6408,28 @@
           <a:p>
             <a:pPr algn="l"/>
             <a:r>
-              <a:rPr sz="1450" b="1">
-                <a:solidFill>
-                  <a:srgbClr val="E9EDF1"/>
+              <a:rPr sz="1400" b="1">
+                <a:solidFill>
+                  <a:srgbClr val="F2F2EF"/>
                 </a:solidFill>
                 <a:latin typeface="Microsoft YaHei"/>
                 <a:ea typeface="Consolas"/>
                 <a:cs typeface="Consolas"/>
               </a:rPr>
-              <a:t>数字用等宽大字</a:t>
-            </a:r>
-          </a:p>
-        </p:txBody>
-      </p:sp>
-      <p:sp>
-        <p:nvSpPr>
-          <p:cNvPr id="42" name="TextBox 41"/>
-          <p:cNvSpPr txBox="1"/>
-          <p:nvPr/>
-        </p:nvSpPr>
-        <p:spPr>
-          <a:xfrm>
-            <a:off x="7040880" y="2286000"/>
+              <a:t>编号导航 + 小字母英文</a:t>
+            </a:r>
+          </a:p>
+        </p:txBody>
+      </p:sp>
+      <p:sp>
+        <p:nvSpPr>
+          <p:cNvPr id="50" name="TextBox 49"/>
+          <p:cNvSpPr txBox="1"/>
+          <p:nvPr/>
+        </p:nvSpPr>
+        <p:spPr>
+          <a:xfrm>
+            <a:off x="7040880" y="2231136"/>
             <a:ext cx="4389120" cy="914400"/>
           </a:xfrm>
           <a:prstGeom prst="rect">
@@ -6161,35 +6445,35 @@
           <a:p>
             <a:pPr algn="l">
               <a:spcBef>
-                <a:spcPts val="150"/>
+                <a:spcPts val="155"/>
               </a:spcBef>
               <a:spcAft>
-                <a:spcPts val="150"/>
+                <a:spcPts val="155"/>
               </a:spcAft>
             </a:pPr>
             <a:r>
               <a:rPr sz="1050" b="0">
                 <a:solidFill>
-                  <a:srgbClr val="7F8A95"/>
+                  <a:srgbClr val="7E827E"/>
                 </a:solidFill>
                 <a:latin typeface="Microsoft YaHei"/>
                 <a:ea typeface="Consolas"/>
                 <a:cs typeface="Consolas"/>
               </a:rPr>
-              <a:t>容量、组数、热量是这几页真正的主角。46pt 等宽数字 + 小号单位，眼睛先看到数，再看到字。</a:t>
-            </a:r>
-          </a:p>
-        </p:txBody>
-      </p:sp>
-      <p:sp>
-        <p:nvSpPr>
-          <p:cNvPr id="43" name="TextBox 42"/>
-          <p:cNvSpPr txBox="1"/>
-          <p:nvPr/>
-        </p:nvSpPr>
-        <p:spPr>
-          <a:xfrm>
-            <a:off x="6355080" y="3383280"/>
+              <a:t>01 今日 / TODAY。数字用等宽、英文 8px 字距 .15em，中文照常。选中项是反色浅底，不是加粗。</a:t>
+            </a:r>
+          </a:p>
+        </p:txBody>
+      </p:sp>
+      <p:sp>
+        <p:nvSpPr>
+          <p:cNvPr id="51" name="TextBox 50"/>
+          <p:cNvSpPr txBox="1"/>
+          <p:nvPr/>
+        </p:nvSpPr>
+        <p:spPr>
+          <a:xfrm>
+            <a:off x="6355080" y="3328416"/>
             <a:ext cx="685800" cy="365760"/>
           </a:xfrm>
           <a:prstGeom prst="rect">
@@ -6205,9 +6489,9 @@
           <a:p>
             <a:pPr algn="l"/>
             <a:r>
-              <a:rPr sz="2100" b="1">
-                <a:solidFill>
-                  <a:srgbClr val="E0453A"/>
+              <a:rPr sz="2000" b="1">
+                <a:solidFill>
+                  <a:srgbClr val="D7FF3F"/>
                 </a:solidFill>
                 <a:latin typeface="Consolas"/>
                 <a:ea typeface="Consolas"/>
@@ -6220,13 +6504,13 @@
       </p:sp>
       <p:sp>
         <p:nvSpPr>
-          <p:cNvPr id="44" name="TextBox 43"/>
-          <p:cNvSpPr txBox="1"/>
-          <p:nvPr/>
-        </p:nvSpPr>
-        <p:spPr>
-          <a:xfrm>
-            <a:off x="7040880" y="3401568"/>
+          <p:cNvPr id="52" name="TextBox 51"/>
+          <p:cNvSpPr txBox="1"/>
+          <p:nvPr/>
+        </p:nvSpPr>
+        <p:spPr>
+          <a:xfrm>
+            <a:off x="7040880" y="3337560"/>
             <a:ext cx="4480560" cy="274320"/>
           </a:xfrm>
           <a:prstGeom prst="rect">
@@ -6242,28 +6526,28 @@
           <a:p>
             <a:pPr algn="l"/>
             <a:r>
-              <a:rPr sz="1450" b="1">
-                <a:solidFill>
-                  <a:srgbClr val="E9EDF1"/>
+              <a:rPr sz="1400" b="1">
+                <a:solidFill>
+                  <a:srgbClr val="F2F2EF"/>
                 </a:solidFill>
                 <a:latin typeface="Microsoft YaHei"/>
                 <a:ea typeface="Consolas"/>
                 <a:cs typeface="Consolas"/>
               </a:rPr>
-              <a:t>红色只给「数据」与「正在发生」</a:t>
-            </a:r>
-          </a:p>
-        </p:txBody>
-      </p:sp>
-      <p:sp>
-        <p:nvSpPr>
-          <p:cNvPr id="45" name="TextBox 44"/>
-          <p:cNvSpPr txBox="1"/>
-          <p:nvPr/>
-        </p:nvSpPr>
-        <p:spPr>
-          <a:xfrm>
-            <a:off x="7040880" y="3749040"/>
+              <a:t>字重 500，不是 700</a:t>
+            </a:r>
+          </a:p>
+        </p:txBody>
+      </p:sp>
+      <p:sp>
+        <p:nvSpPr>
+          <p:cNvPr id="53" name="TextBox 52"/>
+          <p:cNvSpPr txBox="1"/>
+          <p:nvPr/>
+        </p:nvSpPr>
+        <p:spPr>
+          <a:xfrm>
+            <a:off x="7040880" y="3675888"/>
             <a:ext cx="4389120" cy="914400"/>
           </a:xfrm>
           <a:prstGeom prst="rect">
@@ -6279,35 +6563,35 @@
           <a:p>
             <a:pPr algn="l">
               <a:spcBef>
-                <a:spcPts val="150"/>
+                <a:spcPts val="155"/>
               </a:spcBef>
               <a:spcAft>
-                <a:spcPts val="150"/>
+                <a:spcPts val="155"/>
               </a:spcAft>
             </a:pPr>
             <a:r>
               <a:rPr sz="1050" b="0">
                 <a:solidFill>
-                  <a:srgbClr val="7F8A95"/>
+                  <a:srgbClr val="7E827E"/>
                 </a:solidFill>
                 <a:latin typeface="Microsoft YaHei"/>
                 <a:ea typeface="Consolas"/>
                 <a:cs typeface="Consolas"/>
               </a:rPr>
-              <a:t>不做装饰色。达标用绿、提醒用黄，红只出现在「这是你的数」和「这个被选中」。</a:t>
-            </a:r>
-          </a:p>
-        </p:txBody>
-      </p:sp>
-      <p:sp>
-        <p:nvSpPr>
-          <p:cNvPr id="46" name="TextBox 45"/>
-          <p:cNvSpPr txBox="1"/>
-          <p:nvPr/>
-        </p:nvSpPr>
-        <p:spPr>
-          <a:xfrm>
-            <a:off x="6355080" y="4846320"/>
+              <a:t>标题 650、数字 500。粗体让界面显得吵；轻一点、大一点、间距开一点，才有编辑感。</a:t>
+            </a:r>
+          </a:p>
+        </p:txBody>
+      </p:sp>
+      <p:sp>
+        <p:nvSpPr>
+          <p:cNvPr id="54" name="TextBox 53"/>
+          <p:cNvSpPr txBox="1"/>
+          <p:nvPr/>
+        </p:nvSpPr>
+        <p:spPr>
+          <a:xfrm>
+            <a:off x="6355080" y="4773168"/>
             <a:ext cx="685800" cy="365760"/>
           </a:xfrm>
           <a:prstGeom prst="rect">
@@ -6323,9 +6607,9 @@
           <a:p>
             <a:pPr algn="l"/>
             <a:r>
-              <a:rPr sz="2100" b="1">
-                <a:solidFill>
-                  <a:srgbClr val="E0453A"/>
+              <a:rPr sz="2000" b="1">
+                <a:solidFill>
+                  <a:srgbClr val="D7FF3F"/>
                 </a:solidFill>
                 <a:latin typeface="Consolas"/>
                 <a:ea typeface="Consolas"/>
@@ -6338,13 +6622,13 @@
       </p:sp>
       <p:sp>
         <p:nvSpPr>
-          <p:cNvPr id="47" name="TextBox 46"/>
-          <p:cNvSpPr txBox="1"/>
-          <p:nvPr/>
-        </p:nvSpPr>
-        <p:spPr>
-          <a:xfrm>
-            <a:off x="7040880" y="4864608"/>
+          <p:cNvPr id="55" name="TextBox 54"/>
+          <p:cNvSpPr txBox="1"/>
+          <p:nvPr/>
+        </p:nvSpPr>
+        <p:spPr>
+          <a:xfrm>
+            <a:off x="7040880" y="4782312"/>
             <a:ext cx="4480560" cy="274320"/>
           </a:xfrm>
           <a:prstGeom prst="rect">
@@ -6360,28 +6644,28 @@
           <a:p>
             <a:pPr algn="l"/>
             <a:r>
-              <a:rPr sz="1450" b="1">
-                <a:solidFill>
-                  <a:srgbClr val="E9EDF1"/>
+              <a:rPr sz="1400" b="1">
+                <a:solidFill>
+                  <a:srgbClr val="F2F2EF"/>
                 </a:solidFill>
                 <a:latin typeface="Microsoft YaHei"/>
                 <a:ea typeface="Consolas"/>
                 <a:cs typeface="Consolas"/>
               </a:rPr>
-              <a:t>每页至少一张微型图</a:t>
-            </a:r>
-          </a:p>
-        </p:txBody>
-      </p:sp>
-      <p:sp>
-        <p:nvSpPr>
-          <p:cNvPr id="48" name="TextBox 47"/>
-          <p:cNvSpPr txBox="1"/>
-          <p:nvPr/>
-        </p:nvSpPr>
-        <p:spPr>
-          <a:xfrm>
-            <a:off x="7040880" y="5212080"/>
+              <a:t>一个色只做一件事</a:t>
+            </a:r>
+          </a:p>
+        </p:txBody>
+      </p:sp>
+      <p:sp>
+        <p:nvSpPr>
+          <p:cNvPr id="56" name="TextBox 55"/>
+          <p:cNvSpPr txBox="1"/>
+          <p:nvPr/>
+        </p:nvSpPr>
+        <p:spPr>
+          <a:xfrm>
+            <a:off x="7040880" y="5120640"/>
             <a:ext cx="4389120" cy="914400"/>
           </a:xfrm>
           <a:prstGeom prst="rect">
@@ -6397,29 +6681,29 @@
           <a:p>
             <a:pPr algn="l">
               <a:spcBef>
-                <a:spcPts val="150"/>
+                <a:spcPts val="155"/>
               </a:spcBef>
               <a:spcAft>
-                <a:spcPts val="150"/>
+                <a:spcPts val="155"/>
               </a:spcAft>
             </a:pPr>
             <a:r>
               <a:rPr sz="1050" b="0">
                 <a:solidFill>
-                  <a:srgbClr val="7F8A95"/>
+                  <a:srgbClr val="7E827E"/>
                 </a:solidFill>
                 <a:latin typeface="Microsoft YaHei"/>
                 <a:ea typeface="Consolas"/>
                 <a:cs typeface="Consolas"/>
               </a:rPr>
-              <a:t>17 格热力条、环形进度、sparkline、分段条。图比文字更快回答「我这周怎么样」。</a:t>
-            </a:r>
-          </a:p>
-        </p:txBody>
-      </p:sp>
-      <p:sp>
-        <p:nvSpPr>
-          <p:cNvPr id="49" name="TextBox 48"/>
+              <a:t>柠檬绿只表示「这是你的数」和「这里被选中」。其余一律用墨色与灰阶分级。</a:t>
+            </a:r>
+          </a:p>
+        </p:txBody>
+      </p:sp>
+      <p:sp>
+        <p:nvSpPr>
+          <p:cNvPr id="57" name="TextBox 56"/>
           <p:cNvSpPr txBox="1"/>
           <p:nvPr/>
         </p:nvSpPr>
@@ -6487,7 +6771,7 @@
             <a:avLst/>
           </a:prstGeom>
           <a:solidFill>
-            <a:srgbClr val="0B0E11"/>
+            <a:srgbClr val="0B0C0B"/>
           </a:solidFill>
           <a:ln>
             <a:noFill/>
@@ -6527,7 +6811,7 @@
             <a:r>
               <a:rPr sz="950" b="0">
                 <a:solidFill>
-                  <a:srgbClr val="4D5762"/>
+                  <a:srgbClr val="4B4F4B"/>
                 </a:solidFill>
                 <a:latin typeface="Microsoft YaHei"/>
                 <a:ea typeface="Consolas"/>
@@ -6564,7 +6848,7 @@
             <a:r>
               <a:rPr sz="2700" b="1">
                 <a:solidFill>
-                  <a:srgbClr val="E9EDF1"/>
+                  <a:srgbClr val="F2F2EF"/>
                 </a:solidFill>
                 <a:latin typeface="Microsoft YaHei"/>
                 <a:ea typeface="Consolas"/>
@@ -6601,7 +6885,7 @@
             <a:r>
               <a:rPr sz="1100" b="0">
                 <a:solidFill>
-                  <a:srgbClr val="7F8A95"/>
+                  <a:srgbClr val="7E827E"/>
                 </a:solidFill>
                 <a:latin typeface="Microsoft YaHei"/>
                 <a:ea typeface="Consolas"/>
@@ -6627,7 +6911,7 @@
             <a:avLst/>
           </a:prstGeom>
           <a:solidFill>
-            <a:srgbClr val="2F3944"/>
+            <a:srgbClr val="2B2F2E"/>
           </a:solidFill>
           <a:ln>
             <a:noFill/>
@@ -6691,7 +6975,7 @@
             <a:r>
               <a:rPr sz="950" b="0">
                 <a:solidFill>
-                  <a:srgbClr val="4D5762"/>
+                  <a:srgbClr val="4B4F4B"/>
                 </a:solidFill>
                 <a:latin typeface="Microsoft YaHei"/>
                 <a:ea typeface="Consolas"/>
@@ -6717,7 +7001,7 @@
             <a:avLst/>
           </a:prstGeom>
           <a:solidFill>
-            <a:srgbClr val="2F3944"/>
+            <a:srgbClr val="2B2F2E"/>
           </a:solidFill>
           <a:ln>
             <a:noFill/>
@@ -6757,7 +7041,7 @@
             <a:r>
               <a:rPr sz="1200" b="1">
                 <a:solidFill>
-                  <a:srgbClr val="E0453A"/>
+                  <a:srgbClr val="D7FF3F"/>
                 </a:solidFill>
                 <a:latin typeface="Consolas"/>
                 <a:ea typeface="Consolas"/>
@@ -6801,7 +7085,7 @@
             <a:r>
               <a:rPr sz="1000" b="0">
                 <a:solidFill>
-                  <a:srgbClr val="7F8A95"/>
+                  <a:srgbClr val="7E827E"/>
                 </a:solidFill>
                 <a:latin typeface="Microsoft YaHei"/>
                 <a:ea typeface="Consolas"/>
@@ -6838,7 +7122,7 @@
             <a:r>
               <a:rPr sz="1200" b="1">
                 <a:solidFill>
-                  <a:srgbClr val="E0453A"/>
+                  <a:srgbClr val="D7FF3F"/>
                 </a:solidFill>
                 <a:latin typeface="Consolas"/>
                 <a:ea typeface="Consolas"/>
@@ -6882,7 +7166,7 @@
             <a:r>
               <a:rPr sz="1000" b="0">
                 <a:solidFill>
-                  <a:srgbClr val="7F8A95"/>
+                  <a:srgbClr val="7E827E"/>
                 </a:solidFill>
                 <a:latin typeface="Microsoft YaHei"/>
                 <a:ea typeface="Consolas"/>
@@ -6919,7 +7203,7 @@
             <a:r>
               <a:rPr sz="1200" b="1">
                 <a:solidFill>
-                  <a:srgbClr val="E0453A"/>
+                  <a:srgbClr val="D7FF3F"/>
                 </a:solidFill>
                 <a:latin typeface="Consolas"/>
                 <a:ea typeface="Consolas"/>
@@ -6963,7 +7247,7 @@
             <a:r>
               <a:rPr sz="1000" b="0">
                 <a:solidFill>
-                  <a:srgbClr val="7F8A95"/>
+                  <a:srgbClr val="7E827E"/>
                 </a:solidFill>
                 <a:latin typeface="Microsoft YaHei"/>
                 <a:ea typeface="Consolas"/>
@@ -6989,7 +7273,7 @@
             <a:avLst/>
           </a:prstGeom>
           <a:solidFill>
-            <a:srgbClr val="222A32"/>
+            <a:srgbClr val="232625"/>
           </a:solidFill>
           <a:ln>
             <a:noFill/>
@@ -7029,7 +7313,7 @@
             <a:r>
               <a:rPr sz="950" b="0">
                 <a:solidFill>
-                  <a:srgbClr val="4D5762"/>
+                  <a:srgbClr val="4B4F4B"/>
                 </a:solidFill>
                 <a:latin typeface="Microsoft YaHei"/>
                 <a:ea typeface="Consolas"/>
@@ -7073,7 +7357,7 @@
             <a:r>
               <a:rPr sz="1000" b="0">
                 <a:solidFill>
-                  <a:srgbClr val="E9EDF1"/>
+                  <a:srgbClr val="F2F2EF"/>
                 </a:solidFill>
                 <a:latin typeface="Microsoft YaHei"/>
                 <a:ea typeface="Consolas"/>
@@ -7154,7 +7438,7 @@
             <a:avLst/>
           </a:prstGeom>
           <a:solidFill>
-            <a:srgbClr val="0B0E11"/>
+            <a:srgbClr val="0B0C0B"/>
           </a:solidFill>
           <a:ln>
             <a:noFill/>
@@ -7194,7 +7478,7 @@
             <a:r>
               <a:rPr sz="950" b="0">
                 <a:solidFill>
-                  <a:srgbClr val="4D5762"/>
+                  <a:srgbClr val="4B4F4B"/>
                 </a:solidFill>
                 <a:latin typeface="Microsoft YaHei"/>
                 <a:ea typeface="Consolas"/>
@@ -7231,7 +7515,7 @@
             <a:r>
               <a:rPr sz="2700" b="1">
                 <a:solidFill>
-                  <a:srgbClr val="E9EDF1"/>
+                  <a:srgbClr val="F2F2EF"/>
                 </a:solidFill>
                 <a:latin typeface="Microsoft YaHei"/>
                 <a:ea typeface="Consolas"/>
@@ -7268,7 +7552,7 @@
             <a:r>
               <a:rPr sz="1100" b="0">
                 <a:solidFill>
-                  <a:srgbClr val="7F8A95"/>
+                  <a:srgbClr val="7E827E"/>
                 </a:solidFill>
                 <a:latin typeface="Microsoft YaHei"/>
                 <a:ea typeface="Consolas"/>
@@ -7294,7 +7578,7 @@
             <a:avLst/>
           </a:prstGeom>
           <a:solidFill>
-            <a:srgbClr val="2F3944"/>
+            <a:srgbClr val="2B2F2E"/>
           </a:solidFill>
           <a:ln>
             <a:noFill/>
@@ -7358,7 +7642,7 @@
             <a:r>
               <a:rPr sz="950" b="0">
                 <a:solidFill>
-                  <a:srgbClr val="4D5762"/>
+                  <a:srgbClr val="4B4F4B"/>
                 </a:solidFill>
                 <a:latin typeface="Microsoft YaHei"/>
                 <a:ea typeface="Consolas"/>
@@ -7384,7 +7668,7 @@
             <a:avLst/>
           </a:prstGeom>
           <a:solidFill>
-            <a:srgbClr val="2F3944"/>
+            <a:srgbClr val="2B2F2E"/>
           </a:solidFill>
           <a:ln>
             <a:noFill/>
@@ -7424,7 +7708,7 @@
             <a:r>
               <a:rPr sz="1200" b="1">
                 <a:solidFill>
-                  <a:srgbClr val="E0453A"/>
+                  <a:srgbClr val="D7FF3F"/>
                 </a:solidFill>
                 <a:latin typeface="Consolas"/>
                 <a:ea typeface="Consolas"/>
@@ -7468,7 +7752,7 @@
             <a:r>
               <a:rPr sz="1000" b="0">
                 <a:solidFill>
-                  <a:srgbClr val="7F8A95"/>
+                  <a:srgbClr val="7E827E"/>
                 </a:solidFill>
                 <a:latin typeface="Microsoft YaHei"/>
                 <a:ea typeface="Consolas"/>
@@ -7505,7 +7789,7 @@
             <a:r>
               <a:rPr sz="1200" b="1">
                 <a:solidFill>
-                  <a:srgbClr val="E0453A"/>
+                  <a:srgbClr val="D7FF3F"/>
                 </a:solidFill>
                 <a:latin typeface="Consolas"/>
                 <a:ea typeface="Consolas"/>
@@ -7549,7 +7833,7 @@
             <a:r>
               <a:rPr sz="1000" b="0">
                 <a:solidFill>
-                  <a:srgbClr val="7F8A95"/>
+                  <a:srgbClr val="7E827E"/>
                 </a:solidFill>
                 <a:latin typeface="Microsoft YaHei"/>
                 <a:ea typeface="Consolas"/>
@@ -7586,7 +7870,7 @@
             <a:r>
               <a:rPr sz="1200" b="1">
                 <a:solidFill>
-                  <a:srgbClr val="E0453A"/>
+                  <a:srgbClr val="D7FF3F"/>
                 </a:solidFill>
                 <a:latin typeface="Consolas"/>
                 <a:ea typeface="Consolas"/>
@@ -7630,7 +7914,7 @@
             <a:r>
               <a:rPr sz="1000" b="0">
                 <a:solidFill>
-                  <a:srgbClr val="7F8A95"/>
+                  <a:srgbClr val="7E827E"/>
                 </a:solidFill>
                 <a:latin typeface="Microsoft YaHei"/>
                 <a:ea typeface="Consolas"/>
@@ -7656,7 +7940,7 @@
             <a:avLst/>
           </a:prstGeom>
           <a:solidFill>
-            <a:srgbClr val="222A32"/>
+            <a:srgbClr val="232625"/>
           </a:solidFill>
           <a:ln>
             <a:noFill/>
@@ -7696,7 +7980,7 @@
             <a:r>
               <a:rPr sz="950" b="0">
                 <a:solidFill>
-                  <a:srgbClr val="4D5762"/>
+                  <a:srgbClr val="4B4F4B"/>
                 </a:solidFill>
                 <a:latin typeface="Microsoft YaHei"/>
                 <a:ea typeface="Consolas"/>
@@ -7740,7 +8024,7 @@
             <a:r>
               <a:rPr sz="1000" b="0">
                 <a:solidFill>
-                  <a:srgbClr val="E9EDF1"/>
+                  <a:srgbClr val="F2F2EF"/>
                 </a:solidFill>
                 <a:latin typeface="Microsoft YaHei"/>
                 <a:ea typeface="Consolas"/>
@@ -7821,7 +8105,7 @@
             <a:avLst/>
           </a:prstGeom>
           <a:solidFill>
-            <a:srgbClr val="0B0E11"/>
+            <a:srgbClr val="0B0C0B"/>
           </a:solidFill>
           <a:ln>
             <a:noFill/>
@@ -7861,7 +8145,7 @@
             <a:r>
               <a:rPr sz="950" b="0">
                 <a:solidFill>
-                  <a:srgbClr val="4D5762"/>
+                  <a:srgbClr val="4B4F4B"/>
                 </a:solidFill>
                 <a:latin typeface="Microsoft YaHei"/>
                 <a:ea typeface="Consolas"/>
@@ -7898,7 +8182,7 @@
             <a:r>
               <a:rPr sz="2700" b="1">
                 <a:solidFill>
-                  <a:srgbClr val="E9EDF1"/>
+                  <a:srgbClr val="F2F2EF"/>
                 </a:solidFill>
                 <a:latin typeface="Microsoft YaHei"/>
                 <a:ea typeface="Consolas"/>
@@ -7935,7 +8219,7 @@
             <a:r>
               <a:rPr sz="1100" b="0">
                 <a:solidFill>
-                  <a:srgbClr val="7F8A95"/>
+                  <a:srgbClr val="7E827E"/>
                 </a:solidFill>
                 <a:latin typeface="Microsoft YaHei"/>
                 <a:ea typeface="Consolas"/>
@@ -7961,7 +8245,7 @@
             <a:avLst/>
           </a:prstGeom>
           <a:solidFill>
-            <a:srgbClr val="2F3944"/>
+            <a:srgbClr val="2B2F2E"/>
           </a:solidFill>
           <a:ln>
             <a:noFill/>
@@ -8025,7 +8309,7 @@
             <a:r>
               <a:rPr sz="950" b="0">
                 <a:solidFill>
-                  <a:srgbClr val="4D5762"/>
+                  <a:srgbClr val="4B4F4B"/>
                 </a:solidFill>
                 <a:latin typeface="Microsoft YaHei"/>
                 <a:ea typeface="Consolas"/>
@@ -8051,7 +8335,7 @@
             <a:avLst/>
           </a:prstGeom>
           <a:solidFill>
-            <a:srgbClr val="2F3944"/>
+            <a:srgbClr val="2B2F2E"/>
           </a:solidFill>
           <a:ln>
             <a:noFill/>
@@ -8091,7 +8375,7 @@
             <a:r>
               <a:rPr sz="1200" b="1">
                 <a:solidFill>
-                  <a:srgbClr val="E0453A"/>
+                  <a:srgbClr val="D7FF3F"/>
                 </a:solidFill>
                 <a:latin typeface="Consolas"/>
                 <a:ea typeface="Consolas"/>
@@ -8135,7 +8419,7 @@
             <a:r>
               <a:rPr sz="1000" b="0">
                 <a:solidFill>
-                  <a:srgbClr val="7F8A95"/>
+                  <a:srgbClr val="7E827E"/>
                 </a:solidFill>
                 <a:latin typeface="Microsoft YaHei"/>
                 <a:ea typeface="Consolas"/>
@@ -8172,7 +8456,7 @@
             <a:r>
               <a:rPr sz="1200" b="1">
                 <a:solidFill>
-                  <a:srgbClr val="E0453A"/>
+                  <a:srgbClr val="D7FF3F"/>
                 </a:solidFill>
                 <a:latin typeface="Consolas"/>
                 <a:ea typeface="Consolas"/>
@@ -8216,7 +8500,7 @@
             <a:r>
               <a:rPr sz="1000" b="0">
                 <a:solidFill>
-                  <a:srgbClr val="7F8A95"/>
+                  <a:srgbClr val="7E827E"/>
                 </a:solidFill>
                 <a:latin typeface="Microsoft YaHei"/>
                 <a:ea typeface="Consolas"/>
@@ -8253,7 +8537,7 @@
             <a:r>
               <a:rPr sz="1200" b="1">
                 <a:solidFill>
-                  <a:srgbClr val="E0453A"/>
+                  <a:srgbClr val="D7FF3F"/>
                 </a:solidFill>
                 <a:latin typeface="Consolas"/>
                 <a:ea typeface="Consolas"/>
@@ -8297,7 +8581,7 @@
             <a:r>
               <a:rPr sz="1000" b="0">
                 <a:solidFill>
-                  <a:srgbClr val="7F8A95"/>
+                  <a:srgbClr val="7E827E"/>
                 </a:solidFill>
                 <a:latin typeface="Microsoft YaHei"/>
                 <a:ea typeface="Consolas"/>
@@ -8323,7 +8607,7 @@
             <a:avLst/>
           </a:prstGeom>
           <a:solidFill>
-            <a:srgbClr val="222A32"/>
+            <a:srgbClr val="232625"/>
           </a:solidFill>
           <a:ln>
             <a:noFill/>
@@ -8363,7 +8647,7 @@
             <a:r>
               <a:rPr sz="950" b="0">
                 <a:solidFill>
-                  <a:srgbClr val="4D5762"/>
+                  <a:srgbClr val="4B4F4B"/>
                 </a:solidFill>
                 <a:latin typeface="Microsoft YaHei"/>
                 <a:ea typeface="Consolas"/>
@@ -8407,7 +8691,7 @@
             <a:r>
               <a:rPr sz="1000" b="0">
                 <a:solidFill>
-                  <a:srgbClr val="E9EDF1"/>
+                  <a:srgbClr val="F2F2EF"/>
                 </a:solidFill>
                 <a:latin typeface="Microsoft YaHei"/>
                 <a:ea typeface="Consolas"/>
@@ -8488,7 +8772,7 @@
             <a:avLst/>
           </a:prstGeom>
           <a:solidFill>
-            <a:srgbClr val="0B0E11"/>
+            <a:srgbClr val="0B0C0B"/>
           </a:solidFill>
           <a:ln>
             <a:noFill/>
@@ -8528,7 +8812,7 @@
             <a:r>
               <a:rPr sz="950" b="0">
                 <a:solidFill>
-                  <a:srgbClr val="4D5762"/>
+                  <a:srgbClr val="4B4F4B"/>
                 </a:solidFill>
                 <a:latin typeface="Microsoft YaHei"/>
                 <a:ea typeface="Consolas"/>
@@ -8565,7 +8849,7 @@
             <a:r>
               <a:rPr sz="2700" b="1">
                 <a:solidFill>
-                  <a:srgbClr val="E9EDF1"/>
+                  <a:srgbClr val="F2F2EF"/>
                 </a:solidFill>
                 <a:latin typeface="Microsoft YaHei"/>
                 <a:ea typeface="Consolas"/>
@@ -8602,7 +8886,7 @@
             <a:r>
               <a:rPr sz="1100" b="0">
                 <a:solidFill>
-                  <a:srgbClr val="7F8A95"/>
+                  <a:srgbClr val="7E827E"/>
                 </a:solidFill>
                 <a:latin typeface="Microsoft YaHei"/>
                 <a:ea typeface="Consolas"/>
@@ -8628,7 +8912,7 @@
             <a:avLst/>
           </a:prstGeom>
           <a:solidFill>
-            <a:srgbClr val="2F3944"/>
+            <a:srgbClr val="2B2F2E"/>
           </a:solidFill>
           <a:ln>
             <a:noFill/>
@@ -8692,7 +8976,7 @@
             <a:r>
               <a:rPr sz="950" b="0">
                 <a:solidFill>
-                  <a:srgbClr val="4D5762"/>
+                  <a:srgbClr val="4B4F4B"/>
                 </a:solidFill>
                 <a:latin typeface="Microsoft YaHei"/>
                 <a:ea typeface="Consolas"/>
@@ -8718,7 +9002,7 @@
             <a:avLst/>
           </a:prstGeom>
           <a:solidFill>
-            <a:srgbClr val="2F3944"/>
+            <a:srgbClr val="2B2F2E"/>
           </a:solidFill>
           <a:ln>
             <a:noFill/>
@@ -8758,7 +9042,7 @@
             <a:r>
               <a:rPr sz="1200" b="1">
                 <a:solidFill>
-                  <a:srgbClr val="E0453A"/>
+                  <a:srgbClr val="D7FF3F"/>
                 </a:solidFill>
                 <a:latin typeface="Consolas"/>
                 <a:ea typeface="Consolas"/>
@@ -8802,7 +9086,7 @@
             <a:r>
               <a:rPr sz="1000" b="0">
                 <a:solidFill>
-                  <a:srgbClr val="7F8A95"/>
+                  <a:srgbClr val="7E827E"/>
                 </a:solidFill>
                 <a:latin typeface="Microsoft YaHei"/>
                 <a:ea typeface="Consolas"/>
@@ -8839,7 +9123,7 @@
             <a:r>
               <a:rPr sz="1200" b="1">
                 <a:solidFill>
-                  <a:srgbClr val="E0453A"/>
+                  <a:srgbClr val="D7FF3F"/>
                 </a:solidFill>
                 <a:latin typeface="Consolas"/>
                 <a:ea typeface="Consolas"/>
@@ -8883,7 +9167,7 @@
             <a:r>
               <a:rPr sz="1000" b="0">
                 <a:solidFill>
-                  <a:srgbClr val="7F8A95"/>
+                  <a:srgbClr val="7E827E"/>
                 </a:solidFill>
                 <a:latin typeface="Microsoft YaHei"/>
                 <a:ea typeface="Consolas"/>
@@ -8920,7 +9204,7 @@
             <a:r>
               <a:rPr sz="1200" b="1">
                 <a:solidFill>
-                  <a:srgbClr val="E0453A"/>
+                  <a:srgbClr val="D7FF3F"/>
                 </a:solidFill>
                 <a:latin typeface="Consolas"/>
                 <a:ea typeface="Consolas"/>
@@ -8964,7 +9248,7 @@
             <a:r>
               <a:rPr sz="1000" b="0">
                 <a:solidFill>
-                  <a:srgbClr val="7F8A95"/>
+                  <a:srgbClr val="7E827E"/>
                 </a:solidFill>
                 <a:latin typeface="Microsoft YaHei"/>
                 <a:ea typeface="Consolas"/>
@@ -8990,7 +9274,7 @@
             <a:avLst/>
           </a:prstGeom>
           <a:solidFill>
-            <a:srgbClr val="222A32"/>
+            <a:srgbClr val="232625"/>
           </a:solidFill>
           <a:ln>
             <a:noFill/>
@@ -9030,7 +9314,7 @@
             <a:r>
               <a:rPr sz="950" b="0">
                 <a:solidFill>
-                  <a:srgbClr val="4D5762"/>
+                  <a:srgbClr val="4B4F4B"/>
                 </a:solidFill>
                 <a:latin typeface="Microsoft YaHei"/>
                 <a:ea typeface="Consolas"/>
@@ -9074,7 +9358,7 @@
             <a:r>
               <a:rPr sz="1000" b="0">
                 <a:solidFill>
-                  <a:srgbClr val="E9EDF1"/>
+                  <a:srgbClr val="F2F2EF"/>
                 </a:solidFill>
                 <a:latin typeface="Microsoft YaHei"/>
                 <a:ea typeface="Consolas"/>
@@ -9155,7 +9439,7 @@
             <a:avLst/>
           </a:prstGeom>
           <a:solidFill>
-            <a:srgbClr val="0B0E11"/>
+            <a:srgbClr val="0B0C0B"/>
           </a:solidFill>
           <a:ln>
             <a:noFill/>
@@ -9195,7 +9479,7 @@
             <a:r>
               <a:rPr sz="950" b="0">
                 <a:solidFill>
-                  <a:srgbClr val="4D5762"/>
+                  <a:srgbClr val="4B4F4B"/>
                 </a:solidFill>
                 <a:latin typeface="Microsoft YaHei"/>
                 <a:ea typeface="Consolas"/>
@@ -9232,7 +9516,7 @@
             <a:r>
               <a:rPr sz="2700" b="1">
                 <a:solidFill>
-                  <a:srgbClr val="E9EDF1"/>
+                  <a:srgbClr val="F2F2EF"/>
                 </a:solidFill>
                 <a:latin typeface="Microsoft YaHei"/>
                 <a:ea typeface="Consolas"/>
@@ -9269,7 +9553,7 @@
             <a:r>
               <a:rPr sz="1100" b="0">
                 <a:solidFill>
-                  <a:srgbClr val="7F8A95"/>
+                  <a:srgbClr val="7E827E"/>
                 </a:solidFill>
                 <a:latin typeface="Microsoft YaHei"/>
                 <a:ea typeface="Consolas"/>
@@ -9295,7 +9579,7 @@
             <a:avLst/>
           </a:prstGeom>
           <a:solidFill>
-            <a:srgbClr val="2F3944"/>
+            <a:srgbClr val="2B2F2E"/>
           </a:solidFill>
           <a:ln>
             <a:noFill/>
@@ -9359,7 +9643,7 @@
             <a:r>
               <a:rPr sz="950" b="0">
                 <a:solidFill>
-                  <a:srgbClr val="4D5762"/>
+                  <a:srgbClr val="4B4F4B"/>
                 </a:solidFill>
                 <a:latin typeface="Microsoft YaHei"/>
                 <a:ea typeface="Consolas"/>
@@ -9385,7 +9669,7 @@
             <a:avLst/>
           </a:prstGeom>
           <a:solidFill>
-            <a:srgbClr val="2F3944"/>
+            <a:srgbClr val="2B2F2E"/>
           </a:solidFill>
           <a:ln>
             <a:noFill/>
@@ -9425,7 +9709,7 @@
             <a:r>
               <a:rPr sz="1200" b="1">
                 <a:solidFill>
-                  <a:srgbClr val="E0453A"/>
+                  <a:srgbClr val="D7FF3F"/>
                 </a:solidFill>
                 <a:latin typeface="Consolas"/>
                 <a:ea typeface="Consolas"/>
@@ -9469,7 +9753,7 @@
             <a:r>
               <a:rPr sz="1000" b="0">
                 <a:solidFill>
-                  <a:srgbClr val="7F8A95"/>
+                  <a:srgbClr val="7E827E"/>
                 </a:solidFill>
                 <a:latin typeface="Microsoft YaHei"/>
                 <a:ea typeface="Consolas"/>
@@ -9506,7 +9790,7 @@
             <a:r>
               <a:rPr sz="1200" b="1">
                 <a:solidFill>
-                  <a:srgbClr val="E0453A"/>
+                  <a:srgbClr val="D7FF3F"/>
                 </a:solidFill>
                 <a:latin typeface="Consolas"/>
                 <a:ea typeface="Consolas"/>
@@ -9550,7 +9834,7 @@
             <a:r>
               <a:rPr sz="1000" b="0">
                 <a:solidFill>
-                  <a:srgbClr val="7F8A95"/>
+                  <a:srgbClr val="7E827E"/>
                 </a:solidFill>
                 <a:latin typeface="Microsoft YaHei"/>
                 <a:ea typeface="Consolas"/>
@@ -9587,7 +9871,7 @@
             <a:r>
               <a:rPr sz="1200" b="1">
                 <a:solidFill>
-                  <a:srgbClr val="E0453A"/>
+                  <a:srgbClr val="D7FF3F"/>
                 </a:solidFill>
                 <a:latin typeface="Consolas"/>
                 <a:ea typeface="Consolas"/>
@@ -9631,7 +9915,7 @@
             <a:r>
               <a:rPr sz="1000" b="0">
                 <a:solidFill>
-                  <a:srgbClr val="7F8A95"/>
+                  <a:srgbClr val="7E827E"/>
                 </a:solidFill>
                 <a:latin typeface="Microsoft YaHei"/>
                 <a:ea typeface="Consolas"/>
@@ -9657,7 +9941,7 @@
             <a:avLst/>
           </a:prstGeom>
           <a:solidFill>
-            <a:srgbClr val="222A32"/>
+            <a:srgbClr val="232625"/>
           </a:solidFill>
           <a:ln>
             <a:noFill/>
@@ -9697,7 +9981,7 @@
             <a:r>
               <a:rPr sz="950" b="0">
                 <a:solidFill>
-                  <a:srgbClr val="4D5762"/>
+                  <a:srgbClr val="4B4F4B"/>
                 </a:solidFill>
                 <a:latin typeface="Microsoft YaHei"/>
                 <a:ea typeface="Consolas"/>
@@ -9741,7 +10025,7 @@
             <a:r>
               <a:rPr sz="1000" b="0">
                 <a:solidFill>
-                  <a:srgbClr val="E9EDF1"/>
+                  <a:srgbClr val="F2F2EF"/>
                 </a:solidFill>
                 <a:latin typeface="Microsoft YaHei"/>
                 <a:ea typeface="Consolas"/>
@@ -9822,7 +10106,7 @@
             <a:avLst/>
           </a:prstGeom>
           <a:solidFill>
-            <a:srgbClr val="0B0E11"/>
+            <a:srgbClr val="0B0C0B"/>
           </a:solidFill>
           <a:ln>
             <a:noFill/>
@@ -9862,7 +10146,7 @@
             <a:r>
               <a:rPr sz="950" b="0">
                 <a:solidFill>
-                  <a:srgbClr val="4D5762"/>
+                  <a:srgbClr val="4B4F4B"/>
                 </a:solidFill>
                 <a:latin typeface="Microsoft YaHei"/>
                 <a:ea typeface="Consolas"/>
@@ -9899,7 +10183,7 @@
             <a:r>
               <a:rPr sz="2700" b="1">
                 <a:solidFill>
-                  <a:srgbClr val="E9EDF1"/>
+                  <a:srgbClr val="F2F2EF"/>
                 </a:solidFill>
                 <a:latin typeface="Microsoft YaHei"/>
                 <a:ea typeface="Consolas"/>
@@ -9936,7 +10220,7 @@
             <a:r>
               <a:rPr sz="1100" b="0">
                 <a:solidFill>
-                  <a:srgbClr val="7F8A95"/>
+                  <a:srgbClr val="7E827E"/>
                 </a:solidFill>
                 <a:latin typeface="Microsoft YaHei"/>
                 <a:ea typeface="Consolas"/>
@@ -9962,7 +10246,7 @@
             <a:avLst/>
           </a:prstGeom>
           <a:solidFill>
-            <a:srgbClr val="2F3944"/>
+            <a:srgbClr val="2B2F2E"/>
           </a:solidFill>
           <a:ln>
             <a:noFill/>
@@ -10026,7 +10310,7 @@
             <a:r>
               <a:rPr sz="950" b="0">
                 <a:solidFill>
-                  <a:srgbClr val="4D5762"/>
+                  <a:srgbClr val="4B4F4B"/>
                 </a:solidFill>
                 <a:latin typeface="Microsoft YaHei"/>
                 <a:ea typeface="Consolas"/>
@@ -10052,7 +10336,7 @@
             <a:avLst/>
           </a:prstGeom>
           <a:solidFill>
-            <a:srgbClr val="2F3944"/>
+            <a:srgbClr val="2B2F2E"/>
           </a:solidFill>
           <a:ln>
             <a:noFill/>
@@ -10092,7 +10376,7 @@
             <a:r>
               <a:rPr sz="1200" b="1">
                 <a:solidFill>
-                  <a:srgbClr val="E0453A"/>
+                  <a:srgbClr val="D7FF3F"/>
                 </a:solidFill>
                 <a:latin typeface="Consolas"/>
                 <a:ea typeface="Consolas"/>
@@ -10136,7 +10420,7 @@
             <a:r>
               <a:rPr sz="1000" b="0">
                 <a:solidFill>
-                  <a:srgbClr val="7F8A95"/>
+                  <a:srgbClr val="7E827E"/>
                 </a:solidFill>
                 <a:latin typeface="Microsoft YaHei"/>
                 <a:ea typeface="Consolas"/>
@@ -10173,7 +10457,7 @@
             <a:r>
               <a:rPr sz="1200" b="1">
                 <a:solidFill>
-                  <a:srgbClr val="E0453A"/>
+                  <a:srgbClr val="D7FF3F"/>
                 </a:solidFill>
                 <a:latin typeface="Consolas"/>
                 <a:ea typeface="Consolas"/>
@@ -10217,7 +10501,7 @@
             <a:r>
               <a:rPr sz="1000" b="0">
                 <a:solidFill>
-                  <a:srgbClr val="7F8A95"/>
+                  <a:srgbClr val="7E827E"/>
                 </a:solidFill>
                 <a:latin typeface="Microsoft YaHei"/>
                 <a:ea typeface="Consolas"/>
@@ -10254,7 +10538,7 @@
             <a:r>
               <a:rPr sz="1200" b="1">
                 <a:solidFill>
-                  <a:srgbClr val="E0453A"/>
+                  <a:srgbClr val="D7FF3F"/>
                 </a:solidFill>
                 <a:latin typeface="Consolas"/>
                 <a:ea typeface="Consolas"/>
@@ -10298,7 +10582,7 @@
             <a:r>
               <a:rPr sz="1000" b="0">
                 <a:solidFill>
-                  <a:srgbClr val="7F8A95"/>
+                  <a:srgbClr val="7E827E"/>
                 </a:solidFill>
                 <a:latin typeface="Microsoft YaHei"/>
                 <a:ea typeface="Consolas"/>
@@ -10324,7 +10608,7 @@
             <a:avLst/>
           </a:prstGeom>
           <a:solidFill>
-            <a:srgbClr val="222A32"/>
+            <a:srgbClr val="232625"/>
           </a:solidFill>
           <a:ln>
             <a:noFill/>
@@ -10364,7 +10648,7 @@
             <a:r>
               <a:rPr sz="950" b="0">
                 <a:solidFill>
-                  <a:srgbClr val="4D5762"/>
+                  <a:srgbClr val="4B4F4B"/>
                 </a:solidFill>
                 <a:latin typeface="Microsoft YaHei"/>
                 <a:ea typeface="Consolas"/>
@@ -10408,7 +10692,7 @@
             <a:r>
               <a:rPr sz="1000" b="0">
                 <a:solidFill>
-                  <a:srgbClr val="E9EDF1"/>
+                  <a:srgbClr val="F2F2EF"/>
                 </a:solidFill>
                 <a:latin typeface="Microsoft YaHei"/>
                 <a:ea typeface="Consolas"/>
@@ -10489,7 +10773,7 @@
             <a:avLst/>
           </a:prstGeom>
           <a:solidFill>
-            <a:srgbClr val="0B0E11"/>
+            <a:srgbClr val="0B0C0B"/>
           </a:solidFill>
           <a:ln>
             <a:noFill/>
@@ -10529,7 +10813,7 @@
             <a:r>
               <a:rPr sz="950" b="0">
                 <a:solidFill>
-                  <a:srgbClr val="4D5762"/>
+                  <a:srgbClr val="4B4F4B"/>
                 </a:solidFill>
                 <a:latin typeface="Microsoft YaHei"/>
                 <a:ea typeface="Consolas"/>
@@ -10566,7 +10850,7 @@
             <a:r>
               <a:rPr sz="2700" b="1">
                 <a:solidFill>
-                  <a:srgbClr val="E9EDF1"/>
+                  <a:srgbClr val="F2F2EF"/>
                 </a:solidFill>
                 <a:latin typeface="Microsoft YaHei"/>
                 <a:ea typeface="Consolas"/>
@@ -10603,7 +10887,7 @@
             <a:r>
               <a:rPr sz="1100" b="0">
                 <a:solidFill>
-                  <a:srgbClr val="7F8A95"/>
+                  <a:srgbClr val="7E827E"/>
                 </a:solidFill>
                 <a:latin typeface="Microsoft YaHei"/>
                 <a:ea typeface="Consolas"/>
@@ -10629,7 +10913,7 @@
             <a:avLst/>
           </a:prstGeom>
           <a:solidFill>
-            <a:srgbClr val="2F3944"/>
+            <a:srgbClr val="2B2F2E"/>
           </a:solidFill>
           <a:ln>
             <a:noFill/>
@@ -10693,7 +10977,7 @@
             <a:r>
               <a:rPr sz="950" b="0">
                 <a:solidFill>
-                  <a:srgbClr val="4D5762"/>
+                  <a:srgbClr val="4B4F4B"/>
                 </a:solidFill>
                 <a:latin typeface="Microsoft YaHei"/>
                 <a:ea typeface="Consolas"/>
@@ -10719,7 +11003,7 @@
             <a:avLst/>
           </a:prstGeom>
           <a:solidFill>
-            <a:srgbClr val="2F3944"/>
+            <a:srgbClr val="2B2F2E"/>
           </a:solidFill>
           <a:ln>
             <a:noFill/>
@@ -10759,7 +11043,7 @@
             <a:r>
               <a:rPr sz="1200" b="1">
                 <a:solidFill>
-                  <a:srgbClr val="E0453A"/>
+                  <a:srgbClr val="D7FF3F"/>
                 </a:solidFill>
                 <a:latin typeface="Consolas"/>
                 <a:ea typeface="Consolas"/>
@@ -10803,7 +11087,7 @@
             <a:r>
               <a:rPr sz="1000" b="0">
                 <a:solidFill>
-                  <a:srgbClr val="7F8A95"/>
+                  <a:srgbClr val="7E827E"/>
                 </a:solidFill>
                 <a:latin typeface="Microsoft YaHei"/>
                 <a:ea typeface="Consolas"/>
@@ -10840,7 +11124,7 @@
             <a:r>
               <a:rPr sz="1200" b="1">
                 <a:solidFill>
-                  <a:srgbClr val="E0453A"/>
+                  <a:srgbClr val="D7FF3F"/>
                 </a:solidFill>
                 <a:latin typeface="Consolas"/>
                 <a:ea typeface="Consolas"/>
@@ -10884,7 +11168,7 @@
             <a:r>
               <a:rPr sz="1000" b="0">
                 <a:solidFill>
-                  <a:srgbClr val="7F8A95"/>
+                  <a:srgbClr val="7E827E"/>
                 </a:solidFill>
                 <a:latin typeface="Microsoft YaHei"/>
                 <a:ea typeface="Consolas"/>
@@ -10921,7 +11205,7 @@
             <a:r>
               <a:rPr sz="1200" b="1">
                 <a:solidFill>
-                  <a:srgbClr val="E0453A"/>
+                  <a:srgbClr val="D7FF3F"/>
                 </a:solidFill>
                 <a:latin typeface="Consolas"/>
                 <a:ea typeface="Consolas"/>
@@ -10965,7 +11249,7 @@
             <a:r>
               <a:rPr sz="1000" b="0">
                 <a:solidFill>
-                  <a:srgbClr val="7F8A95"/>
+                  <a:srgbClr val="7E827E"/>
                 </a:solidFill>
                 <a:latin typeface="Microsoft YaHei"/>
                 <a:ea typeface="Consolas"/>
@@ -10991,7 +11275,7 @@
             <a:avLst/>
           </a:prstGeom>
           <a:solidFill>
-            <a:srgbClr val="222A32"/>
+            <a:srgbClr val="232625"/>
           </a:solidFill>
           <a:ln>
             <a:noFill/>
@@ -11031,7 +11315,7 @@
             <a:r>
               <a:rPr sz="950" b="0">
                 <a:solidFill>
-                  <a:srgbClr val="4D5762"/>
+                  <a:srgbClr val="4B4F4B"/>
                 </a:solidFill>
                 <a:latin typeface="Microsoft YaHei"/>
                 <a:ea typeface="Consolas"/>
@@ -11075,7 +11359,7 @@
             <a:r>
               <a:rPr sz="1000" b="0">
                 <a:solidFill>
-                  <a:srgbClr val="E9EDF1"/>
+                  <a:srgbClr val="F2F2EF"/>
                 </a:solidFill>
                 <a:latin typeface="Microsoft YaHei"/>
                 <a:ea typeface="Consolas"/>

--- a/docs/prototype/changE-原型图.pptx
+++ b/docs/prototype/changE-原型图.pptx
@@ -3112,7 +3112,7 @@
             <a:avLst/>
           </a:prstGeom>
           <a:solidFill>
-            <a:srgbClr val="0B0C0B"/>
+            <a:srgbClr val="E8E3D7"/>
           </a:solidFill>
           <a:ln>
             <a:noFill/>
@@ -3135,13 +3135,13 @@
         <p:spPr>
           <a:xfrm>
             <a:off x="0" y="0"/>
-            <a:ext cx="12191695" cy="32004"/>
+            <a:ext cx="7260336" cy="32004"/>
           </a:xfrm>
           <a:prstGeom prst="rect">
             <a:avLst/>
           </a:prstGeom>
           <a:solidFill>
-            <a:srgbClr val="D7FF3F"/>
+            <a:srgbClr val="B5893A"/>
           </a:solidFill>
           <a:ln>
             <a:noFill/>
@@ -3181,7 +3181,7 @@
             <a:r>
               <a:rPr sz="950" b="0">
                 <a:solidFill>
-                  <a:srgbClr val="4B4F4B"/>
+                  <a:srgbClr val="9C968A"/>
                 </a:solidFill>
                 <a:latin typeface="Microsoft YaHei"/>
                 <a:ea typeface="Consolas"/>
@@ -3218,7 +3218,7 @@
             <a:r>
               <a:rPr sz="7200" b="1">
                 <a:solidFill>
-                  <a:srgbClr val="F2F2EF"/>
+                  <a:srgbClr val="1A1A1A"/>
                 </a:solidFill>
                 <a:latin typeface="Consolas"/>
                 <a:ea typeface="Consolas"/>
@@ -3255,7 +3255,7 @@
             <a:r>
               <a:rPr sz="2100" b="0">
                 <a:solidFill>
-                  <a:srgbClr val="F2F2EF"/>
+                  <a:srgbClr val="1A1A1A"/>
                 </a:solidFill>
                 <a:latin typeface="Microsoft YaHei"/>
                 <a:ea typeface="Consolas"/>
@@ -3281,7 +3281,7 @@
             <a:avLst/>
           </a:prstGeom>
           <a:solidFill>
-            <a:srgbClr val="D7FF3F"/>
+            <a:srgbClr val="B5893A"/>
           </a:solidFill>
           <a:ln>
             <a:noFill/>
@@ -3328,7 +3328,7 @@
             <a:r>
               <a:rPr sz="1250" b="0">
                 <a:solidFill>
-                  <a:srgbClr val="7E827E"/>
+                  <a:srgbClr val="6B6559"/>
                 </a:solidFill>
                 <a:latin typeface="Microsoft YaHei"/>
                 <a:ea typeface="Consolas"/>
@@ -3349,7 +3349,7 @@
             <a:r>
               <a:rPr sz="1250" b="0">
                 <a:solidFill>
-                  <a:srgbClr val="7E827E"/>
+                  <a:srgbClr val="6B6559"/>
                 </a:solidFill>
                 <a:latin typeface="Microsoft YaHei"/>
                 <a:ea typeface="Consolas"/>
@@ -3370,7 +3370,7 @@
             <a:r>
               <a:rPr sz="1250" b="0">
                 <a:solidFill>
-                  <a:srgbClr val="7E827E"/>
+                  <a:srgbClr val="6B6559"/>
                 </a:solidFill>
                 <a:latin typeface="Microsoft YaHei"/>
                 <a:ea typeface="Consolas"/>
@@ -3389,8 +3389,8 @@
         </p:nvSpPr>
         <p:spPr>
           <a:xfrm>
-            <a:off x="822960" y="5029200"/>
-            <a:ext cx="4480560" cy="822960"/>
+            <a:off x="822960" y="4160520"/>
+            <a:ext cx="4480560" cy="548640"/>
           </a:xfrm>
           <a:prstGeom prst="rect">
             <a:avLst/>
@@ -3405,52 +3405,22 @@
           <a:p>
             <a:pPr algn="l"/>
             <a:r>
-              <a:rPr sz="1050" b="0">
-                <a:solidFill>
-                  <a:srgbClr val="4B4F4B"/>
+              <a:rPr sz="1000" b="0">
+                <a:solidFill>
+                  <a:srgbClr val="9C968A"/>
                 </a:solidFill>
                 <a:latin typeface="Microsoft YaHei"/>
                 <a:ea typeface="Consolas"/>
                 <a:cs typeface="Consolas"/>
               </a:rPr>
-              <a:t>风格参考 LZheng0411/Lzheng-fitness 的 workbench-template。
-七张界面是 HTML 一比一渲染的，不是手绘示意图。</a:t>
-            </a:r>
-          </a:p>
-        </p:txBody>
-      </p:sp>
-      <p:sp>
-        <p:nvSpPr>
-          <p:cNvPr id="10" name="Rounded Rectangle 9"/>
-          <p:cNvSpPr/>
-          <p:nvPr/>
-        </p:nvSpPr>
-        <p:spPr>
-          <a:xfrm>
-            <a:off x="5500116" y="1156716"/>
-            <a:ext cx="6327648" cy="4078224"/>
-          </a:xfrm>
-          <a:prstGeom prst="roundRect">
-            <a:avLst/>
-          </a:prstGeom>
-          <a:solidFill>
-            <a:srgbClr val="2B2F2E"/>
-          </a:solidFill>
-          <a:ln>
-            <a:noFill/>
-          </a:ln>
-        </p:spPr>
-        <p:txBody>
-          <a:bodyPr rtlCol="0" anchor="ctr"/>
-          <a:lstStyle/>
-          <a:p>
-            <a:pPr algn="ctr"/>
+              <a:t>风格参考 LZheng0411/Lzheng-fitness 的 workbench-template。</a:t>
+            </a:r>
           </a:p>
         </p:txBody>
       </p:sp>
       <p:pic>
         <p:nvPicPr>
-          <p:cNvPr id="11" name="Picture 10" descr="017d997b13f5fe73ccc7d3fb72351a3f.png"/>
+          <p:cNvPr id="10" name="Picture 9" descr="b3ee4ba0b522a67049fb2643dc4c3a49.png"/>
           <p:cNvPicPr>
             <a:picLocks noChangeAspect="1"/>
           </p:cNvPicPr>
@@ -3464,8 +3434,8 @@
         </p:blipFill>
         <p:spPr>
           <a:xfrm>
-            <a:off x="5532120" y="1188720"/>
-            <a:ext cx="6263640" cy="4014215"/>
+            <a:off x="7260336" y="0"/>
+            <a:ext cx="4928616" cy="6858000"/>
           </a:xfrm>
           <a:prstGeom prst="rect">
             <a:avLst/>
@@ -3474,14 +3444,52 @@
       </p:pic>
       <p:sp>
         <p:nvSpPr>
+          <p:cNvPr id="11" name="TextBox 10"/>
+          <p:cNvSpPr txBox="1"/>
+          <p:nvPr/>
+        </p:nvSpPr>
+        <p:spPr>
+          <a:xfrm>
+            <a:off x="822960" y="4846320"/>
+            <a:ext cx="4480560" cy="822960"/>
+          </a:xfrm>
+          <a:prstGeom prst="rect">
+            <a:avLst/>
+          </a:prstGeom>
+          <a:noFill/>
+        </p:spPr>
+        <p:txBody>
+          <a:bodyPr wrap="square">
+            <a:spAutoFit/>
+          </a:bodyPr>
+          <a:lstStyle/>
+          <a:p>
+            <a:pPr algn="l"/>
+            <a:r>
+              <a:rPr sz="1050" b="0">
+                <a:solidFill>
+                  <a:srgbClr val="9C968A"/>
+                </a:solidFill>
+                <a:latin typeface="Microsoft YaHei"/>
+                <a:ea typeface="Consolas"/>
+                <a:cs typeface="Consolas"/>
+              </a:rPr>
+              <a:t>背景不再用纯黑 —— 改成暖米白，深色只留在一块 hero 里。
+人物图与油画来自你自己的素材。</a:t>
+            </a:r>
+          </a:p>
+        </p:txBody>
+      </p:sp>
+      <p:sp>
+        <p:nvSpPr>
           <p:cNvPr id="12" name="TextBox 11"/>
           <p:cNvSpPr txBox="1"/>
           <p:nvPr/>
         </p:nvSpPr>
         <p:spPr>
           <a:xfrm>
-            <a:off x="5532120" y="5303520"/>
-            <a:ext cx="6263640" cy="274320"/>
+            <a:off x="822960" y="5989320"/>
+            <a:ext cx="4480560" cy="274320"/>
           </a:xfrm>
           <a:prstGeom prst="rect">
             <a:avLst/>
@@ -3498,50 +3506,13 @@
             <a:r>
               <a:rPr sz="1000" b="0">
                 <a:solidFill>
-                  <a:srgbClr val="4B4F4B"/>
-                </a:solidFill>
-                <a:latin typeface="Microsoft YaHei"/>
-                <a:ea typeface="Consolas"/>
-                <a:cs typeface="Consolas"/>
-              </a:rPr>
-              <a:t>人体图 · 真实 SVG · 89 个区域 · 按本周组数着色</a:t>
-            </a:r>
-          </a:p>
-        </p:txBody>
-      </p:sp>
-      <p:sp>
-        <p:nvSpPr>
-          <p:cNvPr id="13" name="TextBox 12"/>
-          <p:cNvSpPr txBox="1"/>
-          <p:nvPr/>
-        </p:nvSpPr>
-        <p:spPr>
-          <a:xfrm>
-            <a:off x="5532120" y="5806440"/>
-            <a:ext cx="6263640" cy="274320"/>
-          </a:xfrm>
-          <a:prstGeom prst="rect">
-            <a:avLst/>
-          </a:prstGeom>
-          <a:noFill/>
-        </p:spPr>
-        <p:txBody>
-          <a:bodyPr wrap="square">
-            <a:spAutoFit/>
-          </a:bodyPr>
-          <a:lstStyle/>
-          <a:p>
-            <a:pPr algn="l"/>
-            <a:r>
-              <a:rPr sz="1000" b="0">
-                <a:solidFill>
-                  <a:srgbClr val="4B4F4B"/>
+                  <a:srgbClr val="9C968A"/>
                 </a:solidFill>
                 <a:latin typeface="Consolas"/>
                 <a:ea typeface="Consolas"/>
                 <a:cs typeface="Consolas"/>
               </a:rPr>
-              <a:t>v0.1 · 2026-10-20</a:t>
+              <a:t>v0.2 · 2026-10-21</a:t>
             </a:r>
           </a:p>
         </p:txBody>
@@ -3579,7 +3550,7 @@
             <a:avLst/>
           </a:prstGeom>
           <a:solidFill>
-            <a:srgbClr val="0B0C0B"/>
+            <a:srgbClr val="E8E3D7"/>
           </a:solidFill>
           <a:ln>
             <a:noFill/>
@@ -3619,7 +3590,7 @@
             <a:r>
               <a:rPr sz="950" b="0">
                 <a:solidFill>
-                  <a:srgbClr val="4B4F4B"/>
+                  <a:srgbClr val="9C968A"/>
                 </a:solidFill>
                 <a:latin typeface="Microsoft YaHei"/>
                 <a:ea typeface="Consolas"/>
@@ -3656,7 +3627,7 @@
             <a:r>
               <a:rPr sz="2800" b="1">
                 <a:solidFill>
-                  <a:srgbClr val="F2F2EF"/>
+                  <a:srgbClr val="1A1A1A"/>
                 </a:solidFill>
                 <a:latin typeface="Microsoft YaHei"/>
                 <a:ea typeface="Consolas"/>
@@ -3693,7 +3664,7 @@
             <a:r>
               <a:rPr sz="1250" b="0">
                 <a:solidFill>
-                  <a:srgbClr val="7E827E"/>
+                  <a:srgbClr val="6B6559"/>
                 </a:solidFill>
                 <a:latin typeface="Microsoft YaHei"/>
                 <a:ea typeface="Consolas"/>
@@ -3719,7 +3690,7 @@
             <a:avLst/>
           </a:prstGeom>
           <a:solidFill>
-            <a:srgbClr val="D7FF3F"/>
+            <a:srgbClr val="B5893A"/>
           </a:solidFill>
           <a:ln>
             <a:noFill/>
@@ -3748,7 +3719,7 @@
             <a:avLst/>
           </a:prstGeom>
           <a:solidFill>
-            <a:srgbClr val="131413"/>
+            <a:srgbClr val="FFFFFF"/>
           </a:solidFill>
           <a:ln>
             <a:noFill/>
@@ -3777,7 +3748,7 @@
             <a:avLst/>
           </a:prstGeom>
           <a:solidFill>
-            <a:srgbClr val="D7FF3F"/>
+            <a:srgbClr val="B5893A"/>
           </a:solidFill>
           <a:ln>
             <a:noFill/>
@@ -3817,7 +3788,7 @@
             <a:r>
               <a:rPr sz="1400" b="1">
                 <a:solidFill>
-                  <a:srgbClr val="F2F2EF"/>
+                  <a:srgbClr val="1A1A1A"/>
                 </a:solidFill>
                 <a:latin typeface="Microsoft YaHei"/>
                 <a:ea typeface="Consolas"/>
@@ -3861,7 +3832,7 @@
             <a:r>
               <a:rPr sz="1050" b="0">
                 <a:solidFill>
-                  <a:srgbClr val="7E827E"/>
+                  <a:srgbClr val="6B6559"/>
                 </a:solidFill>
                 <a:latin typeface="Microsoft YaHei"/>
                 <a:ea typeface="Consolas"/>
@@ -3882,7 +3853,7 @@
             <a:r>
               <a:rPr sz="1050" b="0">
                 <a:solidFill>
-                  <a:srgbClr val="7E827E"/>
+                  <a:srgbClr val="6B6559"/>
                 </a:solidFill>
                 <a:latin typeface="Microsoft YaHei"/>
                 <a:ea typeface="Consolas"/>
@@ -3903,7 +3874,7 @@
             <a:r>
               <a:rPr sz="1050" b="0">
                 <a:solidFill>
-                  <a:srgbClr val="7E827E"/>
+                  <a:srgbClr val="6B6559"/>
                 </a:solidFill>
                 <a:latin typeface="Microsoft YaHei"/>
                 <a:ea typeface="Consolas"/>
@@ -3929,7 +3900,7 @@
             <a:avLst/>
           </a:prstGeom>
           <a:solidFill>
-            <a:srgbClr val="131413"/>
+            <a:srgbClr val="FFFFFF"/>
           </a:solidFill>
           <a:ln>
             <a:noFill/>
@@ -3958,7 +3929,7 @@
             <a:avLst/>
           </a:prstGeom>
           <a:solidFill>
-            <a:srgbClr val="D7FF3F"/>
+            <a:srgbClr val="6C8A4A"/>
           </a:solidFill>
           <a:ln>
             <a:noFill/>
@@ -3998,7 +3969,7 @@
             <a:r>
               <a:rPr sz="1400" b="1">
                 <a:solidFill>
-                  <a:srgbClr val="F2F2EF"/>
+                  <a:srgbClr val="1A1A1A"/>
                 </a:solidFill>
                 <a:latin typeface="Microsoft YaHei"/>
                 <a:ea typeface="Consolas"/>
@@ -4042,7 +4013,7 @@
             <a:r>
               <a:rPr sz="1050" b="0">
                 <a:solidFill>
-                  <a:srgbClr val="7E827E"/>
+                  <a:srgbClr val="6B6559"/>
                 </a:solidFill>
                 <a:latin typeface="Microsoft YaHei"/>
                 <a:ea typeface="Consolas"/>
@@ -4063,7 +4034,7 @@
             <a:r>
               <a:rPr sz="1050" b="0">
                 <a:solidFill>
-                  <a:srgbClr val="7E827E"/>
+                  <a:srgbClr val="6B6559"/>
                 </a:solidFill>
                 <a:latin typeface="Microsoft YaHei"/>
                 <a:ea typeface="Consolas"/>
@@ -4084,7 +4055,7 @@
             <a:r>
               <a:rPr sz="1050" b="0">
                 <a:solidFill>
-                  <a:srgbClr val="7E827E"/>
+                  <a:srgbClr val="6B6559"/>
                 </a:solidFill>
                 <a:latin typeface="Microsoft YaHei"/>
                 <a:ea typeface="Consolas"/>
@@ -4110,7 +4081,7 @@
             <a:avLst/>
           </a:prstGeom>
           <a:solidFill>
-            <a:srgbClr val="131413"/>
+            <a:srgbClr val="FFFFFF"/>
           </a:solidFill>
           <a:ln>
             <a:noFill/>
@@ -4139,7 +4110,7 @@
             <a:avLst/>
           </a:prstGeom>
           <a:solidFill>
-            <a:srgbClr val="9A9D8E"/>
+            <a:srgbClr val="A8792C"/>
           </a:solidFill>
           <a:ln>
             <a:noFill/>
@@ -4179,7 +4150,7 @@
             <a:r>
               <a:rPr sz="1400" b="1">
                 <a:solidFill>
-                  <a:srgbClr val="F2F2EF"/>
+                  <a:srgbClr val="1A1A1A"/>
                 </a:solidFill>
                 <a:latin typeface="Microsoft YaHei"/>
                 <a:ea typeface="Consolas"/>
@@ -4223,7 +4194,7 @@
             <a:r>
               <a:rPr sz="1050" b="0">
                 <a:solidFill>
-                  <a:srgbClr val="7E827E"/>
+                  <a:srgbClr val="6B6559"/>
                 </a:solidFill>
                 <a:latin typeface="Microsoft YaHei"/>
                 <a:ea typeface="Consolas"/>
@@ -4244,7 +4215,7 @@
             <a:r>
               <a:rPr sz="1050" b="0">
                 <a:solidFill>
-                  <a:srgbClr val="7E827E"/>
+                  <a:srgbClr val="6B6559"/>
                 </a:solidFill>
                 <a:latin typeface="Microsoft YaHei"/>
                 <a:ea typeface="Consolas"/>
@@ -4265,7 +4236,7 @@
             <a:r>
               <a:rPr sz="1050" b="0">
                 <a:solidFill>
-                  <a:srgbClr val="7E827E"/>
+                  <a:srgbClr val="6B6559"/>
                 </a:solidFill>
                 <a:latin typeface="Microsoft YaHei"/>
                 <a:ea typeface="Consolas"/>
@@ -4302,7 +4273,7 @@
             <a:r>
               <a:rPr sz="950" b="0">
                 <a:solidFill>
-                  <a:srgbClr val="4B4F4B"/>
+                  <a:srgbClr val="9C968A"/>
                 </a:solidFill>
                 <a:latin typeface="Microsoft YaHei"/>
                 <a:ea typeface="Consolas"/>
@@ -4328,7 +4299,7 @@
             <a:avLst/>
           </a:prstGeom>
           <a:solidFill>
-            <a:srgbClr val="232625"/>
+            <a:srgbClr val="E3DFD5"/>
           </a:solidFill>
           <a:ln>
             <a:noFill/>
@@ -4368,7 +4339,7 @@
             <a:r>
               <a:rPr sz="900" b="0">
                 <a:solidFill>
-                  <a:srgbClr val="D7FF3F"/>
+                  <a:srgbClr val="B5893A"/>
                 </a:solidFill>
                 <a:latin typeface="Microsoft YaHei"/>
                 <a:ea typeface="Consolas"/>
@@ -4412,7 +4383,7 @@
             <a:r>
               <a:rPr sz="1050" b="0">
                 <a:solidFill>
-                  <a:srgbClr val="F2F2EF"/>
+                  <a:srgbClr val="1A1A1A"/>
                 </a:solidFill>
                 <a:latin typeface="Microsoft YaHei"/>
                 <a:ea typeface="Consolas"/>
@@ -4449,7 +4420,7 @@
             <a:r>
               <a:rPr sz="900" b="0">
                 <a:solidFill>
-                  <a:srgbClr val="D7FF3F"/>
+                  <a:srgbClr val="6C8A4A"/>
                 </a:solidFill>
                 <a:latin typeface="Microsoft YaHei"/>
                 <a:ea typeface="Consolas"/>
@@ -4493,7 +4464,7 @@
             <a:r>
               <a:rPr sz="1050" b="0">
                 <a:solidFill>
-                  <a:srgbClr val="F2F2EF"/>
+                  <a:srgbClr val="1A1A1A"/>
                 </a:solidFill>
                 <a:latin typeface="Microsoft YaHei"/>
                 <a:ea typeface="Consolas"/>
@@ -4530,7 +4501,7 @@
             <a:r>
               <a:rPr sz="900" b="0">
                 <a:solidFill>
-                  <a:srgbClr val="9A9D8E"/>
+                  <a:srgbClr val="A8792C"/>
                 </a:solidFill>
                 <a:latin typeface="Microsoft YaHei"/>
                 <a:ea typeface="Consolas"/>
@@ -4574,7 +4545,7 @@
             <a:r>
               <a:rPr sz="1050" b="0">
                 <a:solidFill>
-                  <a:srgbClr val="F2F2EF"/>
+                  <a:srgbClr val="1A1A1A"/>
                 </a:solidFill>
                 <a:latin typeface="Microsoft YaHei"/>
                 <a:ea typeface="Consolas"/>
@@ -4611,7 +4582,7 @@
             <a:r>
               <a:rPr sz="1100" b="0">
                 <a:solidFill>
-                  <a:srgbClr val="F2F2EF"/>
+                  <a:srgbClr val="1A1A1A"/>
                 </a:solidFill>
                 <a:latin typeface="Microsoft YaHei"/>
                 <a:ea typeface="Consolas"/>
@@ -4655,7 +4626,7 @@
             <a:r>
               <a:rPr sz="900" b="0">
                 <a:solidFill>
-                  <a:srgbClr val="4B4F4B"/>
+                  <a:srgbClr val="9C968A"/>
                 </a:solidFill>
                 <a:latin typeface="Microsoft YaHei"/>
                 <a:ea typeface="Consolas"/>
@@ -4692,7 +4663,7 @@
             <a:r>
               <a:rPr sz="1000" b="0">
                 <a:solidFill>
-                  <a:srgbClr val="64748B"/>
+                  <a:srgbClr val="6B6559"/>
                 </a:solidFill>
                 <a:latin typeface="Consolas"/>
                 <a:ea typeface="Consolas"/>
@@ -4736,7 +4707,7 @@
             <a:avLst/>
           </a:prstGeom>
           <a:solidFill>
-            <a:srgbClr val="0B0C0B"/>
+            <a:srgbClr val="E8E3D7"/>
           </a:solidFill>
           <a:ln>
             <a:noFill/>
@@ -4776,13 +4747,13 @@
             <a:r>
               <a:rPr sz="950" b="0">
                 <a:solidFill>
-                  <a:srgbClr val="4B4F4B"/>
+                  <a:srgbClr val="9C968A"/>
                 </a:solidFill>
                 <a:latin typeface="Microsoft YaHei"/>
                 <a:ea typeface="Consolas"/>
                 <a:cs typeface="Consolas"/>
               </a:rPr>
-              <a:t>设计语言</a:t>
+              <a:t>DESIGN LANGUAGE</a:t>
             </a:r>
           </a:p>
         </p:txBody>
@@ -4813,13 +4784,13 @@
             <a:r>
               <a:rPr sz="2800" b="1">
                 <a:solidFill>
-                  <a:srgbClr val="F2F2EF"/>
+                  <a:srgbClr val="1A1A1A"/>
                 </a:solidFill>
                 <a:latin typeface="Microsoft YaHei"/>
                 <a:ea typeface="Consolas"/>
                 <a:cs typeface="Consolas"/>
               </a:rPr>
-              <a:t>为什么现在显得「素」</a:t>
+              <a:t>从压抑到稳重</a:t>
             </a:r>
           </a:p>
         </p:txBody>
@@ -4850,13 +4821,13 @@
             <a:r>
               <a:rPr sz="1250" b="0">
                 <a:solidFill>
-                  <a:srgbClr val="7E827E"/>
+                  <a:srgbClr val="6B6559"/>
                 </a:solidFill>
                 <a:latin typeface="Microsoft YaHei"/>
                 <a:ea typeface="Consolas"/>
                 <a:cs typeface="Consolas"/>
               </a:rPr>
-              <a:t>不是缺颜色，是缺层级与节奏：现在只有「底色 + 一条描边」，字重全是粗的，也没有编号与眉标。</a:t>
+              <a:t>上一版全黑，看着压抑。这一版换成暖米白：深色只留一块 hero，其余靠发丝线与留白分层。</a:t>
             </a:r>
           </a:p>
         </p:txBody>
@@ -4876,7 +4847,7 @@
             <a:avLst/>
           </a:prstGeom>
           <a:solidFill>
-            <a:srgbClr val="D7FF3F"/>
+            <a:srgbClr val="B5893A"/>
           </a:solidFill>
           <a:ln>
             <a:noFill/>
@@ -4898,8 +4869,8 @@
         </p:nvSpPr>
         <p:spPr>
           <a:xfrm>
-            <a:off x="731520" y="1883664"/>
-            <a:ext cx="5486400" cy="256032"/>
+            <a:off x="731520" y="1847088"/>
+            <a:ext cx="5486400" cy="237744"/>
           </a:xfrm>
           <a:prstGeom prst="rect">
             <a:avLst/>
@@ -4916,13 +4887,13 @@
             <a:r>
               <a:rPr sz="1150" b="1">
                 <a:solidFill>
-                  <a:srgbClr val="F2F2EF"/>
+                  <a:srgbClr val="1A1A1A"/>
                 </a:solidFill>
                 <a:latin typeface="Microsoft YaHei"/>
                 <a:ea typeface="Consolas"/>
                 <a:cs typeface="Consolas"/>
               </a:rPr>
-              <a:t>① 近单色 + 一个柠檬绿：层级靠发丝线和留白，不靠颜色</a:t>
+              <a:t>① 暖米白打底，深色只留一块 hero，墨色分层</a:t>
             </a:r>
           </a:p>
         </p:txBody>
@@ -4935,18 +4906,18 @@
         </p:nvSpPr>
         <p:spPr>
           <a:xfrm>
-            <a:off x="749808" y="2194560"/>
-            <a:ext cx="512064" cy="292608"/>
+            <a:off x="749808" y="2121408"/>
+            <a:ext cx="493776" cy="274320"/>
           </a:xfrm>
           <a:prstGeom prst="roundRect">
             <a:avLst/>
           </a:prstGeom>
           <a:solidFill>
-            <a:srgbClr val="0B0C0B"/>
+            <a:srgbClr val="F4F2ED"/>
           </a:solidFill>
           <a:ln w="12700">
             <a:solidFill>
-              <a:srgbClr val="2B2F2E"/>
+              <a:srgbClr val="CFC9BB"/>
             </a:solidFill>
           </a:ln>
         </p:spPr>
@@ -4966,8 +4937,8 @@
         </p:nvSpPr>
         <p:spPr>
           <a:xfrm>
-            <a:off x="1389888" y="2185416"/>
-            <a:ext cx="1737360" cy="182880"/>
+            <a:off x="1371600" y="2112264"/>
+            <a:ext cx="1737360" cy="173736"/>
           </a:xfrm>
           <a:prstGeom prst="rect">
             <a:avLst/>
@@ -4984,7 +4955,7 @@
             <a:r>
               <a:rPr sz="950" b="0">
                 <a:solidFill>
-                  <a:srgbClr val="F2F2EF"/>
+                  <a:srgbClr val="1A1A1A"/>
                 </a:solidFill>
                 <a:latin typeface="Consolas"/>
                 <a:ea typeface="Consolas"/>
@@ -5003,8 +4974,8 @@
         </p:nvSpPr>
         <p:spPr>
           <a:xfrm>
-            <a:off x="1389888" y="2340864"/>
-            <a:ext cx="1737360" cy="146304"/>
+            <a:off x="1371600" y="2258568"/>
+            <a:ext cx="1737360" cy="137160"/>
           </a:xfrm>
           <a:prstGeom prst="rect">
             <a:avLst/>
@@ -5021,13 +4992,13 @@
             <a:r>
               <a:rPr sz="750" b="0">
                 <a:solidFill>
-                  <a:srgbClr val="4B4F4B"/>
+                  <a:srgbClr val="9C968A"/>
                 </a:solidFill>
                 <a:latin typeface="Consolas"/>
                 <a:ea typeface="Consolas"/>
                 <a:cs typeface="Consolas"/>
               </a:rPr>
-              <a:t>#0B0C0B</a:t>
+              <a:t>#F4F2ED</a:t>
             </a:r>
           </a:p>
         </p:txBody>
@@ -5040,8 +5011,8 @@
         </p:nvSpPr>
         <p:spPr>
           <a:xfrm>
-            <a:off x="2999232" y="2240279"/>
-            <a:ext cx="2377440" cy="201168"/>
+            <a:off x="2980944" y="2157984"/>
+            <a:ext cx="2468880" cy="192024"/>
           </a:xfrm>
           <a:prstGeom prst="rect">
             <a:avLst/>
@@ -5056,15 +5027,15 @@
           <a:p>
             <a:pPr algn="l"/>
             <a:r>
-              <a:rPr sz="1100" b="0">
-                <a:solidFill>
-                  <a:srgbClr val="7E827E"/>
+              <a:rPr sz="1050" b="0">
+                <a:solidFill>
+                  <a:srgbClr val="6B6559"/>
                 </a:solidFill>
                 <a:latin typeface="Microsoft YaHei"/>
                 <a:ea typeface="Consolas"/>
                 <a:cs typeface="Consolas"/>
               </a:rPr>
-              <a:t>页面底</a:t>
+              <a:t>页面底（暖米白）</a:t>
             </a:r>
           </a:p>
         </p:txBody>
@@ -5077,18 +5048,18 @@
         </p:nvSpPr>
         <p:spPr>
           <a:xfrm>
-            <a:off x="749808" y="2628900"/>
-            <a:ext cx="512064" cy="292608"/>
+            <a:off x="749808" y="2519172"/>
+            <a:ext cx="493776" cy="274320"/>
           </a:xfrm>
           <a:prstGeom prst="roundRect">
             <a:avLst/>
           </a:prstGeom>
           <a:solidFill>
-            <a:srgbClr val="0E0F0E"/>
+            <a:srgbClr val="EFECE3"/>
           </a:solidFill>
           <a:ln w="12700">
             <a:solidFill>
-              <a:srgbClr val="2B2F2E"/>
+              <a:srgbClr val="CFC9BB"/>
             </a:solidFill>
           </a:ln>
         </p:spPr>
@@ -5108,8 +5079,8 @@
         </p:nvSpPr>
         <p:spPr>
           <a:xfrm>
-            <a:off x="1389888" y="2619756"/>
-            <a:ext cx="1737360" cy="182880"/>
+            <a:off x="1371600" y="2510028"/>
+            <a:ext cx="1737360" cy="173736"/>
           </a:xfrm>
           <a:prstGeom prst="rect">
             <a:avLst/>
@@ -5126,7 +5097,7 @@
             <a:r>
               <a:rPr sz="950" b="0">
                 <a:solidFill>
-                  <a:srgbClr val="F2F2EF"/>
+                  <a:srgbClr val="1A1A1A"/>
                 </a:solidFill>
                 <a:latin typeface="Consolas"/>
                 <a:ea typeface="Consolas"/>
@@ -5145,8 +5116,8 @@
         </p:nvSpPr>
         <p:spPr>
           <a:xfrm>
-            <a:off x="1389888" y="2775204"/>
-            <a:ext cx="1737360" cy="146304"/>
+            <a:off x="1371600" y="2656332"/>
+            <a:ext cx="1737360" cy="137160"/>
           </a:xfrm>
           <a:prstGeom prst="rect">
             <a:avLst/>
@@ -5163,13 +5134,13 @@
             <a:r>
               <a:rPr sz="750" b="0">
                 <a:solidFill>
-                  <a:srgbClr val="4B4F4B"/>
+                  <a:srgbClr val="9C968A"/>
                 </a:solidFill>
                 <a:latin typeface="Consolas"/>
                 <a:ea typeface="Consolas"/>
                 <a:cs typeface="Consolas"/>
               </a:rPr>
-              <a:t>#0E0F0E</a:t>
+              <a:t>#EFECE3</a:t>
             </a:r>
           </a:p>
         </p:txBody>
@@ -5182,8 +5153,8 @@
         </p:nvSpPr>
         <p:spPr>
           <a:xfrm>
-            <a:off x="2999232" y="2674620"/>
-            <a:ext cx="2377440" cy="201168"/>
+            <a:off x="2980944" y="2555748"/>
+            <a:ext cx="2468880" cy="192024"/>
           </a:xfrm>
           <a:prstGeom prst="rect">
             <a:avLst/>
@@ -5198,9 +5169,9 @@
           <a:p>
             <a:pPr algn="l"/>
             <a:r>
-              <a:rPr sz="1100" b="0">
-                <a:solidFill>
-                  <a:srgbClr val="7E827E"/>
+              <a:rPr sz="1050" b="0">
+                <a:solidFill>
+                  <a:srgbClr val="6B6559"/>
                 </a:solidFill>
                 <a:latin typeface="Microsoft YaHei"/>
                 <a:ea typeface="Consolas"/>
@@ -5219,18 +5190,18 @@
         </p:nvSpPr>
         <p:spPr>
           <a:xfrm>
-            <a:off x="749808" y="3063239"/>
-            <a:ext cx="512064" cy="292608"/>
+            <a:off x="749808" y="2916936"/>
+            <a:ext cx="493776" cy="274320"/>
           </a:xfrm>
           <a:prstGeom prst="roundRect">
             <a:avLst/>
           </a:prstGeom>
           <a:solidFill>
-            <a:srgbClr val="131413"/>
+            <a:srgbClr val="FFFFFF"/>
           </a:solidFill>
           <a:ln w="12700">
             <a:solidFill>
-              <a:srgbClr val="2B2F2E"/>
+              <a:srgbClr val="CFC9BB"/>
             </a:solidFill>
           </a:ln>
         </p:spPr>
@@ -5250,8 +5221,8 @@
         </p:nvSpPr>
         <p:spPr>
           <a:xfrm>
-            <a:off x="1389888" y="3054096"/>
-            <a:ext cx="1737360" cy="182880"/>
+            <a:off x="1371600" y="2907792"/>
+            <a:ext cx="1737360" cy="173736"/>
           </a:xfrm>
           <a:prstGeom prst="rect">
             <a:avLst/>
@@ -5268,7 +5239,7 @@
             <a:r>
               <a:rPr sz="950" b="0">
                 <a:solidFill>
-                  <a:srgbClr val="F2F2EF"/>
+                  <a:srgbClr val="1A1A1A"/>
                 </a:solidFill>
                 <a:latin typeface="Consolas"/>
                 <a:ea typeface="Consolas"/>
@@ -5287,8 +5258,8 @@
         </p:nvSpPr>
         <p:spPr>
           <a:xfrm>
-            <a:off x="1389888" y="3209544"/>
-            <a:ext cx="1737360" cy="146304"/>
+            <a:off x="1371600" y="3054096"/>
+            <a:ext cx="1737360" cy="137160"/>
           </a:xfrm>
           <a:prstGeom prst="rect">
             <a:avLst/>
@@ -5305,13 +5276,13 @@
             <a:r>
               <a:rPr sz="750" b="0">
                 <a:solidFill>
-                  <a:srgbClr val="4B4F4B"/>
+                  <a:srgbClr val="9C968A"/>
                 </a:solidFill>
                 <a:latin typeface="Consolas"/>
                 <a:ea typeface="Consolas"/>
                 <a:cs typeface="Consolas"/>
               </a:rPr>
-              <a:t>#131413</a:t>
+              <a:t>#FFFFFF</a:t>
             </a:r>
           </a:p>
         </p:txBody>
@@ -5324,8 +5295,8 @@
         </p:nvSpPr>
         <p:spPr>
           <a:xfrm>
-            <a:off x="2999232" y="3108959"/>
-            <a:ext cx="2377440" cy="201168"/>
+            <a:off x="2980944" y="2953512"/>
+            <a:ext cx="2468880" cy="192024"/>
           </a:xfrm>
           <a:prstGeom prst="rect">
             <a:avLst/>
@@ -5340,9 +5311,9 @@
           <a:p>
             <a:pPr algn="l"/>
             <a:r>
-              <a:rPr sz="1100" b="0">
-                <a:solidFill>
-                  <a:srgbClr val="7E827E"/>
+              <a:rPr sz="1050" b="0">
+                <a:solidFill>
+                  <a:srgbClr val="6B6559"/>
                 </a:solidFill>
                 <a:latin typeface="Microsoft YaHei"/>
                 <a:ea typeface="Consolas"/>
@@ -5361,18 +5332,18 @@
         </p:nvSpPr>
         <p:spPr>
           <a:xfrm>
-            <a:off x="749808" y="3497579"/>
-            <a:ext cx="512064" cy="292608"/>
+            <a:off x="749808" y="3314700"/>
+            <a:ext cx="493776" cy="274320"/>
           </a:xfrm>
           <a:prstGeom prst="roundRect">
             <a:avLst/>
           </a:prstGeom>
           <a:solidFill>
-            <a:srgbClr val="1A1B19"/>
+            <a:srgbClr val="F8F6F0"/>
           </a:solidFill>
           <a:ln w="12700">
             <a:solidFill>
-              <a:srgbClr val="2B2F2E"/>
+              <a:srgbClr val="CFC9BB"/>
             </a:solidFill>
           </a:ln>
         </p:spPr>
@@ -5392,8 +5363,8 @@
         </p:nvSpPr>
         <p:spPr>
           <a:xfrm>
-            <a:off x="1389888" y="3488436"/>
-            <a:ext cx="1737360" cy="182880"/>
+            <a:off x="1371600" y="3305556"/>
+            <a:ext cx="1737360" cy="173736"/>
           </a:xfrm>
           <a:prstGeom prst="rect">
             <a:avLst/>
@@ -5410,7 +5381,7 @@
             <a:r>
               <a:rPr sz="950" b="0">
                 <a:solidFill>
-                  <a:srgbClr val="F2F2EF"/>
+                  <a:srgbClr val="1A1A1A"/>
                 </a:solidFill>
                 <a:latin typeface="Consolas"/>
                 <a:ea typeface="Consolas"/>
@@ -5429,8 +5400,8 @@
         </p:nvSpPr>
         <p:spPr>
           <a:xfrm>
-            <a:off x="1389888" y="3643884"/>
-            <a:ext cx="1737360" cy="146304"/>
+            <a:off x="1371600" y="3451860"/>
+            <a:ext cx="1737360" cy="137160"/>
           </a:xfrm>
           <a:prstGeom prst="rect">
             <a:avLst/>
@@ -5447,13 +5418,13 @@
             <a:r>
               <a:rPr sz="750" b="0">
                 <a:solidFill>
-                  <a:srgbClr val="4B4F4B"/>
+                  <a:srgbClr val="9C968A"/>
                 </a:solidFill>
                 <a:latin typeface="Consolas"/>
                 <a:ea typeface="Consolas"/>
                 <a:cs typeface="Consolas"/>
               </a:rPr>
-              <a:t>#1A1B19</a:t>
+              <a:t>#F8F6F0</a:t>
             </a:r>
           </a:p>
         </p:txBody>
@@ -5466,8 +5437,8 @@
         </p:nvSpPr>
         <p:spPr>
           <a:xfrm>
-            <a:off x="2999232" y="3543299"/>
-            <a:ext cx="2377440" cy="201168"/>
+            <a:off x="2980944" y="3351276"/>
+            <a:ext cx="2468880" cy="192024"/>
           </a:xfrm>
           <a:prstGeom prst="rect">
             <a:avLst/>
@@ -5482,9 +5453,9 @@
           <a:p>
             <a:pPr algn="l"/>
             <a:r>
-              <a:rPr sz="1100" b="0">
-                <a:solidFill>
-                  <a:srgbClr val="7E827E"/>
+              <a:rPr sz="1050" b="0">
+                <a:solidFill>
+                  <a:srgbClr val="6B6559"/>
                 </a:solidFill>
                 <a:latin typeface="Microsoft YaHei"/>
                 <a:ea typeface="Consolas"/>
@@ -5503,18 +5474,18 @@
         </p:nvSpPr>
         <p:spPr>
           <a:xfrm>
-            <a:off x="749808" y="3931920"/>
-            <a:ext cx="512064" cy="292608"/>
+            <a:off x="749808" y="3712463"/>
+            <a:ext cx="493776" cy="274320"/>
           </a:xfrm>
           <a:prstGeom prst="roundRect">
             <a:avLst/>
           </a:prstGeom>
           <a:solidFill>
-            <a:srgbClr val="232625"/>
+            <a:srgbClr val="E3DFD5"/>
           </a:solidFill>
           <a:ln w="12700">
             <a:solidFill>
-              <a:srgbClr val="2B2F2E"/>
+              <a:srgbClr val="CFC9BB"/>
             </a:solidFill>
           </a:ln>
         </p:spPr>
@@ -5534,8 +5505,8 @@
         </p:nvSpPr>
         <p:spPr>
           <a:xfrm>
-            <a:off x="1389888" y="3922776"/>
-            <a:ext cx="1737360" cy="182880"/>
+            <a:off x="1371600" y="3703320"/>
+            <a:ext cx="1737360" cy="173736"/>
           </a:xfrm>
           <a:prstGeom prst="rect">
             <a:avLst/>
@@ -5552,7 +5523,7 @@
             <a:r>
               <a:rPr sz="950" b="0">
                 <a:solidFill>
-                  <a:srgbClr val="F2F2EF"/>
+                  <a:srgbClr val="1A1A1A"/>
                 </a:solidFill>
                 <a:latin typeface="Consolas"/>
                 <a:ea typeface="Consolas"/>
@@ -5571,8 +5542,8 @@
         </p:nvSpPr>
         <p:spPr>
           <a:xfrm>
-            <a:off x="1389888" y="4078224"/>
-            <a:ext cx="1737360" cy="146304"/>
+            <a:off x="1371600" y="3849624"/>
+            <a:ext cx="1737360" cy="137160"/>
           </a:xfrm>
           <a:prstGeom prst="rect">
             <a:avLst/>
@@ -5589,13 +5560,13 @@
             <a:r>
               <a:rPr sz="750" b="0">
                 <a:solidFill>
-                  <a:srgbClr val="4B4F4B"/>
+                  <a:srgbClr val="9C968A"/>
                 </a:solidFill>
                 <a:latin typeface="Consolas"/>
                 <a:ea typeface="Consolas"/>
                 <a:cs typeface="Consolas"/>
               </a:rPr>
-              <a:t>#232625</a:t>
+              <a:t>#E3DFD5</a:t>
             </a:r>
           </a:p>
         </p:txBody>
@@ -5608,8 +5579,8 @@
         </p:nvSpPr>
         <p:spPr>
           <a:xfrm>
-            <a:off x="2999232" y="3977639"/>
-            <a:ext cx="2377440" cy="201168"/>
+            <a:off x="2980944" y="3749039"/>
+            <a:ext cx="2468880" cy="192024"/>
           </a:xfrm>
           <a:prstGeom prst="rect">
             <a:avLst/>
@@ -5624,9 +5595,9 @@
           <a:p>
             <a:pPr algn="l"/>
             <a:r>
-              <a:rPr sz="1100" b="0">
-                <a:solidFill>
-                  <a:srgbClr val="7E827E"/>
+              <a:rPr sz="1050" b="0">
+                <a:solidFill>
+                  <a:srgbClr val="6B6559"/>
                 </a:solidFill>
                 <a:latin typeface="Microsoft YaHei"/>
                 <a:ea typeface="Consolas"/>
@@ -5645,18 +5616,18 @@
         </p:nvSpPr>
         <p:spPr>
           <a:xfrm>
-            <a:off x="749808" y="4366260"/>
-            <a:ext cx="512064" cy="292608"/>
+            <a:off x="749808" y="4110227"/>
+            <a:ext cx="493776" cy="274320"/>
           </a:xfrm>
           <a:prstGeom prst="roundRect">
             <a:avLst/>
           </a:prstGeom>
           <a:solidFill>
-            <a:srgbClr val="F2F2EF"/>
+            <a:srgbClr val="1A1A1A"/>
           </a:solidFill>
           <a:ln w="12700">
             <a:solidFill>
-              <a:srgbClr val="2B2F2E"/>
+              <a:srgbClr val="CFC9BB"/>
             </a:solidFill>
           </a:ln>
         </p:spPr>
@@ -5676,8 +5647,8 @@
         </p:nvSpPr>
         <p:spPr>
           <a:xfrm>
-            <a:off x="1389888" y="4357116"/>
-            <a:ext cx="1737360" cy="182880"/>
+            <a:off x="1371600" y="4101083"/>
+            <a:ext cx="1737360" cy="173736"/>
           </a:xfrm>
           <a:prstGeom prst="rect">
             <a:avLst/>
@@ -5694,7 +5665,7 @@
             <a:r>
               <a:rPr sz="950" b="0">
                 <a:solidFill>
-                  <a:srgbClr val="F2F2EF"/>
+                  <a:srgbClr val="1A1A1A"/>
                 </a:solidFill>
                 <a:latin typeface="Consolas"/>
                 <a:ea typeface="Consolas"/>
@@ -5713,8 +5684,8 @@
         </p:nvSpPr>
         <p:spPr>
           <a:xfrm>
-            <a:off x="1389888" y="4512564"/>
-            <a:ext cx="1737360" cy="146304"/>
+            <a:off x="1371600" y="4247388"/>
+            <a:ext cx="1737360" cy="137160"/>
           </a:xfrm>
           <a:prstGeom prst="rect">
             <a:avLst/>
@@ -5731,13 +5702,13 @@
             <a:r>
               <a:rPr sz="750" b="0">
                 <a:solidFill>
-                  <a:srgbClr val="4B4F4B"/>
+                  <a:srgbClr val="9C968A"/>
                 </a:solidFill>
                 <a:latin typeface="Consolas"/>
                 <a:ea typeface="Consolas"/>
                 <a:cs typeface="Consolas"/>
               </a:rPr>
-              <a:t>#F2F2EF</a:t>
+              <a:t>#1A1A1A</a:t>
             </a:r>
           </a:p>
         </p:txBody>
@@ -5750,8 +5721,8 @@
         </p:nvSpPr>
         <p:spPr>
           <a:xfrm>
-            <a:off x="2999232" y="4411980"/>
-            <a:ext cx="2377440" cy="201168"/>
+            <a:off x="2980944" y="4146803"/>
+            <a:ext cx="2468880" cy="192024"/>
           </a:xfrm>
           <a:prstGeom prst="rect">
             <a:avLst/>
@@ -5766,9 +5737,9 @@
           <a:p>
             <a:pPr algn="l"/>
             <a:r>
-              <a:rPr sz="1100" b="0">
-                <a:solidFill>
-                  <a:srgbClr val="7E827E"/>
+              <a:rPr sz="1050" b="0">
+                <a:solidFill>
+                  <a:srgbClr val="6B6559"/>
                 </a:solidFill>
                 <a:latin typeface="Microsoft YaHei"/>
                 <a:ea typeface="Consolas"/>
@@ -5787,18 +5758,18 @@
         </p:nvSpPr>
         <p:spPr>
           <a:xfrm>
-            <a:off x="749808" y="4800600"/>
-            <a:ext cx="512064" cy="292608"/>
+            <a:off x="749808" y="4507992"/>
+            <a:ext cx="493776" cy="274320"/>
           </a:xfrm>
           <a:prstGeom prst="roundRect">
             <a:avLst/>
           </a:prstGeom>
           <a:solidFill>
-            <a:srgbClr val="7E827E"/>
+            <a:srgbClr val="6B6559"/>
           </a:solidFill>
           <a:ln w="12700">
             <a:solidFill>
-              <a:srgbClr val="2B2F2E"/>
+              <a:srgbClr val="CFC9BB"/>
             </a:solidFill>
           </a:ln>
         </p:spPr>
@@ -5818,8 +5789,8 @@
         </p:nvSpPr>
         <p:spPr>
           <a:xfrm>
-            <a:off x="1389888" y="4791456"/>
-            <a:ext cx="1737360" cy="182880"/>
+            <a:off x="1371600" y="4498848"/>
+            <a:ext cx="1737360" cy="173736"/>
           </a:xfrm>
           <a:prstGeom prst="rect">
             <a:avLst/>
@@ -5836,7 +5807,7 @@
             <a:r>
               <a:rPr sz="950" b="0">
                 <a:solidFill>
-                  <a:srgbClr val="F2F2EF"/>
+                  <a:srgbClr val="1A1A1A"/>
                 </a:solidFill>
                 <a:latin typeface="Consolas"/>
                 <a:ea typeface="Consolas"/>
@@ -5855,8 +5826,8 @@
         </p:nvSpPr>
         <p:spPr>
           <a:xfrm>
-            <a:off x="1389888" y="4946904"/>
-            <a:ext cx="1737360" cy="146304"/>
+            <a:off x="1371600" y="4645152"/>
+            <a:ext cx="1737360" cy="137160"/>
           </a:xfrm>
           <a:prstGeom prst="rect">
             <a:avLst/>
@@ -5873,13 +5844,13 @@
             <a:r>
               <a:rPr sz="750" b="0">
                 <a:solidFill>
-                  <a:srgbClr val="4B4F4B"/>
+                  <a:srgbClr val="9C968A"/>
                 </a:solidFill>
                 <a:latin typeface="Consolas"/>
                 <a:ea typeface="Consolas"/>
                 <a:cs typeface="Consolas"/>
               </a:rPr>
-              <a:t>#7E827E</a:t>
+              <a:t>#6B6559</a:t>
             </a:r>
           </a:p>
         </p:txBody>
@@ -5892,8 +5863,8 @@
         </p:nvSpPr>
         <p:spPr>
           <a:xfrm>
-            <a:off x="2999232" y="4846320"/>
-            <a:ext cx="2377440" cy="201168"/>
+            <a:off x="2980944" y="4544568"/>
+            <a:ext cx="2468880" cy="192024"/>
           </a:xfrm>
           <a:prstGeom prst="rect">
             <a:avLst/>
@@ -5908,9 +5879,9 @@
           <a:p>
             <a:pPr algn="l"/>
             <a:r>
-              <a:rPr sz="1100" b="0">
-                <a:solidFill>
-                  <a:srgbClr val="7E827E"/>
+              <a:rPr sz="1050" b="0">
+                <a:solidFill>
+                  <a:srgbClr val="6B6559"/>
                 </a:solidFill>
                 <a:latin typeface="Microsoft YaHei"/>
                 <a:ea typeface="Consolas"/>
@@ -5929,18 +5900,18 @@
         </p:nvSpPr>
         <p:spPr>
           <a:xfrm>
-            <a:off x="749808" y="5234940"/>
-            <a:ext cx="512064" cy="292608"/>
+            <a:off x="749808" y="4905756"/>
+            <a:ext cx="493776" cy="274320"/>
           </a:xfrm>
           <a:prstGeom prst="roundRect">
             <a:avLst/>
           </a:prstGeom>
           <a:solidFill>
-            <a:srgbClr val="4B4F4B"/>
+            <a:srgbClr val="9C968A"/>
           </a:solidFill>
           <a:ln w="12700">
             <a:solidFill>
-              <a:srgbClr val="2B2F2E"/>
+              <a:srgbClr val="CFC9BB"/>
             </a:solidFill>
           </a:ln>
         </p:spPr>
@@ -5960,8 +5931,8 @@
         </p:nvSpPr>
         <p:spPr>
           <a:xfrm>
-            <a:off x="1389888" y="5225796"/>
-            <a:ext cx="1737360" cy="182880"/>
+            <a:off x="1371600" y="4896612"/>
+            <a:ext cx="1737360" cy="173736"/>
           </a:xfrm>
           <a:prstGeom prst="rect">
             <a:avLst/>
@@ -5978,7 +5949,7 @@
             <a:r>
               <a:rPr sz="950" b="0">
                 <a:solidFill>
-                  <a:srgbClr val="F2F2EF"/>
+                  <a:srgbClr val="1A1A1A"/>
                 </a:solidFill>
                 <a:latin typeface="Consolas"/>
                 <a:ea typeface="Consolas"/>
@@ -5997,8 +5968,8 @@
         </p:nvSpPr>
         <p:spPr>
           <a:xfrm>
-            <a:off x="1389888" y="5381244"/>
-            <a:ext cx="1737360" cy="146304"/>
+            <a:off x="1371600" y="5042916"/>
+            <a:ext cx="1737360" cy="137160"/>
           </a:xfrm>
           <a:prstGeom prst="rect">
             <a:avLst/>
@@ -6015,13 +5986,13 @@
             <a:r>
               <a:rPr sz="750" b="0">
                 <a:solidFill>
-                  <a:srgbClr val="4B4F4B"/>
+                  <a:srgbClr val="9C968A"/>
                 </a:solidFill>
                 <a:latin typeface="Consolas"/>
                 <a:ea typeface="Consolas"/>
                 <a:cs typeface="Consolas"/>
               </a:rPr>
-              <a:t>#4B4F4B</a:t>
+              <a:t>#9C968A</a:t>
             </a:r>
           </a:p>
         </p:txBody>
@@ -6034,8 +6005,8 @@
         </p:nvSpPr>
         <p:spPr>
           <a:xfrm>
-            <a:off x="2999232" y="5280659"/>
-            <a:ext cx="2377440" cy="201168"/>
+            <a:off x="2980944" y="4942332"/>
+            <a:ext cx="2468880" cy="192024"/>
           </a:xfrm>
           <a:prstGeom prst="rect">
             <a:avLst/>
@@ -6050,9 +6021,9 @@
           <a:p>
             <a:pPr algn="l"/>
             <a:r>
-              <a:rPr sz="1100" b="0">
-                <a:solidFill>
-                  <a:srgbClr val="7E827E"/>
+              <a:rPr sz="1050" b="0">
+                <a:solidFill>
+                  <a:srgbClr val="6B6559"/>
                 </a:solidFill>
                 <a:latin typeface="Microsoft YaHei"/>
                 <a:ea typeface="Consolas"/>
@@ -6071,18 +6042,18 @@
         </p:nvSpPr>
         <p:spPr>
           <a:xfrm>
-            <a:off x="749808" y="5669279"/>
-            <a:ext cx="512064" cy="292608"/>
+            <a:off x="749808" y="5303520"/>
+            <a:ext cx="493776" cy="274320"/>
           </a:xfrm>
           <a:prstGeom prst="roundRect">
             <a:avLst/>
           </a:prstGeom>
           <a:solidFill>
-            <a:srgbClr val="D7FF3F"/>
+            <a:srgbClr val="B5893A"/>
           </a:solidFill>
           <a:ln w="12700">
             <a:solidFill>
-              <a:srgbClr val="2B2F2E"/>
+              <a:srgbClr val="CFC9BB"/>
             </a:solidFill>
           </a:ln>
         </p:spPr>
@@ -6102,8 +6073,8 @@
         </p:nvSpPr>
         <p:spPr>
           <a:xfrm>
-            <a:off x="1389888" y="5660136"/>
-            <a:ext cx="1737360" cy="182880"/>
+            <a:off x="1371600" y="5294376"/>
+            <a:ext cx="1737360" cy="173736"/>
           </a:xfrm>
           <a:prstGeom prst="rect">
             <a:avLst/>
@@ -6120,7 +6091,7 @@
             <a:r>
               <a:rPr sz="950" b="0">
                 <a:solidFill>
-                  <a:srgbClr val="F2F2EF"/>
+                  <a:srgbClr val="1A1A1A"/>
                 </a:solidFill>
                 <a:latin typeface="Consolas"/>
                 <a:ea typeface="Consolas"/>
@@ -6139,8 +6110,8 @@
         </p:nvSpPr>
         <p:spPr>
           <a:xfrm>
-            <a:off x="1389888" y="5815583"/>
-            <a:ext cx="1737360" cy="146304"/>
+            <a:off x="1371600" y="5440680"/>
+            <a:ext cx="1737360" cy="137160"/>
           </a:xfrm>
           <a:prstGeom prst="rect">
             <a:avLst/>
@@ -6157,13 +6128,13 @@
             <a:r>
               <a:rPr sz="750" b="0">
                 <a:solidFill>
-                  <a:srgbClr val="4B4F4B"/>
+                  <a:srgbClr val="9C968A"/>
                 </a:solidFill>
                 <a:latin typeface="Consolas"/>
                 <a:ea typeface="Consolas"/>
                 <a:cs typeface="Consolas"/>
               </a:rPr>
-              <a:t>#D7FF3F</a:t>
+              <a:t>#B5893A</a:t>
             </a:r>
           </a:p>
         </p:txBody>
@@ -6176,8 +6147,8 @@
         </p:nvSpPr>
         <p:spPr>
           <a:xfrm>
-            <a:off x="2999232" y="5714999"/>
-            <a:ext cx="2377440" cy="201168"/>
+            <a:off x="2980944" y="5340096"/>
+            <a:ext cx="2468880" cy="192024"/>
           </a:xfrm>
           <a:prstGeom prst="rect">
             <a:avLst/>
@@ -6192,15 +6163,15 @@
           <a:p>
             <a:pPr algn="l"/>
             <a:r>
-              <a:rPr sz="1100" b="0">
-                <a:solidFill>
-                  <a:srgbClr val="7E827E"/>
+              <a:rPr sz="1050" b="0">
+                <a:solidFill>
+                  <a:srgbClr val="6B6559"/>
                 </a:solidFill>
                 <a:latin typeface="Microsoft YaHei"/>
                 <a:ea typeface="Consolas"/>
                 <a:cs typeface="Consolas"/>
               </a:rPr>
-              <a:t>唯一强调色</a:t>
+              <a:t>黄铜：数据与选中</a:t>
             </a:r>
           </a:p>
         </p:txBody>
@@ -6213,18 +6184,18 @@
         </p:nvSpPr>
         <p:spPr>
           <a:xfrm>
-            <a:off x="749808" y="6103619"/>
-            <a:ext cx="512064" cy="292608"/>
+            <a:off x="749808" y="5701283"/>
+            <a:ext cx="493776" cy="274320"/>
           </a:xfrm>
           <a:prstGeom prst="roundRect">
             <a:avLst/>
           </a:prstGeom>
           <a:solidFill>
-            <a:srgbClr val="F1F1EE"/>
+            <a:srgbClr val="161412"/>
           </a:solidFill>
           <a:ln w="12700">
             <a:solidFill>
-              <a:srgbClr val="2B2F2E"/>
+              <a:srgbClr val="CFC9BB"/>
             </a:solidFill>
           </a:ln>
         </p:spPr>
@@ -6244,8 +6215,8 @@
         </p:nvSpPr>
         <p:spPr>
           <a:xfrm>
-            <a:off x="1389888" y="6094475"/>
-            <a:ext cx="1737360" cy="182880"/>
+            <a:off x="1371600" y="5692140"/>
+            <a:ext cx="1737360" cy="173736"/>
           </a:xfrm>
           <a:prstGeom prst="rect">
             <a:avLst/>
@@ -6262,7 +6233,7 @@
             <a:r>
               <a:rPr sz="950" b="0">
                 <a:solidFill>
-                  <a:srgbClr val="F2F2EF"/>
+                  <a:srgbClr val="1A1A1A"/>
                 </a:solidFill>
                 <a:latin typeface="Consolas"/>
                 <a:ea typeface="Consolas"/>
@@ -6281,8 +6252,8 @@
         </p:nvSpPr>
         <p:spPr>
           <a:xfrm>
-            <a:off x="1389888" y="6249923"/>
-            <a:ext cx="1737360" cy="146304"/>
+            <a:off x="1371600" y="5838444"/>
+            <a:ext cx="1737360" cy="137160"/>
           </a:xfrm>
           <a:prstGeom prst="rect">
             <a:avLst/>
@@ -6299,13 +6270,13 @@
             <a:r>
               <a:rPr sz="750" b="0">
                 <a:solidFill>
-                  <a:srgbClr val="4B4F4B"/>
+                  <a:srgbClr val="9C968A"/>
                 </a:solidFill>
                 <a:latin typeface="Consolas"/>
                 <a:ea typeface="Consolas"/>
                 <a:cs typeface="Consolas"/>
               </a:rPr>
-              <a:t>#F1F1EE</a:t>
+              <a:t>#161412</a:t>
             </a:r>
           </a:p>
         </p:txBody>
@@ -6318,8 +6289,8 @@
         </p:nvSpPr>
         <p:spPr>
           <a:xfrm>
-            <a:off x="2999232" y="6149339"/>
-            <a:ext cx="2377440" cy="201168"/>
+            <a:off x="2980944" y="5737859"/>
+            <a:ext cx="2468880" cy="192024"/>
           </a:xfrm>
           <a:prstGeom prst="rect">
             <a:avLst/>
@@ -6334,28 +6305,170 @@
           <a:p>
             <a:pPr algn="l"/>
             <a:r>
-              <a:rPr sz="1100" b="0">
-                <a:solidFill>
-                  <a:srgbClr val="7E827E"/>
+              <a:rPr sz="1050" b="0">
+                <a:solidFill>
+                  <a:srgbClr val="6B6559"/>
                 </a:solidFill>
                 <a:latin typeface="Microsoft YaHei"/>
                 <a:ea typeface="Consolas"/>
                 <a:cs typeface="Consolas"/>
               </a:rPr>
-              <a:t>导航选中（反色）</a:t>
-            </a:r>
-          </a:p>
-        </p:txBody>
-      </p:sp>
-      <p:sp>
-        <p:nvSpPr>
-          <p:cNvPr id="48" name="TextBox 47"/>
-          <p:cNvSpPr txBox="1"/>
-          <p:nvPr/>
-        </p:nvSpPr>
-        <p:spPr>
-          <a:xfrm>
-            <a:off x="6355080" y="1883664"/>
+              <a:t>导航选中（反色深底）</a:t>
+            </a:r>
+          </a:p>
+        </p:txBody>
+      </p:sp>
+      <p:sp>
+        <p:nvSpPr>
+          <p:cNvPr id="48" name="Rounded Rectangle 47"/>
+          <p:cNvSpPr/>
+          <p:nvPr/>
+        </p:nvSpPr>
+        <p:spPr>
+          <a:xfrm>
+            <a:off x="749808" y="6099048"/>
+            <a:ext cx="493776" cy="274320"/>
+          </a:xfrm>
+          <a:prstGeom prst="roundRect">
+            <a:avLst/>
+          </a:prstGeom>
+          <a:solidFill>
+            <a:srgbClr val="161412"/>
+          </a:solidFill>
+          <a:ln w="12700">
+            <a:solidFill>
+              <a:srgbClr val="CFC9BB"/>
+            </a:solidFill>
+          </a:ln>
+        </p:spPr>
+        <p:txBody>
+          <a:bodyPr rtlCol="0" anchor="ctr"/>
+          <a:lstStyle/>
+          <a:p>
+            <a:pPr algn="ctr"/>
+          </a:p>
+        </p:txBody>
+      </p:sp>
+      <p:sp>
+        <p:nvSpPr>
+          <p:cNvPr id="49" name="TextBox 48"/>
+          <p:cNvSpPr txBox="1"/>
+          <p:nvPr/>
+        </p:nvSpPr>
+        <p:spPr>
+          <a:xfrm>
+            <a:off x="1371600" y="6089904"/>
+            <a:ext cx="1737360" cy="173736"/>
+          </a:xfrm>
+          <a:prstGeom prst="rect">
+            <a:avLst/>
+          </a:prstGeom>
+          <a:noFill/>
+        </p:spPr>
+        <p:txBody>
+          <a:bodyPr wrap="square">
+            <a:spAutoFit/>
+          </a:bodyPr>
+          <a:lstStyle/>
+          <a:p>
+            <a:pPr algn="l"/>
+            <a:r>
+              <a:rPr sz="950" b="0">
+                <a:solidFill>
+                  <a:srgbClr val="1A1A1A"/>
+                </a:solidFill>
+                <a:latin typeface="Consolas"/>
+                <a:ea typeface="Consolas"/>
+                <a:cs typeface="Consolas"/>
+              </a:rPr>
+              <a:t>--hero</a:t>
+            </a:r>
+          </a:p>
+        </p:txBody>
+      </p:sp>
+      <p:sp>
+        <p:nvSpPr>
+          <p:cNvPr id="50" name="TextBox 49"/>
+          <p:cNvSpPr txBox="1"/>
+          <p:nvPr/>
+        </p:nvSpPr>
+        <p:spPr>
+          <a:xfrm>
+            <a:off x="1371600" y="6236208"/>
+            <a:ext cx="1737360" cy="137160"/>
+          </a:xfrm>
+          <a:prstGeom prst="rect">
+            <a:avLst/>
+          </a:prstGeom>
+          <a:noFill/>
+        </p:spPr>
+        <p:txBody>
+          <a:bodyPr wrap="square">
+            <a:spAutoFit/>
+          </a:bodyPr>
+          <a:lstStyle/>
+          <a:p>
+            <a:pPr algn="l"/>
+            <a:r>
+              <a:rPr sz="750" b="0">
+                <a:solidFill>
+                  <a:srgbClr val="9C968A"/>
+                </a:solidFill>
+                <a:latin typeface="Consolas"/>
+                <a:ea typeface="Consolas"/>
+                <a:cs typeface="Consolas"/>
+              </a:rPr>
+              <a:t>#161412</a:t>
+            </a:r>
+          </a:p>
+        </p:txBody>
+      </p:sp>
+      <p:sp>
+        <p:nvSpPr>
+          <p:cNvPr id="51" name="TextBox 50"/>
+          <p:cNvSpPr txBox="1"/>
+          <p:nvPr/>
+        </p:nvSpPr>
+        <p:spPr>
+          <a:xfrm>
+            <a:off x="2980944" y="6135624"/>
+            <a:ext cx="2468880" cy="192024"/>
+          </a:xfrm>
+          <a:prstGeom prst="rect">
+            <a:avLst/>
+          </a:prstGeom>
+          <a:noFill/>
+        </p:spPr>
+        <p:txBody>
+          <a:bodyPr wrap="square">
+            <a:spAutoFit/>
+          </a:bodyPr>
+          <a:lstStyle/>
+          <a:p>
+            <a:pPr algn="l"/>
+            <a:r>
+              <a:rPr sz="1050" b="0">
+                <a:solidFill>
+                  <a:srgbClr val="6B6559"/>
+                </a:solidFill>
+                <a:latin typeface="Microsoft YaHei"/>
+                <a:ea typeface="Consolas"/>
+                <a:cs typeface="Consolas"/>
+              </a:rPr>
+              <a:t>深色 hero 块</a:t>
+            </a:r>
+          </a:p>
+        </p:txBody>
+      </p:sp>
+      <p:sp>
+        <p:nvSpPr>
+          <p:cNvPr id="52" name="TextBox 51"/>
+          <p:cNvSpPr txBox="1"/>
+          <p:nvPr/>
+        </p:nvSpPr>
+        <p:spPr>
+          <a:xfrm>
+            <a:off x="6355080" y="1847088"/>
             <a:ext cx="685800" cy="365760"/>
           </a:xfrm>
           <a:prstGeom prst="rect">
@@ -6373,7 +6486,7 @@
             <a:r>
               <a:rPr sz="2000" b="1">
                 <a:solidFill>
-                  <a:srgbClr val="D7FF3F"/>
+                  <a:srgbClr val="B5893A"/>
                 </a:solidFill>
                 <a:latin typeface="Consolas"/>
                 <a:ea typeface="Consolas"/>
@@ -6386,13 +6499,13 @@
       </p:sp>
       <p:sp>
         <p:nvSpPr>
-          <p:cNvPr id="49" name="TextBox 48"/>
-          <p:cNvSpPr txBox="1"/>
-          <p:nvPr/>
-        </p:nvSpPr>
-        <p:spPr>
-          <a:xfrm>
-            <a:off x="7040880" y="1892807"/>
+          <p:cNvPr id="53" name="TextBox 52"/>
+          <p:cNvSpPr txBox="1"/>
+          <p:nvPr/>
+        </p:nvSpPr>
+        <p:spPr>
+          <a:xfrm>
+            <a:off x="7040880" y="1856231"/>
             <a:ext cx="4480560" cy="274320"/>
           </a:xfrm>
           <a:prstGeom prst="rect">
@@ -6410,26 +6523,26 @@
             <a:r>
               <a:rPr sz="1400" b="1">
                 <a:solidFill>
-                  <a:srgbClr val="F2F2EF"/>
+                  <a:srgbClr val="1A1A1A"/>
                 </a:solidFill>
                 <a:latin typeface="Microsoft YaHei"/>
                 <a:ea typeface="Consolas"/>
                 <a:cs typeface="Consolas"/>
               </a:rPr>
-              <a:t>编号导航 + 小字母英文</a:t>
-            </a:r>
-          </a:p>
-        </p:txBody>
-      </p:sp>
-      <p:sp>
-        <p:nvSpPr>
-          <p:cNvPr id="50" name="TextBox 49"/>
-          <p:cNvSpPr txBox="1"/>
-          <p:nvPr/>
-        </p:nvSpPr>
-        <p:spPr>
-          <a:xfrm>
-            <a:off x="7040880" y="2231136"/>
+              <a:t>先解决「压抑」</a:t>
+            </a:r>
+          </a:p>
+        </p:txBody>
+      </p:sp>
+      <p:sp>
+        <p:nvSpPr>
+          <p:cNvPr id="54" name="TextBox 53"/>
+          <p:cNvSpPr txBox="1"/>
+          <p:nvPr/>
+        </p:nvSpPr>
+        <p:spPr>
+          <a:xfrm>
+            <a:off x="7040880" y="2194560"/>
             <a:ext cx="4389120" cy="914400"/>
           </a:xfrm>
           <a:prstGeom prst="rect">
@@ -6454,26 +6567,26 @@
             <a:r>
               <a:rPr sz="1050" b="0">
                 <a:solidFill>
-                  <a:srgbClr val="7E827E"/>
+                  <a:srgbClr val="6B6559"/>
                 </a:solidFill>
                 <a:latin typeface="Microsoft YaHei"/>
                 <a:ea typeface="Consolas"/>
                 <a:cs typeface="Consolas"/>
               </a:rPr>
-              <a:t>01 今日 / TODAY。数字用等宽、英文 8px 字距 .15em，中文照常。选中项是反色浅底，不是加粗。</a:t>
-            </a:r>
-          </a:p>
-        </p:txBody>
-      </p:sp>
-      <p:sp>
-        <p:nvSpPr>
-          <p:cNvPr id="51" name="TextBox 50"/>
-          <p:cNvSpPr txBox="1"/>
-          <p:nvPr/>
-        </p:nvSpPr>
-        <p:spPr>
-          <a:xfrm>
-            <a:off x="6355080" y="3328416"/>
+              <a:t>纯黑 + 高饱和红会让界面像监控室。换成暖米白，文字用墨色，深色只保留一块 hero 用来压住画面。</a:t>
+            </a:r>
+          </a:p>
+        </p:txBody>
+      </p:sp>
+      <p:sp>
+        <p:nvSpPr>
+          <p:cNvPr id="55" name="TextBox 54"/>
+          <p:cNvSpPr txBox="1"/>
+          <p:nvPr/>
+        </p:nvSpPr>
+        <p:spPr>
+          <a:xfrm>
+            <a:off x="6355080" y="3291840"/>
             <a:ext cx="685800" cy="365760"/>
           </a:xfrm>
           <a:prstGeom prst="rect">
@@ -6491,7 +6604,7 @@
             <a:r>
               <a:rPr sz="2000" b="1">
                 <a:solidFill>
-                  <a:srgbClr val="D7FF3F"/>
+                  <a:srgbClr val="B5893A"/>
                 </a:solidFill>
                 <a:latin typeface="Consolas"/>
                 <a:ea typeface="Consolas"/>
@@ -6504,13 +6617,13 @@
       </p:sp>
       <p:sp>
         <p:nvSpPr>
-          <p:cNvPr id="52" name="TextBox 51"/>
-          <p:cNvSpPr txBox="1"/>
-          <p:nvPr/>
-        </p:nvSpPr>
-        <p:spPr>
-          <a:xfrm>
-            <a:off x="7040880" y="3337560"/>
+          <p:cNvPr id="56" name="TextBox 55"/>
+          <p:cNvSpPr txBox="1"/>
+          <p:nvPr/>
+        </p:nvSpPr>
+        <p:spPr>
+          <a:xfrm>
+            <a:off x="7040880" y="3300984"/>
             <a:ext cx="4480560" cy="274320"/>
           </a:xfrm>
           <a:prstGeom prst="rect">
@@ -6528,26 +6641,26 @@
             <a:r>
               <a:rPr sz="1400" b="1">
                 <a:solidFill>
-                  <a:srgbClr val="F2F2EF"/>
+                  <a:srgbClr val="1A1A1A"/>
                 </a:solidFill>
                 <a:latin typeface="Microsoft YaHei"/>
                 <a:ea typeface="Consolas"/>
                 <a:cs typeface="Consolas"/>
               </a:rPr>
-              <a:t>字重 500，不是 700</a:t>
-            </a:r>
-          </a:p>
-        </p:txBody>
-      </p:sp>
-      <p:sp>
-        <p:nvSpPr>
-          <p:cNvPr id="53" name="TextBox 52"/>
-          <p:cNvSpPr txBox="1"/>
-          <p:nvPr/>
-        </p:nvSpPr>
-        <p:spPr>
-          <a:xfrm>
-            <a:off x="7040880" y="3675888"/>
+              <a:t>编号导航 + 小字母英文</a:t>
+            </a:r>
+          </a:p>
+        </p:txBody>
+      </p:sp>
+      <p:sp>
+        <p:nvSpPr>
+          <p:cNvPr id="57" name="TextBox 56"/>
+          <p:cNvSpPr txBox="1"/>
+          <p:nvPr/>
+        </p:nvSpPr>
+        <p:spPr>
+          <a:xfrm>
+            <a:off x="7040880" y="3639312"/>
             <a:ext cx="4389120" cy="914400"/>
           </a:xfrm>
           <a:prstGeom prst="rect">
@@ -6572,26 +6685,26 @@
             <a:r>
               <a:rPr sz="1050" b="0">
                 <a:solidFill>
-                  <a:srgbClr val="7E827E"/>
+                  <a:srgbClr val="6B6559"/>
                 </a:solidFill>
                 <a:latin typeface="Microsoft YaHei"/>
                 <a:ea typeface="Consolas"/>
                 <a:cs typeface="Consolas"/>
               </a:rPr>
-              <a:t>标题 650、数字 500。粗体让界面显得吵；轻一点、大一点、间距开一点，才有编辑感。</a:t>
-            </a:r>
-          </a:p>
-        </p:txBody>
-      </p:sp>
-      <p:sp>
-        <p:nvSpPr>
-          <p:cNvPr id="54" name="TextBox 53"/>
-          <p:cNvSpPr txBox="1"/>
-          <p:nvPr/>
-        </p:nvSpPr>
-        <p:spPr>
-          <a:xfrm>
-            <a:off x="6355080" y="4773168"/>
+              <a:t>01 今日 / TODAY。选中项是反色深底药丸，不是加粗；左边一条黄铜竖条。</a:t>
+            </a:r>
+          </a:p>
+        </p:txBody>
+      </p:sp>
+      <p:sp>
+        <p:nvSpPr>
+          <p:cNvPr id="58" name="TextBox 57"/>
+          <p:cNvSpPr txBox="1"/>
+          <p:nvPr/>
+        </p:nvSpPr>
+        <p:spPr>
+          <a:xfrm>
+            <a:off x="6355080" y="4736592"/>
             <a:ext cx="685800" cy="365760"/>
           </a:xfrm>
           <a:prstGeom prst="rect">
@@ -6609,7 +6722,7 @@
             <a:r>
               <a:rPr sz="2000" b="1">
                 <a:solidFill>
-                  <a:srgbClr val="D7FF3F"/>
+                  <a:srgbClr val="B5893A"/>
                 </a:solidFill>
                 <a:latin typeface="Consolas"/>
                 <a:ea typeface="Consolas"/>
@@ -6622,13 +6735,13 @@
       </p:sp>
       <p:sp>
         <p:nvSpPr>
-          <p:cNvPr id="55" name="TextBox 54"/>
-          <p:cNvSpPr txBox="1"/>
-          <p:nvPr/>
-        </p:nvSpPr>
-        <p:spPr>
-          <a:xfrm>
-            <a:off x="7040880" y="4782312"/>
+          <p:cNvPr id="59" name="TextBox 58"/>
+          <p:cNvSpPr txBox="1"/>
+          <p:nvPr/>
+        </p:nvSpPr>
+        <p:spPr>
+          <a:xfrm>
+            <a:off x="7040880" y="4745736"/>
             <a:ext cx="4480560" cy="274320"/>
           </a:xfrm>
           <a:prstGeom prst="rect">
@@ -6646,7 +6759,7 @@
             <a:r>
               <a:rPr sz="1400" b="1">
                 <a:solidFill>
-                  <a:srgbClr val="F2F2EF"/>
+                  <a:srgbClr val="1A1A1A"/>
                 </a:solidFill>
                 <a:latin typeface="Microsoft YaHei"/>
                 <a:ea typeface="Consolas"/>
@@ -6659,13 +6772,13 @@
       </p:sp>
       <p:sp>
         <p:nvSpPr>
-          <p:cNvPr id="56" name="TextBox 55"/>
-          <p:cNvSpPr txBox="1"/>
-          <p:nvPr/>
-        </p:nvSpPr>
-        <p:spPr>
-          <a:xfrm>
-            <a:off x="7040880" y="5120640"/>
+          <p:cNvPr id="60" name="TextBox 59"/>
+          <p:cNvSpPr txBox="1"/>
+          <p:nvPr/>
+        </p:nvSpPr>
+        <p:spPr>
+          <a:xfrm>
+            <a:off x="7040880" y="5084064"/>
             <a:ext cx="4389120" cy="914400"/>
           </a:xfrm>
           <a:prstGeom prst="rect">
@@ -6690,20 +6803,20 @@
             <a:r>
               <a:rPr sz="1050" b="0">
                 <a:solidFill>
-                  <a:srgbClr val="7E827E"/>
+                  <a:srgbClr val="6B6559"/>
                 </a:solidFill>
                 <a:latin typeface="Microsoft YaHei"/>
                 <a:ea typeface="Consolas"/>
                 <a:cs typeface="Consolas"/>
               </a:rPr>
-              <a:t>柠檬绿只表示「这是你的数」和「这里被选中」。其余一律用墨色与灰阶分级。</a:t>
-            </a:r>
-          </a:p>
-        </p:txBody>
-      </p:sp>
-      <p:sp>
-        <p:nvSpPr>
-          <p:cNvPr id="57" name="TextBox 56"/>
+              <a:t>黄铜只表示「这是你的数」和「这里被选中」。其余用墨色与暖灰分级。</a:t>
+            </a:r>
+          </a:p>
+        </p:txBody>
+      </p:sp>
+      <p:sp>
+        <p:nvSpPr>
+          <p:cNvPr id="61" name="TextBox 60"/>
           <p:cNvSpPr txBox="1"/>
           <p:nvPr/>
         </p:nvSpPr>
@@ -6727,7 +6840,7 @@
             <a:r>
               <a:rPr sz="1000" b="0">
                 <a:solidFill>
-                  <a:srgbClr val="64748B"/>
+                  <a:srgbClr val="6B6559"/>
                 </a:solidFill>
                 <a:latin typeface="Consolas"/>
                 <a:ea typeface="Consolas"/>
@@ -6771,7 +6884,7 @@
             <a:avLst/>
           </a:prstGeom>
           <a:solidFill>
-            <a:srgbClr val="0B0C0B"/>
+            <a:srgbClr val="E8E3D7"/>
           </a:solidFill>
           <a:ln>
             <a:noFill/>
@@ -6811,7 +6924,7 @@
             <a:r>
               <a:rPr sz="950" b="0">
                 <a:solidFill>
-                  <a:srgbClr val="4B4F4B"/>
+                  <a:srgbClr val="9C968A"/>
                 </a:solidFill>
                 <a:latin typeface="Microsoft YaHei"/>
                 <a:ea typeface="Consolas"/>
@@ -6848,7 +6961,7 @@
             <a:r>
               <a:rPr sz="2700" b="1">
                 <a:solidFill>
-                  <a:srgbClr val="F2F2EF"/>
+                  <a:srgbClr val="1A1A1A"/>
                 </a:solidFill>
                 <a:latin typeface="Microsoft YaHei"/>
                 <a:ea typeface="Consolas"/>
@@ -6885,7 +6998,7 @@
             <a:r>
               <a:rPr sz="1100" b="0">
                 <a:solidFill>
-                  <a:srgbClr val="7E827E"/>
+                  <a:srgbClr val="6B6559"/>
                 </a:solidFill>
                 <a:latin typeface="Microsoft YaHei"/>
                 <a:ea typeface="Consolas"/>
@@ -6911,7 +7024,7 @@
             <a:avLst/>
           </a:prstGeom>
           <a:solidFill>
-            <a:srgbClr val="2B2F2E"/>
+            <a:srgbClr val="CFC9BB"/>
           </a:solidFill>
           <a:ln>
             <a:noFill/>
@@ -6975,7 +7088,7 @@
             <a:r>
               <a:rPr sz="950" b="0">
                 <a:solidFill>
-                  <a:srgbClr val="4B4F4B"/>
+                  <a:srgbClr val="9C968A"/>
                 </a:solidFill>
                 <a:latin typeface="Microsoft YaHei"/>
                 <a:ea typeface="Consolas"/>
@@ -7001,7 +7114,7 @@
             <a:avLst/>
           </a:prstGeom>
           <a:solidFill>
-            <a:srgbClr val="2B2F2E"/>
+            <a:srgbClr val="CFC9BB"/>
           </a:solidFill>
           <a:ln>
             <a:noFill/>
@@ -7041,7 +7154,7 @@
             <a:r>
               <a:rPr sz="1200" b="1">
                 <a:solidFill>
-                  <a:srgbClr val="D7FF3F"/>
+                  <a:srgbClr val="B5893A"/>
                 </a:solidFill>
                 <a:latin typeface="Consolas"/>
                 <a:ea typeface="Consolas"/>
@@ -7085,7 +7198,7 @@
             <a:r>
               <a:rPr sz="1000" b="0">
                 <a:solidFill>
-                  <a:srgbClr val="7E827E"/>
+                  <a:srgbClr val="6B6559"/>
                 </a:solidFill>
                 <a:latin typeface="Microsoft YaHei"/>
                 <a:ea typeface="Consolas"/>
@@ -7122,7 +7235,7 @@
             <a:r>
               <a:rPr sz="1200" b="1">
                 <a:solidFill>
-                  <a:srgbClr val="D7FF3F"/>
+                  <a:srgbClr val="B5893A"/>
                 </a:solidFill>
                 <a:latin typeface="Consolas"/>
                 <a:ea typeface="Consolas"/>
@@ -7166,7 +7279,7 @@
             <a:r>
               <a:rPr sz="1000" b="0">
                 <a:solidFill>
-                  <a:srgbClr val="7E827E"/>
+                  <a:srgbClr val="6B6559"/>
                 </a:solidFill>
                 <a:latin typeface="Microsoft YaHei"/>
                 <a:ea typeface="Consolas"/>
@@ -7203,7 +7316,7 @@
             <a:r>
               <a:rPr sz="1200" b="1">
                 <a:solidFill>
-                  <a:srgbClr val="D7FF3F"/>
+                  <a:srgbClr val="B5893A"/>
                 </a:solidFill>
                 <a:latin typeface="Consolas"/>
                 <a:ea typeface="Consolas"/>
@@ -7247,7 +7360,7 @@
             <a:r>
               <a:rPr sz="1000" b="0">
                 <a:solidFill>
-                  <a:srgbClr val="7E827E"/>
+                  <a:srgbClr val="6B6559"/>
                 </a:solidFill>
                 <a:latin typeface="Microsoft YaHei"/>
                 <a:ea typeface="Consolas"/>
@@ -7273,7 +7386,7 @@
             <a:avLst/>
           </a:prstGeom>
           <a:solidFill>
-            <a:srgbClr val="232625"/>
+            <a:srgbClr val="E3DFD5"/>
           </a:solidFill>
           <a:ln>
             <a:noFill/>
@@ -7313,7 +7426,7 @@
             <a:r>
               <a:rPr sz="950" b="0">
                 <a:solidFill>
-                  <a:srgbClr val="4B4F4B"/>
+                  <a:srgbClr val="9C968A"/>
                 </a:solidFill>
                 <a:latin typeface="Microsoft YaHei"/>
                 <a:ea typeface="Consolas"/>
@@ -7357,7 +7470,7 @@
             <a:r>
               <a:rPr sz="1000" b="0">
                 <a:solidFill>
-                  <a:srgbClr val="F2F2EF"/>
+                  <a:srgbClr val="1A1A1A"/>
                 </a:solidFill>
                 <a:latin typeface="Microsoft YaHei"/>
                 <a:ea typeface="Consolas"/>
@@ -7394,7 +7507,7 @@
             <a:r>
               <a:rPr sz="1000" b="0">
                 <a:solidFill>
-                  <a:srgbClr val="64748B"/>
+                  <a:srgbClr val="6B6559"/>
                 </a:solidFill>
                 <a:latin typeface="Consolas"/>
                 <a:ea typeface="Consolas"/>
@@ -7438,7 +7551,7 @@
             <a:avLst/>
           </a:prstGeom>
           <a:solidFill>
-            <a:srgbClr val="0B0C0B"/>
+            <a:srgbClr val="E8E3D7"/>
           </a:solidFill>
           <a:ln>
             <a:noFill/>
@@ -7478,7 +7591,7 @@
             <a:r>
               <a:rPr sz="950" b="0">
                 <a:solidFill>
-                  <a:srgbClr val="4B4F4B"/>
+                  <a:srgbClr val="9C968A"/>
                 </a:solidFill>
                 <a:latin typeface="Microsoft YaHei"/>
                 <a:ea typeface="Consolas"/>
@@ -7515,7 +7628,7 @@
             <a:r>
               <a:rPr sz="2700" b="1">
                 <a:solidFill>
-                  <a:srgbClr val="F2F2EF"/>
+                  <a:srgbClr val="1A1A1A"/>
                 </a:solidFill>
                 <a:latin typeface="Microsoft YaHei"/>
                 <a:ea typeface="Consolas"/>
@@ -7552,7 +7665,7 @@
             <a:r>
               <a:rPr sz="1100" b="0">
                 <a:solidFill>
-                  <a:srgbClr val="7E827E"/>
+                  <a:srgbClr val="6B6559"/>
                 </a:solidFill>
                 <a:latin typeface="Microsoft YaHei"/>
                 <a:ea typeface="Consolas"/>
@@ -7578,7 +7691,7 @@
             <a:avLst/>
           </a:prstGeom>
           <a:solidFill>
-            <a:srgbClr val="2B2F2E"/>
+            <a:srgbClr val="CFC9BB"/>
           </a:solidFill>
           <a:ln>
             <a:noFill/>
@@ -7642,7 +7755,7 @@
             <a:r>
               <a:rPr sz="950" b="0">
                 <a:solidFill>
-                  <a:srgbClr val="4B4F4B"/>
+                  <a:srgbClr val="9C968A"/>
                 </a:solidFill>
                 <a:latin typeface="Microsoft YaHei"/>
                 <a:ea typeface="Consolas"/>
@@ -7668,7 +7781,7 @@
             <a:avLst/>
           </a:prstGeom>
           <a:solidFill>
-            <a:srgbClr val="2B2F2E"/>
+            <a:srgbClr val="CFC9BB"/>
           </a:solidFill>
           <a:ln>
             <a:noFill/>
@@ -7708,7 +7821,7 @@
             <a:r>
               <a:rPr sz="1200" b="1">
                 <a:solidFill>
-                  <a:srgbClr val="D7FF3F"/>
+                  <a:srgbClr val="B5893A"/>
                 </a:solidFill>
                 <a:latin typeface="Consolas"/>
                 <a:ea typeface="Consolas"/>
@@ -7752,7 +7865,7 @@
             <a:r>
               <a:rPr sz="1000" b="0">
                 <a:solidFill>
-                  <a:srgbClr val="7E827E"/>
+                  <a:srgbClr val="6B6559"/>
                 </a:solidFill>
                 <a:latin typeface="Microsoft YaHei"/>
                 <a:ea typeface="Consolas"/>
@@ -7789,7 +7902,7 @@
             <a:r>
               <a:rPr sz="1200" b="1">
                 <a:solidFill>
-                  <a:srgbClr val="D7FF3F"/>
+                  <a:srgbClr val="B5893A"/>
                 </a:solidFill>
                 <a:latin typeface="Consolas"/>
                 <a:ea typeface="Consolas"/>
@@ -7833,7 +7946,7 @@
             <a:r>
               <a:rPr sz="1000" b="0">
                 <a:solidFill>
-                  <a:srgbClr val="7E827E"/>
+                  <a:srgbClr val="6B6559"/>
                 </a:solidFill>
                 <a:latin typeface="Microsoft YaHei"/>
                 <a:ea typeface="Consolas"/>
@@ -7870,7 +7983,7 @@
             <a:r>
               <a:rPr sz="1200" b="1">
                 <a:solidFill>
-                  <a:srgbClr val="D7FF3F"/>
+                  <a:srgbClr val="B5893A"/>
                 </a:solidFill>
                 <a:latin typeface="Consolas"/>
                 <a:ea typeface="Consolas"/>
@@ -7914,7 +8027,7 @@
             <a:r>
               <a:rPr sz="1000" b="0">
                 <a:solidFill>
-                  <a:srgbClr val="7E827E"/>
+                  <a:srgbClr val="6B6559"/>
                 </a:solidFill>
                 <a:latin typeface="Microsoft YaHei"/>
                 <a:ea typeface="Consolas"/>
@@ -7940,7 +8053,7 @@
             <a:avLst/>
           </a:prstGeom>
           <a:solidFill>
-            <a:srgbClr val="232625"/>
+            <a:srgbClr val="E3DFD5"/>
           </a:solidFill>
           <a:ln>
             <a:noFill/>
@@ -7980,7 +8093,7 @@
             <a:r>
               <a:rPr sz="950" b="0">
                 <a:solidFill>
-                  <a:srgbClr val="4B4F4B"/>
+                  <a:srgbClr val="9C968A"/>
                 </a:solidFill>
                 <a:latin typeface="Microsoft YaHei"/>
                 <a:ea typeface="Consolas"/>
@@ -8024,7 +8137,7 @@
             <a:r>
               <a:rPr sz="1000" b="0">
                 <a:solidFill>
-                  <a:srgbClr val="F2F2EF"/>
+                  <a:srgbClr val="1A1A1A"/>
                 </a:solidFill>
                 <a:latin typeface="Microsoft YaHei"/>
                 <a:ea typeface="Consolas"/>
@@ -8061,7 +8174,7 @@
             <a:r>
               <a:rPr sz="1000" b="0">
                 <a:solidFill>
-                  <a:srgbClr val="64748B"/>
+                  <a:srgbClr val="6B6559"/>
                 </a:solidFill>
                 <a:latin typeface="Consolas"/>
                 <a:ea typeface="Consolas"/>
@@ -8105,7 +8218,7 @@
             <a:avLst/>
           </a:prstGeom>
           <a:solidFill>
-            <a:srgbClr val="0B0C0B"/>
+            <a:srgbClr val="E8E3D7"/>
           </a:solidFill>
           <a:ln>
             <a:noFill/>
@@ -8145,7 +8258,7 @@
             <a:r>
               <a:rPr sz="950" b="0">
                 <a:solidFill>
-                  <a:srgbClr val="4B4F4B"/>
+                  <a:srgbClr val="9C968A"/>
                 </a:solidFill>
                 <a:latin typeface="Microsoft YaHei"/>
                 <a:ea typeface="Consolas"/>
@@ -8182,7 +8295,7 @@
             <a:r>
               <a:rPr sz="2700" b="1">
                 <a:solidFill>
-                  <a:srgbClr val="F2F2EF"/>
+                  <a:srgbClr val="1A1A1A"/>
                 </a:solidFill>
                 <a:latin typeface="Microsoft YaHei"/>
                 <a:ea typeface="Consolas"/>
@@ -8219,7 +8332,7 @@
             <a:r>
               <a:rPr sz="1100" b="0">
                 <a:solidFill>
-                  <a:srgbClr val="7E827E"/>
+                  <a:srgbClr val="6B6559"/>
                 </a:solidFill>
                 <a:latin typeface="Microsoft YaHei"/>
                 <a:ea typeface="Consolas"/>
@@ -8245,7 +8358,7 @@
             <a:avLst/>
           </a:prstGeom>
           <a:solidFill>
-            <a:srgbClr val="2B2F2E"/>
+            <a:srgbClr val="CFC9BB"/>
           </a:solidFill>
           <a:ln>
             <a:noFill/>
@@ -8309,7 +8422,7 @@
             <a:r>
               <a:rPr sz="950" b="0">
                 <a:solidFill>
-                  <a:srgbClr val="4B4F4B"/>
+                  <a:srgbClr val="9C968A"/>
                 </a:solidFill>
                 <a:latin typeface="Microsoft YaHei"/>
                 <a:ea typeface="Consolas"/>
@@ -8335,7 +8448,7 @@
             <a:avLst/>
           </a:prstGeom>
           <a:solidFill>
-            <a:srgbClr val="2B2F2E"/>
+            <a:srgbClr val="CFC9BB"/>
           </a:solidFill>
           <a:ln>
             <a:noFill/>
@@ -8375,7 +8488,7 @@
             <a:r>
               <a:rPr sz="1200" b="1">
                 <a:solidFill>
-                  <a:srgbClr val="D7FF3F"/>
+                  <a:srgbClr val="B5893A"/>
                 </a:solidFill>
                 <a:latin typeface="Consolas"/>
                 <a:ea typeface="Consolas"/>
@@ -8419,7 +8532,7 @@
             <a:r>
               <a:rPr sz="1000" b="0">
                 <a:solidFill>
-                  <a:srgbClr val="7E827E"/>
+                  <a:srgbClr val="6B6559"/>
                 </a:solidFill>
                 <a:latin typeface="Microsoft YaHei"/>
                 <a:ea typeface="Consolas"/>
@@ -8456,7 +8569,7 @@
             <a:r>
               <a:rPr sz="1200" b="1">
                 <a:solidFill>
-                  <a:srgbClr val="D7FF3F"/>
+                  <a:srgbClr val="B5893A"/>
                 </a:solidFill>
                 <a:latin typeface="Consolas"/>
                 <a:ea typeface="Consolas"/>
@@ -8500,7 +8613,7 @@
             <a:r>
               <a:rPr sz="1000" b="0">
                 <a:solidFill>
-                  <a:srgbClr val="7E827E"/>
+                  <a:srgbClr val="6B6559"/>
                 </a:solidFill>
                 <a:latin typeface="Microsoft YaHei"/>
                 <a:ea typeface="Consolas"/>
@@ -8537,7 +8650,7 @@
             <a:r>
               <a:rPr sz="1200" b="1">
                 <a:solidFill>
-                  <a:srgbClr val="D7FF3F"/>
+                  <a:srgbClr val="B5893A"/>
                 </a:solidFill>
                 <a:latin typeface="Consolas"/>
                 <a:ea typeface="Consolas"/>
@@ -8581,7 +8694,7 @@
             <a:r>
               <a:rPr sz="1000" b="0">
                 <a:solidFill>
-                  <a:srgbClr val="7E827E"/>
+                  <a:srgbClr val="6B6559"/>
                 </a:solidFill>
                 <a:latin typeface="Microsoft YaHei"/>
                 <a:ea typeface="Consolas"/>
@@ -8607,7 +8720,7 @@
             <a:avLst/>
           </a:prstGeom>
           <a:solidFill>
-            <a:srgbClr val="232625"/>
+            <a:srgbClr val="E3DFD5"/>
           </a:solidFill>
           <a:ln>
             <a:noFill/>
@@ -8647,7 +8760,7 @@
             <a:r>
               <a:rPr sz="950" b="0">
                 <a:solidFill>
-                  <a:srgbClr val="4B4F4B"/>
+                  <a:srgbClr val="9C968A"/>
                 </a:solidFill>
                 <a:latin typeface="Microsoft YaHei"/>
                 <a:ea typeface="Consolas"/>
@@ -8691,7 +8804,7 @@
             <a:r>
               <a:rPr sz="1000" b="0">
                 <a:solidFill>
-                  <a:srgbClr val="F2F2EF"/>
+                  <a:srgbClr val="1A1A1A"/>
                 </a:solidFill>
                 <a:latin typeface="Microsoft YaHei"/>
                 <a:ea typeface="Consolas"/>
@@ -8728,7 +8841,7 @@
             <a:r>
               <a:rPr sz="1000" b="0">
                 <a:solidFill>
-                  <a:srgbClr val="64748B"/>
+                  <a:srgbClr val="6B6559"/>
                 </a:solidFill>
                 <a:latin typeface="Consolas"/>
                 <a:ea typeface="Consolas"/>
@@ -8772,7 +8885,7 @@
             <a:avLst/>
           </a:prstGeom>
           <a:solidFill>
-            <a:srgbClr val="0B0C0B"/>
+            <a:srgbClr val="E8E3D7"/>
           </a:solidFill>
           <a:ln>
             <a:noFill/>
@@ -8812,7 +8925,7 @@
             <a:r>
               <a:rPr sz="950" b="0">
                 <a:solidFill>
-                  <a:srgbClr val="4B4F4B"/>
+                  <a:srgbClr val="9C968A"/>
                 </a:solidFill>
                 <a:latin typeface="Microsoft YaHei"/>
                 <a:ea typeface="Consolas"/>
@@ -8849,7 +8962,7 @@
             <a:r>
               <a:rPr sz="2700" b="1">
                 <a:solidFill>
-                  <a:srgbClr val="F2F2EF"/>
+                  <a:srgbClr val="1A1A1A"/>
                 </a:solidFill>
                 <a:latin typeface="Microsoft YaHei"/>
                 <a:ea typeface="Consolas"/>
@@ -8886,7 +8999,7 @@
             <a:r>
               <a:rPr sz="1100" b="0">
                 <a:solidFill>
-                  <a:srgbClr val="7E827E"/>
+                  <a:srgbClr val="6B6559"/>
                 </a:solidFill>
                 <a:latin typeface="Microsoft YaHei"/>
                 <a:ea typeface="Consolas"/>
@@ -8912,7 +9025,7 @@
             <a:avLst/>
           </a:prstGeom>
           <a:solidFill>
-            <a:srgbClr val="2B2F2E"/>
+            <a:srgbClr val="CFC9BB"/>
           </a:solidFill>
           <a:ln>
             <a:noFill/>
@@ -8976,7 +9089,7 @@
             <a:r>
               <a:rPr sz="950" b="0">
                 <a:solidFill>
-                  <a:srgbClr val="4B4F4B"/>
+                  <a:srgbClr val="9C968A"/>
                 </a:solidFill>
                 <a:latin typeface="Microsoft YaHei"/>
                 <a:ea typeface="Consolas"/>
@@ -9002,7 +9115,7 @@
             <a:avLst/>
           </a:prstGeom>
           <a:solidFill>
-            <a:srgbClr val="2B2F2E"/>
+            <a:srgbClr val="CFC9BB"/>
           </a:solidFill>
           <a:ln>
             <a:noFill/>
@@ -9042,7 +9155,7 @@
             <a:r>
               <a:rPr sz="1200" b="1">
                 <a:solidFill>
-                  <a:srgbClr val="D7FF3F"/>
+                  <a:srgbClr val="B5893A"/>
                 </a:solidFill>
                 <a:latin typeface="Consolas"/>
                 <a:ea typeface="Consolas"/>
@@ -9086,7 +9199,7 @@
             <a:r>
               <a:rPr sz="1000" b="0">
                 <a:solidFill>
-                  <a:srgbClr val="7E827E"/>
+                  <a:srgbClr val="6B6559"/>
                 </a:solidFill>
                 <a:latin typeface="Microsoft YaHei"/>
                 <a:ea typeface="Consolas"/>
@@ -9123,7 +9236,7 @@
             <a:r>
               <a:rPr sz="1200" b="1">
                 <a:solidFill>
-                  <a:srgbClr val="D7FF3F"/>
+                  <a:srgbClr val="B5893A"/>
                 </a:solidFill>
                 <a:latin typeface="Consolas"/>
                 <a:ea typeface="Consolas"/>
@@ -9167,7 +9280,7 @@
             <a:r>
               <a:rPr sz="1000" b="0">
                 <a:solidFill>
-                  <a:srgbClr val="7E827E"/>
+                  <a:srgbClr val="6B6559"/>
                 </a:solidFill>
                 <a:latin typeface="Microsoft YaHei"/>
                 <a:ea typeface="Consolas"/>
@@ -9204,7 +9317,7 @@
             <a:r>
               <a:rPr sz="1200" b="1">
                 <a:solidFill>
-                  <a:srgbClr val="D7FF3F"/>
+                  <a:srgbClr val="B5893A"/>
                 </a:solidFill>
                 <a:latin typeface="Consolas"/>
                 <a:ea typeface="Consolas"/>
@@ -9248,7 +9361,7 @@
             <a:r>
               <a:rPr sz="1000" b="0">
                 <a:solidFill>
-                  <a:srgbClr val="7E827E"/>
+                  <a:srgbClr val="6B6559"/>
                 </a:solidFill>
                 <a:latin typeface="Microsoft YaHei"/>
                 <a:ea typeface="Consolas"/>
@@ -9274,7 +9387,7 @@
             <a:avLst/>
           </a:prstGeom>
           <a:solidFill>
-            <a:srgbClr val="232625"/>
+            <a:srgbClr val="E3DFD5"/>
           </a:solidFill>
           <a:ln>
             <a:noFill/>
@@ -9314,7 +9427,7 @@
             <a:r>
               <a:rPr sz="950" b="0">
                 <a:solidFill>
-                  <a:srgbClr val="4B4F4B"/>
+                  <a:srgbClr val="9C968A"/>
                 </a:solidFill>
                 <a:latin typeface="Microsoft YaHei"/>
                 <a:ea typeface="Consolas"/>
@@ -9358,7 +9471,7 @@
             <a:r>
               <a:rPr sz="1000" b="0">
                 <a:solidFill>
-                  <a:srgbClr val="F2F2EF"/>
+                  <a:srgbClr val="1A1A1A"/>
                 </a:solidFill>
                 <a:latin typeface="Microsoft YaHei"/>
                 <a:ea typeface="Consolas"/>
@@ -9395,7 +9508,7 @@
             <a:r>
               <a:rPr sz="1000" b="0">
                 <a:solidFill>
-                  <a:srgbClr val="64748B"/>
+                  <a:srgbClr val="6B6559"/>
                 </a:solidFill>
                 <a:latin typeface="Consolas"/>
                 <a:ea typeface="Consolas"/>
@@ -9439,7 +9552,7 @@
             <a:avLst/>
           </a:prstGeom>
           <a:solidFill>
-            <a:srgbClr val="0B0C0B"/>
+            <a:srgbClr val="E8E3D7"/>
           </a:solidFill>
           <a:ln>
             <a:noFill/>
@@ -9479,7 +9592,7 @@
             <a:r>
               <a:rPr sz="950" b="0">
                 <a:solidFill>
-                  <a:srgbClr val="4B4F4B"/>
+                  <a:srgbClr val="9C968A"/>
                 </a:solidFill>
                 <a:latin typeface="Microsoft YaHei"/>
                 <a:ea typeface="Consolas"/>
@@ -9516,7 +9629,7 @@
             <a:r>
               <a:rPr sz="2700" b="1">
                 <a:solidFill>
-                  <a:srgbClr val="F2F2EF"/>
+                  <a:srgbClr val="1A1A1A"/>
                 </a:solidFill>
                 <a:latin typeface="Microsoft YaHei"/>
                 <a:ea typeface="Consolas"/>
@@ -9553,7 +9666,7 @@
             <a:r>
               <a:rPr sz="1100" b="0">
                 <a:solidFill>
-                  <a:srgbClr val="7E827E"/>
+                  <a:srgbClr val="6B6559"/>
                 </a:solidFill>
                 <a:latin typeface="Microsoft YaHei"/>
                 <a:ea typeface="Consolas"/>
@@ -9579,7 +9692,7 @@
             <a:avLst/>
           </a:prstGeom>
           <a:solidFill>
-            <a:srgbClr val="2B2F2E"/>
+            <a:srgbClr val="CFC9BB"/>
           </a:solidFill>
           <a:ln>
             <a:noFill/>
@@ -9643,7 +9756,7 @@
             <a:r>
               <a:rPr sz="950" b="0">
                 <a:solidFill>
-                  <a:srgbClr val="4B4F4B"/>
+                  <a:srgbClr val="9C968A"/>
                 </a:solidFill>
                 <a:latin typeface="Microsoft YaHei"/>
                 <a:ea typeface="Consolas"/>
@@ -9669,7 +9782,7 @@
             <a:avLst/>
           </a:prstGeom>
           <a:solidFill>
-            <a:srgbClr val="2B2F2E"/>
+            <a:srgbClr val="CFC9BB"/>
           </a:solidFill>
           <a:ln>
             <a:noFill/>
@@ -9709,7 +9822,7 @@
             <a:r>
               <a:rPr sz="1200" b="1">
                 <a:solidFill>
-                  <a:srgbClr val="D7FF3F"/>
+                  <a:srgbClr val="B5893A"/>
                 </a:solidFill>
                 <a:latin typeface="Consolas"/>
                 <a:ea typeface="Consolas"/>
@@ -9753,7 +9866,7 @@
             <a:r>
               <a:rPr sz="1000" b="0">
                 <a:solidFill>
-                  <a:srgbClr val="7E827E"/>
+                  <a:srgbClr val="6B6559"/>
                 </a:solidFill>
                 <a:latin typeface="Microsoft YaHei"/>
                 <a:ea typeface="Consolas"/>
@@ -9790,7 +9903,7 @@
             <a:r>
               <a:rPr sz="1200" b="1">
                 <a:solidFill>
-                  <a:srgbClr val="D7FF3F"/>
+                  <a:srgbClr val="B5893A"/>
                 </a:solidFill>
                 <a:latin typeface="Consolas"/>
                 <a:ea typeface="Consolas"/>
@@ -9834,7 +9947,7 @@
             <a:r>
               <a:rPr sz="1000" b="0">
                 <a:solidFill>
-                  <a:srgbClr val="7E827E"/>
+                  <a:srgbClr val="6B6559"/>
                 </a:solidFill>
                 <a:latin typeface="Microsoft YaHei"/>
                 <a:ea typeface="Consolas"/>
@@ -9871,7 +9984,7 @@
             <a:r>
               <a:rPr sz="1200" b="1">
                 <a:solidFill>
-                  <a:srgbClr val="D7FF3F"/>
+                  <a:srgbClr val="B5893A"/>
                 </a:solidFill>
                 <a:latin typeface="Consolas"/>
                 <a:ea typeface="Consolas"/>
@@ -9915,7 +10028,7 @@
             <a:r>
               <a:rPr sz="1000" b="0">
                 <a:solidFill>
-                  <a:srgbClr val="7E827E"/>
+                  <a:srgbClr val="6B6559"/>
                 </a:solidFill>
                 <a:latin typeface="Microsoft YaHei"/>
                 <a:ea typeface="Consolas"/>
@@ -9941,7 +10054,7 @@
             <a:avLst/>
           </a:prstGeom>
           <a:solidFill>
-            <a:srgbClr val="232625"/>
+            <a:srgbClr val="E3DFD5"/>
           </a:solidFill>
           <a:ln>
             <a:noFill/>
@@ -9981,7 +10094,7 @@
             <a:r>
               <a:rPr sz="950" b="0">
                 <a:solidFill>
-                  <a:srgbClr val="4B4F4B"/>
+                  <a:srgbClr val="9C968A"/>
                 </a:solidFill>
                 <a:latin typeface="Microsoft YaHei"/>
                 <a:ea typeface="Consolas"/>
@@ -10025,7 +10138,7 @@
             <a:r>
               <a:rPr sz="1000" b="0">
                 <a:solidFill>
-                  <a:srgbClr val="F2F2EF"/>
+                  <a:srgbClr val="1A1A1A"/>
                 </a:solidFill>
                 <a:latin typeface="Microsoft YaHei"/>
                 <a:ea typeface="Consolas"/>
@@ -10062,7 +10175,7 @@
             <a:r>
               <a:rPr sz="1000" b="0">
                 <a:solidFill>
-                  <a:srgbClr val="64748B"/>
+                  <a:srgbClr val="6B6559"/>
                 </a:solidFill>
                 <a:latin typeface="Consolas"/>
                 <a:ea typeface="Consolas"/>
@@ -10106,7 +10219,7 @@
             <a:avLst/>
           </a:prstGeom>
           <a:solidFill>
-            <a:srgbClr val="0B0C0B"/>
+            <a:srgbClr val="E8E3D7"/>
           </a:solidFill>
           <a:ln>
             <a:noFill/>
@@ -10146,7 +10259,7 @@
             <a:r>
               <a:rPr sz="950" b="0">
                 <a:solidFill>
-                  <a:srgbClr val="4B4F4B"/>
+                  <a:srgbClr val="9C968A"/>
                 </a:solidFill>
                 <a:latin typeface="Microsoft YaHei"/>
                 <a:ea typeface="Consolas"/>
@@ -10183,7 +10296,7 @@
             <a:r>
               <a:rPr sz="2700" b="1">
                 <a:solidFill>
-                  <a:srgbClr val="F2F2EF"/>
+                  <a:srgbClr val="1A1A1A"/>
                 </a:solidFill>
                 <a:latin typeface="Microsoft YaHei"/>
                 <a:ea typeface="Consolas"/>
@@ -10220,7 +10333,7 @@
             <a:r>
               <a:rPr sz="1100" b="0">
                 <a:solidFill>
-                  <a:srgbClr val="7E827E"/>
+                  <a:srgbClr val="6B6559"/>
                 </a:solidFill>
                 <a:latin typeface="Microsoft YaHei"/>
                 <a:ea typeface="Consolas"/>
@@ -10246,7 +10359,7 @@
             <a:avLst/>
           </a:prstGeom>
           <a:solidFill>
-            <a:srgbClr val="2B2F2E"/>
+            <a:srgbClr val="CFC9BB"/>
           </a:solidFill>
           <a:ln>
             <a:noFill/>
@@ -10310,7 +10423,7 @@
             <a:r>
               <a:rPr sz="950" b="0">
                 <a:solidFill>
-                  <a:srgbClr val="4B4F4B"/>
+                  <a:srgbClr val="9C968A"/>
                 </a:solidFill>
                 <a:latin typeface="Microsoft YaHei"/>
                 <a:ea typeface="Consolas"/>
@@ -10336,7 +10449,7 @@
             <a:avLst/>
           </a:prstGeom>
           <a:solidFill>
-            <a:srgbClr val="2B2F2E"/>
+            <a:srgbClr val="CFC9BB"/>
           </a:solidFill>
           <a:ln>
             <a:noFill/>
@@ -10376,7 +10489,7 @@
             <a:r>
               <a:rPr sz="1200" b="1">
                 <a:solidFill>
-                  <a:srgbClr val="D7FF3F"/>
+                  <a:srgbClr val="B5893A"/>
                 </a:solidFill>
                 <a:latin typeface="Consolas"/>
                 <a:ea typeface="Consolas"/>
@@ -10420,7 +10533,7 @@
             <a:r>
               <a:rPr sz="1000" b="0">
                 <a:solidFill>
-                  <a:srgbClr val="7E827E"/>
+                  <a:srgbClr val="6B6559"/>
                 </a:solidFill>
                 <a:latin typeface="Microsoft YaHei"/>
                 <a:ea typeface="Consolas"/>
@@ -10457,7 +10570,7 @@
             <a:r>
               <a:rPr sz="1200" b="1">
                 <a:solidFill>
-                  <a:srgbClr val="D7FF3F"/>
+                  <a:srgbClr val="B5893A"/>
                 </a:solidFill>
                 <a:latin typeface="Consolas"/>
                 <a:ea typeface="Consolas"/>
@@ -10501,7 +10614,7 @@
             <a:r>
               <a:rPr sz="1000" b="0">
                 <a:solidFill>
-                  <a:srgbClr val="7E827E"/>
+                  <a:srgbClr val="6B6559"/>
                 </a:solidFill>
                 <a:latin typeface="Microsoft YaHei"/>
                 <a:ea typeface="Consolas"/>
@@ -10538,7 +10651,7 @@
             <a:r>
               <a:rPr sz="1200" b="1">
                 <a:solidFill>
-                  <a:srgbClr val="D7FF3F"/>
+                  <a:srgbClr val="B5893A"/>
                 </a:solidFill>
                 <a:latin typeface="Consolas"/>
                 <a:ea typeface="Consolas"/>
@@ -10582,7 +10695,7 @@
             <a:r>
               <a:rPr sz="1000" b="0">
                 <a:solidFill>
-                  <a:srgbClr val="7E827E"/>
+                  <a:srgbClr val="6B6559"/>
                 </a:solidFill>
                 <a:latin typeface="Microsoft YaHei"/>
                 <a:ea typeface="Consolas"/>
@@ -10608,7 +10721,7 @@
             <a:avLst/>
           </a:prstGeom>
           <a:solidFill>
-            <a:srgbClr val="232625"/>
+            <a:srgbClr val="E3DFD5"/>
           </a:solidFill>
           <a:ln>
             <a:noFill/>
@@ -10648,7 +10761,7 @@
             <a:r>
               <a:rPr sz="950" b="0">
                 <a:solidFill>
-                  <a:srgbClr val="4B4F4B"/>
+                  <a:srgbClr val="9C968A"/>
                 </a:solidFill>
                 <a:latin typeface="Microsoft YaHei"/>
                 <a:ea typeface="Consolas"/>
@@ -10692,7 +10805,7 @@
             <a:r>
               <a:rPr sz="1000" b="0">
                 <a:solidFill>
-                  <a:srgbClr val="F2F2EF"/>
+                  <a:srgbClr val="1A1A1A"/>
                 </a:solidFill>
                 <a:latin typeface="Microsoft YaHei"/>
                 <a:ea typeface="Consolas"/>
@@ -10729,7 +10842,7 @@
             <a:r>
               <a:rPr sz="1000" b="0">
                 <a:solidFill>
-                  <a:srgbClr val="64748B"/>
+                  <a:srgbClr val="6B6559"/>
                 </a:solidFill>
                 <a:latin typeface="Consolas"/>
                 <a:ea typeface="Consolas"/>
@@ -10773,7 +10886,7 @@
             <a:avLst/>
           </a:prstGeom>
           <a:solidFill>
-            <a:srgbClr val="0B0C0B"/>
+            <a:srgbClr val="E8E3D7"/>
           </a:solidFill>
           <a:ln>
             <a:noFill/>
@@ -10813,7 +10926,7 @@
             <a:r>
               <a:rPr sz="950" b="0">
                 <a:solidFill>
-                  <a:srgbClr val="4B4F4B"/>
+                  <a:srgbClr val="9C968A"/>
                 </a:solidFill>
                 <a:latin typeface="Microsoft YaHei"/>
                 <a:ea typeface="Consolas"/>
@@ -10850,7 +10963,7 @@
             <a:r>
               <a:rPr sz="2700" b="1">
                 <a:solidFill>
-                  <a:srgbClr val="F2F2EF"/>
+                  <a:srgbClr val="1A1A1A"/>
                 </a:solidFill>
                 <a:latin typeface="Microsoft YaHei"/>
                 <a:ea typeface="Consolas"/>
@@ -10887,7 +11000,7 @@
             <a:r>
               <a:rPr sz="1100" b="0">
                 <a:solidFill>
-                  <a:srgbClr val="7E827E"/>
+                  <a:srgbClr val="6B6559"/>
                 </a:solidFill>
                 <a:latin typeface="Microsoft YaHei"/>
                 <a:ea typeface="Consolas"/>
@@ -10913,7 +11026,7 @@
             <a:avLst/>
           </a:prstGeom>
           <a:solidFill>
-            <a:srgbClr val="2B2F2E"/>
+            <a:srgbClr val="CFC9BB"/>
           </a:solidFill>
           <a:ln>
             <a:noFill/>
@@ -10977,7 +11090,7 @@
             <a:r>
               <a:rPr sz="950" b="0">
                 <a:solidFill>
-                  <a:srgbClr val="4B4F4B"/>
+                  <a:srgbClr val="9C968A"/>
                 </a:solidFill>
                 <a:latin typeface="Microsoft YaHei"/>
                 <a:ea typeface="Consolas"/>
@@ -11003,7 +11116,7 @@
             <a:avLst/>
           </a:prstGeom>
           <a:solidFill>
-            <a:srgbClr val="2B2F2E"/>
+            <a:srgbClr val="CFC9BB"/>
           </a:solidFill>
           <a:ln>
             <a:noFill/>
@@ -11043,7 +11156,7 @@
             <a:r>
               <a:rPr sz="1200" b="1">
                 <a:solidFill>
-                  <a:srgbClr val="D7FF3F"/>
+                  <a:srgbClr val="B5893A"/>
                 </a:solidFill>
                 <a:latin typeface="Consolas"/>
                 <a:ea typeface="Consolas"/>
@@ -11087,7 +11200,7 @@
             <a:r>
               <a:rPr sz="1000" b="0">
                 <a:solidFill>
-                  <a:srgbClr val="7E827E"/>
+                  <a:srgbClr val="6B6559"/>
                 </a:solidFill>
                 <a:latin typeface="Microsoft YaHei"/>
                 <a:ea typeface="Consolas"/>
@@ -11124,7 +11237,7 @@
             <a:r>
               <a:rPr sz="1200" b="1">
                 <a:solidFill>
-                  <a:srgbClr val="D7FF3F"/>
+                  <a:srgbClr val="B5893A"/>
                 </a:solidFill>
                 <a:latin typeface="Consolas"/>
                 <a:ea typeface="Consolas"/>
@@ -11168,7 +11281,7 @@
             <a:r>
               <a:rPr sz="1000" b="0">
                 <a:solidFill>
-                  <a:srgbClr val="7E827E"/>
+                  <a:srgbClr val="6B6559"/>
                 </a:solidFill>
                 <a:latin typeface="Microsoft YaHei"/>
                 <a:ea typeface="Consolas"/>
@@ -11205,7 +11318,7 @@
             <a:r>
               <a:rPr sz="1200" b="1">
                 <a:solidFill>
-                  <a:srgbClr val="D7FF3F"/>
+                  <a:srgbClr val="B5893A"/>
                 </a:solidFill>
                 <a:latin typeface="Consolas"/>
                 <a:ea typeface="Consolas"/>
@@ -11249,7 +11362,7 @@
             <a:r>
               <a:rPr sz="1000" b="0">
                 <a:solidFill>
-                  <a:srgbClr val="7E827E"/>
+                  <a:srgbClr val="6B6559"/>
                 </a:solidFill>
                 <a:latin typeface="Microsoft YaHei"/>
                 <a:ea typeface="Consolas"/>
@@ -11275,7 +11388,7 @@
             <a:avLst/>
           </a:prstGeom>
           <a:solidFill>
-            <a:srgbClr val="232625"/>
+            <a:srgbClr val="E3DFD5"/>
           </a:solidFill>
           <a:ln>
             <a:noFill/>
@@ -11315,7 +11428,7 @@
             <a:r>
               <a:rPr sz="950" b="0">
                 <a:solidFill>
-                  <a:srgbClr val="4B4F4B"/>
+                  <a:srgbClr val="9C968A"/>
                 </a:solidFill>
                 <a:latin typeface="Microsoft YaHei"/>
                 <a:ea typeface="Consolas"/>
@@ -11359,7 +11472,7 @@
             <a:r>
               <a:rPr sz="1000" b="0">
                 <a:solidFill>
-                  <a:srgbClr val="F2F2EF"/>
+                  <a:srgbClr val="1A1A1A"/>
                 </a:solidFill>
                 <a:latin typeface="Microsoft YaHei"/>
                 <a:ea typeface="Consolas"/>
@@ -11396,7 +11509,7 @@
             <a:r>
               <a:rPr sz="1000" b="0">
                 <a:solidFill>
-                  <a:srgbClr val="64748B"/>
+                  <a:srgbClr val="6B6559"/>
                 </a:solidFill>
                 <a:latin typeface="Consolas"/>
                 <a:ea typeface="Consolas"/>
